--- a/deliverables/Poster Presentation.pptx
+++ b/deliverables/Poster Presentation.pptx
@@ -4973,7 +4973,7 @@
                 </a:solidFill>
                 <a:latin typeface="Calibri"/>
               </a:rPr>
-              <a:t>Fifteen per World Bank income group, all above a million people, selected so income and distance from the equator pull apart: ρ = 0.24 here against 0.46 worldwide.</a:t>
+              <a:t>Fifteen per World Bank income group, all above a million people, selected so income and distance from the equator pull apart: ρ = 0.25 here against 0.49 worldwide.</a:t>
             </a:r>
           </a:p>
         </p:txBody>

--- a/deliverables/Poster Presentation.pptx
+++ b/deliverables/Poster Presentation.pptx
@@ -3097,7 +3097,7 @@
         <p:spPr>
           <a:xfrm>
             <a:off x="1005840" y="1005840"/>
-            <a:ext cx="19933920" cy="1463040"/>
+            <a:ext cx="19933920" cy="1536192"/>
           </a:xfrm>
           <a:prstGeom prst="rect">
             <a:avLst/>
@@ -3119,7 +3119,7 @@
               </a:spcAft>
             </a:pPr>
             <a:r>
-              <a:rPr sz="11200" b="1" i="0">
+              <a:rPr sz="12000" b="1" i="0">
                 <a:solidFill>
                   <a:srgbClr val="1A1A1A"/>
                 </a:solidFill>
@@ -3138,8 +3138,8 @@
         </p:nvSpPr>
         <p:spPr>
           <a:xfrm>
-            <a:off x="1005840" y="2450592"/>
-            <a:ext cx="18653760" cy="1234440"/>
+            <a:off x="1005840" y="2596896"/>
+            <a:ext cx="19385280" cy="1254760"/>
           </a:xfrm>
           <a:prstGeom prst="rect">
             <a:avLst/>
@@ -3154,20 +3154,20 @@
           <a:p>
             <a:pPr algn="l">
               <a:lnSpc>
-                <a:spcPct val="120000"/>
+                <a:spcPct val="118000"/>
               </a:lnSpc>
               <a:spcAft>
                 <a:spcPts val="0"/>
               </a:spcAft>
             </a:pPr>
             <a:r>
-              <a:rPr sz="2800" b="0" i="1">
+              <a:rPr sz="3800" b="0" i="1">
                 <a:solidFill>
                   <a:srgbClr val="5F6670"/>
                 </a:solidFill>
                 <a:latin typeface="Cambria"/>
               </a:rPr>
-              <a:t>Does an AI image model picture poorer countries in warmer colour? 61,488 images say it pictures  drier  ones that way — and draws Asia warmer than its climate accounts for.</a:t>
+              <a:t>An AI image model pictures drier countries in warmer colour — not poorer ones. And it draws Asia warmer than any climate explains.</a:t>
             </a:r>
           </a:p>
         </p:txBody>
@@ -3180,8 +3180,8 @@
         </p:nvSpPr>
         <p:spPr>
           <a:xfrm>
-            <a:off x="1005840" y="3712464"/>
-            <a:ext cx="19933920" cy="292608"/>
+            <a:off x="1005840" y="4016248"/>
+            <a:ext cx="19933920" cy="347472"/>
           </a:xfrm>
           <a:prstGeom prst="rect">
             <a:avLst/>
@@ -3203,7 +3203,7 @@
               </a:spcAft>
             </a:pPr>
             <a:r>
-              <a:rPr sz="1800" b="0" i="0">
+              <a:rPr sz="2200" b="0" i="0">
                 <a:solidFill>
                   <a:srgbClr val="5F6670"/>
                 </a:solidFill>
@@ -3222,8 +3222,8 @@
         </p:nvSpPr>
         <p:spPr>
           <a:xfrm>
-            <a:off x="1005840" y="4187952"/>
-            <a:ext cx="19933920" cy="16459"/>
+            <a:off x="1005840" y="4546600"/>
+            <a:ext cx="19933920" cy="18288"/>
           </a:xfrm>
           <a:prstGeom prst="rect">
             <a:avLst/>
@@ -3266,8 +3266,8 @@
         </p:nvSpPr>
         <p:spPr>
           <a:xfrm>
-            <a:off x="1005840" y="4553712"/>
-            <a:ext cx="4805172" cy="1225296"/>
+            <a:off x="1005840" y="4930648"/>
+            <a:ext cx="4805172" cy="1572768"/>
           </a:xfrm>
           <a:prstGeom prst="roundRect">
             <a:avLst>
@@ -3312,8 +3312,8 @@
         </p:nvSpPr>
         <p:spPr>
           <a:xfrm>
-            <a:off x="1261872" y="4690872"/>
-            <a:ext cx="4293108" cy="603504"/>
+            <a:off x="1298448" y="5113528"/>
+            <a:ext cx="4219956" cy="768096"/>
           </a:xfrm>
           <a:prstGeom prst="rect">
             <a:avLst/>
@@ -3335,7 +3335,7 @@
               </a:spcAft>
             </a:pPr>
             <a:r>
-              <a:rPr sz="4600" b="1" i="0">
+              <a:rPr sz="6400" b="1" i="0">
                 <a:solidFill>
                   <a:srgbClr val="B07C1F"/>
                 </a:solidFill>
@@ -3354,8 +3354,8 @@
         </p:nvSpPr>
         <p:spPr>
           <a:xfrm>
-            <a:off x="1261872" y="5321808"/>
-            <a:ext cx="4293108" cy="384048"/>
+            <a:off x="1298448" y="5918200"/>
+            <a:ext cx="4219956" cy="512064"/>
           </a:xfrm>
           <a:prstGeom prst="rect">
             <a:avLst/>
@@ -3370,14 +3370,14 @@
           <a:p>
             <a:pPr algn="l">
               <a:lnSpc>
-                <a:spcPct val="110000"/>
+                <a:spcPct val="115000"/>
               </a:lnSpc>
               <a:spcAft>
                 <a:spcPts val="0"/>
               </a:spcAft>
             </a:pPr>
             <a:r>
-              <a:rPr sz="1400" b="0" i="0">
+              <a:rPr sz="2100" b="0" i="0">
                 <a:solidFill>
                   <a:srgbClr val="5F6670"/>
                 </a:solidFill>
@@ -3396,8 +3396,8 @@
         </p:nvSpPr>
         <p:spPr>
           <a:xfrm>
-            <a:off x="6048756" y="4553712"/>
-            <a:ext cx="4805172" cy="1225296"/>
+            <a:off x="6048756" y="4930648"/>
+            <a:ext cx="4805172" cy="1572768"/>
           </a:xfrm>
           <a:prstGeom prst="roundRect">
             <a:avLst>
@@ -3442,8 +3442,8 @@
         </p:nvSpPr>
         <p:spPr>
           <a:xfrm>
-            <a:off x="6304788" y="4690872"/>
-            <a:ext cx="4293108" cy="603504"/>
+            <a:off x="6341364" y="5113528"/>
+            <a:ext cx="4219956" cy="768096"/>
           </a:xfrm>
           <a:prstGeom prst="rect">
             <a:avLst/>
@@ -3465,7 +3465,7 @@
               </a:spcAft>
             </a:pPr>
             <a:r>
-              <a:rPr sz="4600" b="1" i="0">
+              <a:rPr sz="6400" b="1" i="0">
                 <a:solidFill>
                   <a:srgbClr val="B07C1F"/>
                 </a:solidFill>
@@ -3484,8 +3484,8 @@
         </p:nvSpPr>
         <p:spPr>
           <a:xfrm>
-            <a:off x="6304788" y="5321808"/>
-            <a:ext cx="4293108" cy="384048"/>
+            <a:off x="6341364" y="5918200"/>
+            <a:ext cx="4219956" cy="512064"/>
           </a:xfrm>
           <a:prstGeom prst="rect">
             <a:avLst/>
@@ -3500,20 +3500,20 @@
           <a:p>
             <a:pPr algn="l">
               <a:lnSpc>
-                <a:spcPct val="110000"/>
+                <a:spcPct val="115000"/>
               </a:lnSpc>
               <a:spcAft>
                 <a:spcPts val="0"/>
               </a:spcAft>
             </a:pPr>
             <a:r>
-              <a:rPr sz="1400" b="0" i="0">
+              <a:rPr sz="2100" b="0" i="0">
                 <a:solidFill>
                   <a:srgbClr val="5F6670"/>
                 </a:solidFill>
                 <a:latin typeface="Calibri"/>
               </a:rPr>
-              <a:t>countries × kinds of place</a:t>
+              <a:t>countries × places</a:t>
             </a:r>
           </a:p>
         </p:txBody>
@@ -3526,8 +3526,8 @@
         </p:nvSpPr>
         <p:spPr>
           <a:xfrm>
-            <a:off x="11091672" y="4553712"/>
-            <a:ext cx="4805172" cy="1225296"/>
+            <a:off x="11091672" y="4930648"/>
+            <a:ext cx="4805172" cy="1572768"/>
           </a:xfrm>
           <a:prstGeom prst="roundRect">
             <a:avLst>
@@ -3572,8 +3572,8 @@
         </p:nvSpPr>
         <p:spPr>
           <a:xfrm>
-            <a:off x="11347703" y="4690872"/>
-            <a:ext cx="4293108" cy="603504"/>
+            <a:off x="11384280" y="5113528"/>
+            <a:ext cx="4219956" cy="768096"/>
           </a:xfrm>
           <a:prstGeom prst="rect">
             <a:avLst/>
@@ -3595,7 +3595,7 @@
               </a:spcAft>
             </a:pPr>
             <a:r>
-              <a:rPr sz="4600" b="1" i="0">
+              <a:rPr sz="6400" b="1" i="0">
                 <a:solidFill>
                   <a:srgbClr val="B07C1F"/>
                 </a:solidFill>
@@ -3614,8 +3614,8 @@
         </p:nvSpPr>
         <p:spPr>
           <a:xfrm>
-            <a:off x="11347703" y="5321808"/>
-            <a:ext cx="4293108" cy="384048"/>
+            <a:off x="11384280" y="5918200"/>
+            <a:ext cx="4219956" cy="512064"/>
           </a:xfrm>
           <a:prstGeom prst="rect">
             <a:avLst/>
@@ -3630,14 +3630,14 @@
           <a:p>
             <a:pPr algn="l">
               <a:lnSpc>
-                <a:spcPct val="110000"/>
+                <a:spcPct val="115000"/>
               </a:lnSpc>
               <a:spcAft>
                 <a:spcPts val="0"/>
               </a:spcAft>
             </a:pPr>
             <a:r>
-              <a:rPr sz="1400" b="0" i="0">
+              <a:rPr sz="2100" b="0" i="0">
                 <a:solidFill>
                   <a:srgbClr val="5F6670"/>
                 </a:solidFill>
@@ -3656,8 +3656,8 @@
         </p:nvSpPr>
         <p:spPr>
           <a:xfrm>
-            <a:off x="16134588" y="4553712"/>
-            <a:ext cx="4805172" cy="1225296"/>
+            <a:off x="16134588" y="4930648"/>
+            <a:ext cx="4805172" cy="1572768"/>
           </a:xfrm>
           <a:prstGeom prst="roundRect">
             <a:avLst>
@@ -3702,8 +3702,8 @@
         </p:nvSpPr>
         <p:spPr>
           <a:xfrm>
-            <a:off x="16390620" y="4690872"/>
-            <a:ext cx="4293108" cy="603504"/>
+            <a:off x="16427196" y="5113528"/>
+            <a:ext cx="4219956" cy="768096"/>
           </a:xfrm>
           <a:prstGeom prst="rect">
             <a:avLst/>
@@ -3725,7 +3725,7 @@
               </a:spcAft>
             </a:pPr>
             <a:r>
-              <a:rPr sz="4600" b="1" i="0">
+              <a:rPr sz="6400" b="1" i="0">
                 <a:solidFill>
                   <a:srgbClr val="B07C1F"/>
                 </a:solidFill>
@@ -3744,8 +3744,8 @@
         </p:nvSpPr>
         <p:spPr>
           <a:xfrm>
-            <a:off x="16390620" y="5321808"/>
-            <a:ext cx="4293108" cy="384048"/>
+            <a:off x="16427196" y="5918200"/>
+            <a:ext cx="4219956" cy="512064"/>
           </a:xfrm>
           <a:prstGeom prst="rect">
             <a:avLst/>
@@ -3760,14 +3760,14 @@
           <a:p>
             <a:pPr algn="l">
               <a:lnSpc>
-                <a:spcPct val="110000"/>
+                <a:spcPct val="115000"/>
               </a:lnSpc>
               <a:spcAft>
                 <a:spcPts val="0"/>
               </a:spcAft>
             </a:pPr>
             <a:r>
-              <a:rPr sz="1400" b="0" i="0">
+              <a:rPr sz="2100" b="0" i="0">
                 <a:solidFill>
                   <a:srgbClr val="5F6670"/>
                 </a:solidFill>
@@ -3786,8 +3786,8 @@
         </p:nvSpPr>
         <p:spPr>
           <a:xfrm>
-            <a:off x="1005840" y="6236208"/>
-            <a:ext cx="13898880" cy="402336"/>
+            <a:off x="1005840" y="6887464"/>
+            <a:ext cx="11612880" cy="693420"/>
           </a:xfrm>
           <a:prstGeom prst="rect">
             <a:avLst/>
@@ -3809,13 +3809,13 @@
               </a:spcAft>
             </a:pPr>
             <a:r>
-              <a:rPr sz="2600" b="1" i="0">
+              <a:rPr sz="4200" b="1" i="0">
                 <a:solidFill>
                   <a:srgbClr val="1A1A1A"/>
                 </a:solidFill>
                 <a:latin typeface="Cambria"/>
               </a:rPr>
-              <a:t>One sentence, one camera position, one seed — only the country changed</a:t>
+              <a:t>Only the country changed</a:t>
             </a:r>
           </a:p>
         </p:txBody>
@@ -3828,8 +3828,8 @@
         </p:nvSpPr>
         <p:spPr>
           <a:xfrm>
-            <a:off x="1005840" y="6693408"/>
-            <a:ext cx="13898880" cy="256032"/>
+            <a:off x="1005840" y="7745476"/>
+            <a:ext cx="11612880" cy="329184"/>
           </a:xfrm>
           <a:prstGeom prst="rect">
             <a:avLst/>
@@ -3851,13 +3851,13 @@
               </a:spcAft>
             </a:pPr>
             <a:r>
-              <a:rPr sz="1400" b="1" i="0">
+              <a:rPr sz="2100" b="1" i="0">
                 <a:solidFill>
                   <a:srgbClr val="B07C1F"/>
                 </a:solidFill>
                 <a:latin typeface="Calibri"/>
               </a:rPr>
-              <a:t>THE FOUR THE MODEL DRAWS WARMEST</a:t>
+              <a:t>THE FOUR IT DRAWS WARMEST</a:t>
             </a:r>
           </a:p>
         </p:txBody>
@@ -3870,8 +3870,8 @@
         </p:nvSpPr>
         <p:spPr>
           <a:xfrm>
-            <a:off x="1005840" y="6986016"/>
-            <a:ext cx="3426713" cy="274320"/>
+            <a:off x="1005840" y="8129524"/>
+            <a:ext cx="2855213" cy="384048"/>
           </a:xfrm>
           <a:prstGeom prst="rect">
             <a:avLst/>
@@ -3893,7 +3893,7 @@
               </a:spcAft>
             </a:pPr>
             <a:r>
-              <a:rPr sz="1600" b="1" i="0">
+              <a:rPr sz="2500" b="1" i="0">
                 <a:solidFill>
                   <a:srgbClr val="1A1A1A"/>
                 </a:solidFill>
@@ -3912,7 +3912,7 @@
               </a:spcAft>
             </a:pPr>
             <a:r>
-              <a:rPr sz="1600" b="1" i="0">
+              <a:rPr sz="2500" b="1" i="0">
                 <a:solidFill>
                   <a:srgbClr val="B07C1F"/>
                 </a:solidFill>
@@ -3931,8 +3931,8 @@
         </p:nvSpPr>
         <p:spPr>
           <a:xfrm>
-            <a:off x="4496562" y="6986016"/>
-            <a:ext cx="3426713" cy="274320"/>
+            <a:off x="3925061" y="8129524"/>
+            <a:ext cx="2855213" cy="384048"/>
           </a:xfrm>
           <a:prstGeom prst="rect">
             <a:avLst/>
@@ -3954,7 +3954,7 @@
               </a:spcAft>
             </a:pPr>
             <a:r>
-              <a:rPr sz="1600" b="1" i="0">
+              <a:rPr sz="2500" b="1" i="0">
                 <a:solidFill>
                   <a:srgbClr val="1A1A1A"/>
                 </a:solidFill>
@@ -3973,7 +3973,7 @@
               </a:spcAft>
             </a:pPr>
             <a:r>
-              <a:rPr sz="1600" b="1" i="0">
+              <a:rPr sz="2500" b="1" i="0">
                 <a:solidFill>
                   <a:srgbClr val="B07C1F"/>
                 </a:solidFill>
@@ -3992,8 +3992,8 @@
         </p:nvSpPr>
         <p:spPr>
           <a:xfrm>
-            <a:off x="7987283" y="6986016"/>
-            <a:ext cx="3426713" cy="274320"/>
+            <a:off x="6844283" y="8129524"/>
+            <a:ext cx="2855213" cy="384048"/>
           </a:xfrm>
           <a:prstGeom prst="rect">
             <a:avLst/>
@@ -4015,7 +4015,7 @@
               </a:spcAft>
             </a:pPr>
             <a:r>
-              <a:rPr sz="1600" b="1" i="0">
+              <a:rPr sz="2500" b="1" i="0">
                 <a:solidFill>
                   <a:srgbClr val="1A1A1A"/>
                 </a:solidFill>
@@ -4034,7 +4034,7 @@
               </a:spcAft>
             </a:pPr>
             <a:r>
-              <a:rPr sz="1600" b="1" i="0">
+              <a:rPr sz="2500" b="1" i="0">
                 <a:solidFill>
                   <a:srgbClr val="B07C1F"/>
                 </a:solidFill>
@@ -4053,8 +4053,8 @@
         </p:nvSpPr>
         <p:spPr>
           <a:xfrm>
-            <a:off x="11478005" y="6986016"/>
-            <a:ext cx="3426713" cy="274320"/>
+            <a:off x="9763505" y="8129524"/>
+            <a:ext cx="2855213" cy="384048"/>
           </a:xfrm>
           <a:prstGeom prst="rect">
             <a:avLst/>
@@ -4076,7 +4076,7 @@
               </a:spcAft>
             </a:pPr>
             <a:r>
-              <a:rPr sz="1600" b="1" i="0">
+              <a:rPr sz="2500" b="1" i="0">
                 <a:solidFill>
                   <a:srgbClr val="1A1A1A"/>
                 </a:solidFill>
@@ -4095,7 +4095,7 @@
               </a:spcAft>
             </a:pPr>
             <a:r>
-              <a:rPr sz="1600" b="1" i="0">
+              <a:rPr sz="2500" b="1" i="0">
                 <a:solidFill>
                   <a:srgbClr val="B07C1F"/>
                 </a:solidFill>
@@ -4122,8 +4122,8 @@
         </p:blipFill>
         <p:spPr>
           <a:xfrm>
-            <a:off x="1005840" y="7287768"/>
-            <a:ext cx="13898880" cy="3439452"/>
+            <a:off x="1005840" y="8550148"/>
+            <a:ext cx="11612880" cy="1916770"/>
           </a:xfrm>
           <a:prstGeom prst="rect">
             <a:avLst/>
@@ -4138,8 +4138,8 @@
         </p:nvSpPr>
         <p:spPr>
           <a:xfrm>
-            <a:off x="1005840" y="10964964"/>
-            <a:ext cx="13898880" cy="256032"/>
+            <a:off x="1005840" y="10686374"/>
+            <a:ext cx="11612880" cy="329184"/>
           </a:xfrm>
           <a:prstGeom prst="rect">
             <a:avLst/>
@@ -4161,7 +4161,7 @@
               </a:spcAft>
             </a:pPr>
             <a:r>
-              <a:rPr sz="1400" b="1" i="0">
+              <a:rPr sz="2100" b="1" i="0">
                 <a:solidFill>
                   <a:srgbClr val="2F6CA8"/>
                 </a:solidFill>
@@ -4180,8 +4180,8 @@
         </p:nvSpPr>
         <p:spPr>
           <a:xfrm>
-            <a:off x="1005840" y="11257572"/>
-            <a:ext cx="3426713" cy="274320"/>
+            <a:off x="1005840" y="11070422"/>
+            <a:ext cx="2855213" cy="384048"/>
           </a:xfrm>
           <a:prstGeom prst="rect">
             <a:avLst/>
@@ -4203,7 +4203,7 @@
               </a:spcAft>
             </a:pPr>
             <a:r>
-              <a:rPr sz="1600" b="1" i="0">
+              <a:rPr sz="2500" b="1" i="0">
                 <a:solidFill>
                   <a:srgbClr val="1A1A1A"/>
                 </a:solidFill>
@@ -4222,7 +4222,7 @@
               </a:spcAft>
             </a:pPr>
             <a:r>
-              <a:rPr sz="1600" b="1" i="0">
+              <a:rPr sz="2500" b="1" i="0">
                 <a:solidFill>
                   <a:srgbClr val="2F6CA8"/>
                 </a:solidFill>
@@ -4241,8 +4241,8 @@
         </p:nvSpPr>
         <p:spPr>
           <a:xfrm>
-            <a:off x="4496562" y="11257572"/>
-            <a:ext cx="3426713" cy="274320"/>
+            <a:off x="3925061" y="11070422"/>
+            <a:ext cx="2855213" cy="384048"/>
           </a:xfrm>
           <a:prstGeom prst="rect">
             <a:avLst/>
@@ -4264,7 +4264,7 @@
               </a:spcAft>
             </a:pPr>
             <a:r>
-              <a:rPr sz="1600" b="1" i="0">
+              <a:rPr sz="2500" b="1" i="0">
                 <a:solidFill>
                   <a:srgbClr val="1A1A1A"/>
                 </a:solidFill>
@@ -4283,7 +4283,7 @@
               </a:spcAft>
             </a:pPr>
             <a:r>
-              <a:rPr sz="1600" b="1" i="0">
+              <a:rPr sz="2500" b="1" i="0">
                 <a:solidFill>
                   <a:srgbClr val="2F6CA8"/>
                 </a:solidFill>
@@ -4302,8 +4302,8 @@
         </p:nvSpPr>
         <p:spPr>
           <a:xfrm>
-            <a:off x="7987283" y="11257572"/>
-            <a:ext cx="3426713" cy="274320"/>
+            <a:off x="6844283" y="11070422"/>
+            <a:ext cx="2855213" cy="384048"/>
           </a:xfrm>
           <a:prstGeom prst="rect">
             <a:avLst/>
@@ -4325,7 +4325,7 @@
               </a:spcAft>
             </a:pPr>
             <a:r>
-              <a:rPr sz="1600" b="1" i="0">
+              <a:rPr sz="2500" b="1" i="0">
                 <a:solidFill>
                   <a:srgbClr val="1A1A1A"/>
                 </a:solidFill>
@@ -4344,7 +4344,7 @@
               </a:spcAft>
             </a:pPr>
             <a:r>
-              <a:rPr sz="1600" b="1" i="0">
+              <a:rPr sz="2500" b="1" i="0">
                 <a:solidFill>
                   <a:srgbClr val="2F6CA8"/>
                 </a:solidFill>
@@ -4363,8 +4363,8 @@
         </p:nvSpPr>
         <p:spPr>
           <a:xfrm>
-            <a:off x="11478005" y="11257572"/>
-            <a:ext cx="3426713" cy="274320"/>
+            <a:off x="9763505" y="11070422"/>
+            <a:ext cx="2855213" cy="384048"/>
           </a:xfrm>
           <a:prstGeom prst="rect">
             <a:avLst/>
@@ -4386,7 +4386,7 @@
               </a:spcAft>
             </a:pPr>
             <a:r>
-              <a:rPr sz="1600" b="1" i="0">
+              <a:rPr sz="2500" b="1" i="0">
                 <a:solidFill>
                   <a:srgbClr val="1A1A1A"/>
                 </a:solidFill>
@@ -4405,7 +4405,7 @@
               </a:spcAft>
             </a:pPr>
             <a:r>
-              <a:rPr sz="1600" b="1" i="0">
+              <a:rPr sz="2500" b="1" i="0">
                 <a:solidFill>
                   <a:srgbClr val="2F6CA8"/>
                 </a:solidFill>
@@ -4432,8 +4432,8 @@
         </p:blipFill>
         <p:spPr>
           <a:xfrm>
-            <a:off x="1005840" y="11559324"/>
-            <a:ext cx="13898880" cy="3439452"/>
+            <a:off x="1005840" y="11491046"/>
+            <a:ext cx="11612880" cy="1916770"/>
           </a:xfrm>
           <a:prstGeom prst="rect">
             <a:avLst/>
@@ -4448,8 +4448,8 @@
         </p:nvSpPr>
         <p:spPr>
           <a:xfrm>
-            <a:off x="15544800" y="6236208"/>
-            <a:ext cx="5394959" cy="365760"/>
+            <a:off x="13258799" y="6887464"/>
+            <a:ext cx="7680960" cy="457200"/>
           </a:xfrm>
           <a:prstGeom prst="rect">
             <a:avLst/>
@@ -4471,7 +4471,7 @@
               </a:spcAft>
             </a:pPr>
             <a:r>
-              <a:rPr sz="2400" b="1" i="0">
+              <a:rPr sz="2800" b="1" i="0">
                 <a:solidFill>
                   <a:srgbClr val="1A1A1A"/>
                 </a:solidFill>
@@ -4490,8 +4490,8 @@
         </p:nvSpPr>
         <p:spPr>
           <a:xfrm>
-            <a:off x="15544800" y="6656832"/>
-            <a:ext cx="5394959" cy="3108960"/>
+            <a:off x="13258799" y="7436103"/>
+            <a:ext cx="7680960" cy="1584960"/>
           </a:xfrm>
           <a:prstGeom prst="rect">
             <a:avLst/>
@@ -4513,13 +4513,13 @@
               </a:spcAft>
             </a:pPr>
             <a:r>
-              <a:rPr sz="1500" b="0" i="0">
+              <a:rPr sz="2400" b="0" i="0">
                 <a:solidFill>
                   <a:srgbClr val="1A1A1A"/>
                 </a:solidFill>
                 <a:latin typeface="Calibri"/>
               </a:rPr>
-              <a:t>Film colours places. A sepia wash over Mexico; dust and amber for “somewhere dangerous.” A yellow filter tells an audience that a place is poor, hot and unsafe before a line is spoken. An image model trained on pictures like those may have learned the habit. This project asks whether it did — and whether the countries it warms are the poorer ones.</a:t>
+              <a:t>Film colours places: a sepia wash over Mexico, dust and amber for “somewhere dangerous.” A model trained on those pictures may have learned the habit. Does it warm the countries that are poorer?</a:t>
             </a:r>
           </a:p>
         </p:txBody>
@@ -4532,8 +4532,8 @@
         </p:nvSpPr>
         <p:spPr>
           <a:xfrm>
-            <a:off x="15544800" y="9857232"/>
-            <a:ext cx="5394959" cy="329184"/>
+            <a:off x="13258799" y="9523984"/>
+            <a:ext cx="7680960" cy="420624"/>
           </a:xfrm>
           <a:prstGeom prst="rect">
             <a:avLst/>
@@ -4555,7 +4555,7 @@
               </a:spcAft>
             </a:pPr>
             <a:r>
-              <a:rPr sz="1900" b="1" i="0">
+              <a:rPr sz="2800" b="1" i="0">
                 <a:solidFill>
                   <a:srgbClr val="1A1A1A"/>
                 </a:solidFill>
@@ -4574,8 +4574,8 @@
         </p:nvSpPr>
         <p:spPr>
           <a:xfrm>
-            <a:off x="15544800" y="10241280"/>
-            <a:ext cx="5394959" cy="3291840"/>
+            <a:off x="13258799" y="10036048"/>
+            <a:ext cx="7680960" cy="1386840"/>
           </a:xfrm>
           <a:prstGeom prst="rect">
             <a:avLst/>
@@ -4597,13 +4597,13 @@
               </a:spcAft>
             </a:pPr>
             <a:r>
-              <a:rPr sz="1500" b="0" i="0">
+              <a:rPr sz="2100" b="0" i="0">
                 <a:solidFill>
                   <a:srgbClr val="5F6670"/>
                 </a:solidFill>
                 <a:latin typeface="Calibri"/>
               </a:rPr>
-              <a:t>Image i of every prompt is generated from the same seed, so all eight pictures start from identical noise and the street recedes the same way in each. The only difference between one cell and the next is the country named in the sentence. Figures are the country's standing on the yellow–blue cast, in country-to-country standard deviations.</a:t>
+              <a:t>Image 1 of every prompt uses the same seed, so all eight start from identical noise and the street recedes the same way. Only the country in the sentence differs. Figures are standard deviations from the average country.</a:t>
             </a:r>
           </a:p>
         </p:txBody>
@@ -4616,8 +4616,8 @@
         </p:nvSpPr>
         <p:spPr>
           <a:xfrm>
-            <a:off x="1005840" y="15501696"/>
-            <a:ext cx="13898880" cy="402336"/>
+            <a:off x="1005840" y="13865017"/>
+            <a:ext cx="11612880" cy="1386840"/>
           </a:xfrm>
           <a:prstGeom prst="rect">
             <a:avLst/>
@@ -4639,7 +4639,7 @@
               </a:spcAft>
             </a:pPr>
             <a:r>
-              <a:rPr sz="2600" b="1" i="0">
+              <a:rPr sz="4200" b="1" i="0">
                 <a:solidFill>
                   <a:srgbClr val="1A1A1A"/>
                 </a:solidFill>
@@ -4658,8 +4658,8 @@
         </p:nvSpPr>
         <p:spPr>
           <a:xfrm>
-            <a:off x="15544800" y="15538272"/>
-            <a:ext cx="5394959" cy="1097280"/>
+            <a:off x="13258799" y="13919881"/>
+            <a:ext cx="7680960" cy="693420"/>
           </a:xfrm>
           <a:prstGeom prst="rect">
             <a:avLst/>
@@ -4681,13 +4681,13 @@
               </a:spcAft>
             </a:pPr>
             <a:r>
-              <a:rPr sz="1450" b="0" i="0">
+              <a:rPr sz="2100" b="0" i="0">
                 <a:solidFill>
                   <a:srgbClr val="5F6670"/>
                 </a:solidFill>
                 <a:latin typeface="Calibri"/>
               </a:rPr>
-              <a:t>Amber: warmer than the average country. Blue: cooler. Grey: within a third of a standard deviation of the average. Pale grey: not in this run.</a:t>
+              <a:t>Amber: warmer than the average country. Blue: cooler. Grey: the middle of the pack. Pale: not in this run.</a:t>
             </a:r>
           </a:p>
         </p:txBody>
@@ -4700,8 +4700,8 @@
         </p:nvSpPr>
         <p:spPr>
           <a:xfrm>
-            <a:off x="15544800" y="16736136"/>
-            <a:ext cx="5394959" cy="365760"/>
+            <a:off x="13258799" y="15015637"/>
+            <a:ext cx="7680960" cy="457200"/>
           </a:xfrm>
           <a:prstGeom prst="rect">
             <a:avLst/>
@@ -4723,7 +4723,7 @@
               </a:spcAft>
             </a:pPr>
             <a:r>
-              <a:rPr sz="2200" b="1" i="0">
+              <a:rPr sz="2800" b="1" i="0">
                 <a:solidFill>
                   <a:srgbClr val="1A1A1A"/>
                 </a:solidFill>
@@ -4742,398 +4742,8 @@
         </p:nvSpPr>
         <p:spPr>
           <a:xfrm>
-            <a:off x="15544800" y="17175048"/>
-            <a:ext cx="5394959" cy="1019556"/>
-          </a:xfrm>
-          <a:prstGeom prst="rect">
-            <a:avLst/>
-          </a:prstGeom>
-          <a:noFill/>
-        </p:spPr>
-        <p:txBody>
-          <a:bodyPr wrap="square" lIns="0" rIns="0" tIns="0" bIns="0" anchor="t">
-            <a:spAutoFit/>
-          </a:bodyPr>
-          <a:lstStyle/>
-          <a:p>
-            <a:pPr algn="l">
-              <a:lnSpc>
-                <a:spcPct val="122000"/>
-              </a:lnSpc>
-              <a:spcAft>
-                <a:spcPts val="0"/>
-              </a:spcAft>
-            </a:pPr>
-            <a:r>
-              <a:rPr sz="1350" b="1" i="0">
-                <a:solidFill>
-                  <a:srgbClr val="1A1A1A"/>
-                </a:solidFill>
-                <a:latin typeface="Calibri"/>
-              </a:rPr>
-              <a:t>One sentence, one camera  </a:t>
-            </a:r>
-          </a:p>
-          <a:p>
-            <a:pPr algn="l">
-              <a:lnSpc>
-                <a:spcPct val="122000"/>
-              </a:lnSpc>
-              <a:spcAft>
-                <a:spcPts val="0"/>
-              </a:spcAft>
-            </a:pPr>
-            <a:r>
-              <a:rPr sz="1350" b="0" i="0">
-                <a:solidFill>
-                  <a:srgbClr val="5F6670"/>
-                </a:solidFill>
-                <a:latin typeface="Calibri"/>
-              </a:rPr>
-              <a:t>“A photograph of {place} in {country}, {view}.” The view is fixed per kind of place, so two countries' pictures differ only because the country does.</a:t>
-            </a:r>
-          </a:p>
-        </p:txBody>
-      </p:sp>
-      <p:sp>
-        <p:nvSpPr>
-          <p:cNvPr id="39" name="TextBox 38"/>
-          <p:cNvSpPr txBox="1"/>
-          <p:nvPr/>
-        </p:nvSpPr>
-        <p:spPr>
-          <a:xfrm>
-            <a:off x="15544800" y="18304332"/>
-            <a:ext cx="5394959" cy="1019556"/>
-          </a:xfrm>
-          <a:prstGeom prst="rect">
-            <a:avLst/>
-          </a:prstGeom>
-          <a:noFill/>
-        </p:spPr>
-        <p:txBody>
-          <a:bodyPr wrap="square" lIns="0" rIns="0" tIns="0" bIns="0" anchor="t">
-            <a:spAutoFit/>
-          </a:bodyPr>
-          <a:lstStyle/>
-          <a:p>
-            <a:pPr algn="l">
-              <a:lnSpc>
-                <a:spcPct val="122000"/>
-              </a:lnSpc>
-              <a:spcAft>
-                <a:spcPts val="0"/>
-              </a:spcAft>
-            </a:pPr>
-            <a:r>
-              <a:rPr sz="1350" b="1" i="0">
-                <a:solidFill>
-                  <a:srgbClr val="1A1A1A"/>
-                </a:solidFill>
-                <a:latin typeface="Calibri"/>
-              </a:rPr>
-              <a:t>The light is pinned  </a:t>
-            </a:r>
-          </a:p>
-          <a:p>
-            <a:pPr algn="l">
-              <a:lnSpc>
-                <a:spcPct val="122000"/>
-              </a:lnSpc>
-              <a:spcAft>
-                <a:spcPts val="0"/>
-              </a:spcAft>
-            </a:pPr>
-            <a:r>
-              <a:rPr sz="1350" b="0" i="0">
-                <a:solidFill>
-                  <a:srgbClr val="5F6670"/>
-                </a:solidFill>
-                <a:latin typeface="Calibri"/>
-              </a:rPr>
-              <a:t>Each prompt runs twice: free, and ending “at noon under a clear sky with the sun high overhead.” It names no colour, so a gap that survives it is a grade, not an hour.</a:t>
-            </a:r>
-          </a:p>
-        </p:txBody>
-      </p:sp>
-      <p:sp>
-        <p:nvSpPr>
-          <p:cNvPr id="40" name="TextBox 39"/>
-          <p:cNvSpPr txBox="1"/>
-          <p:nvPr/>
-        </p:nvSpPr>
-        <p:spPr>
-          <a:xfrm>
-            <a:off x="15544800" y="19433616"/>
-            <a:ext cx="5394959" cy="626364"/>
-          </a:xfrm>
-          <a:prstGeom prst="rect">
-            <a:avLst/>
-          </a:prstGeom>
-          <a:noFill/>
-        </p:spPr>
-        <p:txBody>
-          <a:bodyPr wrap="square" lIns="0" rIns="0" tIns="0" bIns="0" anchor="t">
-            <a:spAutoFit/>
-          </a:bodyPr>
-          <a:lstStyle/>
-          <a:p>
-            <a:pPr algn="l">
-              <a:lnSpc>
-                <a:spcPct val="122000"/>
-              </a:lnSpc>
-              <a:spcAft>
-                <a:spcPts val="0"/>
-              </a:spcAft>
-            </a:pPr>
-            <a:r>
-              <a:rPr sz="1350" b="1" i="0">
-                <a:solidFill>
-                  <a:srgbClr val="1A1A1A"/>
-                </a:solidFill>
-                <a:latin typeface="Calibri"/>
-              </a:rPr>
-              <a:t>A zero to measure from  </a:t>
-            </a:r>
-          </a:p>
-          <a:p>
-            <a:pPr algn="l">
-              <a:lnSpc>
-                <a:spcPct val="122000"/>
-              </a:lnSpc>
-              <a:spcAft>
-                <a:spcPts val="0"/>
-              </a:spcAft>
-            </a:pPr>
-            <a:r>
-              <a:rPr sz="1350" b="0" i="0">
-                <a:solidFill>
-                  <a:srgbClr val="5F6670"/>
-                </a:solidFill>
-                <a:latin typeface="Calibri"/>
-              </a:rPr>
-              <a:t>The same places drawn with no country named at all, giving the model's own default.</a:t>
-            </a:r>
-          </a:p>
-        </p:txBody>
-      </p:sp>
-      <p:sp>
-        <p:nvSpPr>
-          <p:cNvPr id="41" name="TextBox 40"/>
-          <p:cNvSpPr txBox="1"/>
-          <p:nvPr/>
-        </p:nvSpPr>
-        <p:spPr>
-          <a:xfrm>
-            <a:off x="15544800" y="20169708"/>
-            <a:ext cx="5394959" cy="1019556"/>
-          </a:xfrm>
-          <a:prstGeom prst="rect">
-            <a:avLst/>
-          </a:prstGeom>
-          <a:noFill/>
-        </p:spPr>
-        <p:txBody>
-          <a:bodyPr wrap="square" lIns="0" rIns="0" tIns="0" bIns="0" anchor="t">
-            <a:spAutoFit/>
-          </a:bodyPr>
-          <a:lstStyle/>
-          <a:p>
-            <a:pPr algn="l">
-              <a:lnSpc>
-                <a:spcPct val="122000"/>
-              </a:lnSpc>
-              <a:spcAft>
-                <a:spcPts val="0"/>
-              </a:spcAft>
-            </a:pPr>
-            <a:r>
-              <a:rPr sz="1350" b="1" i="0">
-                <a:solidFill>
-                  <a:srgbClr val="1A1A1A"/>
-                </a:solidFill>
-                <a:latin typeface="Calibri"/>
-              </a:rPr>
-              <a:t>Sixty countries, chosen not picked  </a:t>
-            </a:r>
-          </a:p>
-          <a:p>
-            <a:pPr algn="l">
-              <a:lnSpc>
-                <a:spcPct val="122000"/>
-              </a:lnSpc>
-              <a:spcAft>
-                <a:spcPts val="0"/>
-              </a:spcAft>
-            </a:pPr>
-            <a:r>
-              <a:rPr sz="1350" b="0" i="0">
-                <a:solidFill>
-                  <a:srgbClr val="5F6670"/>
-                </a:solidFill>
-                <a:latin typeface="Calibri"/>
-              </a:rPr>
-              <a:t>Fifteen per World Bank income group, all above a million people, selected so income and distance from the equator pull apart: ρ = 0.25 here against 0.49 worldwide.</a:t>
-            </a:r>
-          </a:p>
-        </p:txBody>
-      </p:sp>
-      <p:sp>
-        <p:nvSpPr>
-          <p:cNvPr id="42" name="TextBox 41"/>
-          <p:cNvSpPr txBox="1"/>
-          <p:nvPr/>
-        </p:nvSpPr>
-        <p:spPr>
-          <a:xfrm>
-            <a:off x="15544800" y="21298992"/>
-            <a:ext cx="5394959" cy="626364"/>
-          </a:xfrm>
-          <a:prstGeom prst="rect">
-            <a:avLst/>
-          </a:prstGeom>
-          <a:noFill/>
-        </p:spPr>
-        <p:txBody>
-          <a:bodyPr wrap="square" lIns="0" rIns="0" tIns="0" bIns="0" anchor="t">
-            <a:spAutoFit/>
-          </a:bodyPr>
-          <a:lstStyle/>
-          <a:p>
-            <a:pPr algn="l">
-              <a:lnSpc>
-                <a:spcPct val="122000"/>
-              </a:lnSpc>
-              <a:spcAft>
-                <a:spcPts val="0"/>
-              </a:spcAft>
-            </a:pPr>
-            <a:r>
-              <a:rPr sz="1350" b="1" i="0">
-                <a:solidFill>
-                  <a:srgbClr val="1A1A1A"/>
-                </a:solidFill>
-                <a:latin typeface="Calibri"/>
-              </a:rPr>
-              <a:t>Eighty-four images per prompt  </a:t>
-            </a:r>
-          </a:p>
-          <a:p>
-            <a:pPr algn="l">
-              <a:lnSpc>
-                <a:spcPct val="122000"/>
-              </a:lnSpc>
-              <a:spcAft>
-                <a:spcPts val="0"/>
-              </a:spcAft>
-            </a:pPr>
-            <a:r>
-              <a:rPr sz="1350" b="0" i="0">
-                <a:solidFill>
-                  <a:srgbClr val="5F6670"/>
-                </a:solidFill>
-                <a:latin typeface="Calibri"/>
-              </a:rPr>
-              <a:t>Sized from a 3,300-image pilot's measured noise; more countries and places buy more.</a:t>
-            </a:r>
-          </a:p>
-        </p:txBody>
-      </p:sp>
-      <p:sp>
-        <p:nvSpPr>
-          <p:cNvPr id="43" name="TextBox 42"/>
-          <p:cNvSpPr txBox="1"/>
-          <p:nvPr/>
-        </p:nvSpPr>
-        <p:spPr>
-          <a:xfrm>
-            <a:off x="15544800" y="22035084"/>
-            <a:ext cx="5394959" cy="626364"/>
-          </a:xfrm>
-          <a:prstGeom prst="rect">
-            <a:avLst/>
-          </a:prstGeom>
-          <a:noFill/>
-        </p:spPr>
-        <p:txBody>
-          <a:bodyPr wrap="square" lIns="0" rIns="0" tIns="0" bIns="0" anchor="t">
-            <a:spAutoFit/>
-          </a:bodyPr>
-          <a:lstStyle/>
-          <a:p>
-            <a:pPr algn="l">
-              <a:lnSpc>
-                <a:spcPct val="122000"/>
-              </a:lnSpc>
-              <a:spcAft>
-                <a:spcPts val="0"/>
-              </a:spcAft>
-            </a:pPr>
-            <a:r>
-              <a:rPr sz="1350" b="1" i="0">
-                <a:solidFill>
-                  <a:srgbClr val="1A1A1A"/>
-                </a:solidFill>
-                <a:latin typeface="Calibri"/>
-              </a:rPr>
-              <a:t>Reproducible by construction  </a:t>
-            </a:r>
-          </a:p>
-          <a:p>
-            <a:pPr algn="l">
-              <a:lnSpc>
-                <a:spcPct val="122000"/>
-              </a:lnSpc>
-              <a:spcAft>
-                <a:spcPts val="0"/>
-              </a:spcAft>
-            </a:pPr>
-            <a:r>
-              <a:rPr sz="1350" b="0" i="0">
-                <a:solidFill>
-                  <a:srgbClr val="5F6670"/>
-                </a:solidFill>
-                <a:latin typeface="Calibri"/>
-              </a:rPr>
-              <a:t>flux-schnell on Replicate at 1024×1024, one pinned version, every seed recorded.</a:t>
-            </a:r>
-          </a:p>
-        </p:txBody>
-      </p:sp>
-      <p:pic>
-        <p:nvPicPr>
-          <p:cNvPr id="44" name="Picture 43" descr="world-map.png"/>
-          <p:cNvPicPr>
-            <a:picLocks noChangeAspect="1"/>
-          </p:cNvPicPr>
-          <p:nvPr/>
-        </p:nvPicPr>
-        <p:blipFill>
-          <a:blip r:embed="rId4"/>
-          <a:stretch>
-            <a:fillRect/>
-          </a:stretch>
-        </p:blipFill>
-        <p:spPr>
-          <a:xfrm>
-            <a:off x="1005840" y="15958896"/>
-            <a:ext cx="13898880" cy="5881542"/>
-          </a:xfrm>
-          <a:prstGeom prst="rect">
-            <a:avLst/>
-          </a:prstGeom>
-        </p:spPr>
-      </p:pic>
-      <p:sp>
-        <p:nvSpPr>
-          <p:cNvPr id="45" name="TextBox 44"/>
-          <p:cNvSpPr txBox="1"/>
-          <p:nvPr/>
-        </p:nvSpPr>
-        <p:spPr>
-          <a:xfrm>
-            <a:off x="1005840" y="23228376"/>
-            <a:ext cx="9555480" cy="402336"/>
+            <a:off x="13258799" y="15591709"/>
+            <a:ext cx="182880" cy="274320"/>
           </a:xfrm>
           <a:prstGeom prst="rect">
             <a:avLst/>
@@ -5155,7 +4765,535 @@
               </a:spcAft>
             </a:pPr>
             <a:r>
-              <a:rPr sz="2600" b="1" i="0">
+              <a:rPr sz="2100" b="1" i="0">
+                <a:solidFill>
+                  <a:srgbClr val="B07C1F"/>
+                </a:solidFill>
+                <a:latin typeface="Calibri"/>
+              </a:rPr>
+              <a:t>•</a:t>
+            </a:r>
+          </a:p>
+        </p:txBody>
+      </p:sp>
+      <p:sp>
+        <p:nvSpPr>
+          <p:cNvPr id="39" name="TextBox 38"/>
+          <p:cNvSpPr txBox="1"/>
+          <p:nvPr/>
+        </p:nvSpPr>
+        <p:spPr>
+          <a:xfrm>
+            <a:off x="13533119" y="15564277"/>
+            <a:ext cx="7406640" cy="759459"/>
+          </a:xfrm>
+          <a:prstGeom prst="rect">
+            <a:avLst/>
+          </a:prstGeom>
+          <a:noFill/>
+        </p:spPr>
+        <p:txBody>
+          <a:bodyPr wrap="square" lIns="0" rIns="0" tIns="0" bIns="0" anchor="t">
+            <a:spAutoFit/>
+          </a:bodyPr>
+          <a:lstStyle/>
+          <a:p>
+            <a:pPr algn="l">
+              <a:lnSpc>
+                <a:spcPct val="128000"/>
+              </a:lnSpc>
+              <a:spcAft>
+                <a:spcPts val="0"/>
+              </a:spcAft>
+            </a:pPr>
+            <a:r>
+              <a:rPr sz="2300" b="0" i="0">
+                <a:solidFill>
+                  <a:srgbClr val="5F6670"/>
+                </a:solidFill>
+                <a:latin typeface="Calibri"/>
+              </a:rPr>
+              <a:t>“A photograph of {place} in {country}, {view}.” One camera per kind of place.</a:t>
+            </a:r>
+          </a:p>
+        </p:txBody>
+      </p:sp>
+      <p:sp>
+        <p:nvSpPr>
+          <p:cNvPr id="40" name="TextBox 39"/>
+          <p:cNvSpPr txBox="1"/>
+          <p:nvPr/>
+        </p:nvSpPr>
+        <p:spPr>
+          <a:xfrm>
+            <a:off x="13258799" y="16497473"/>
+            <a:ext cx="182880" cy="274320"/>
+          </a:xfrm>
+          <a:prstGeom prst="rect">
+            <a:avLst/>
+          </a:prstGeom>
+          <a:noFill/>
+        </p:spPr>
+        <p:txBody>
+          <a:bodyPr wrap="square" lIns="0" rIns="0" tIns="0" bIns="0" anchor="t">
+            <a:spAutoFit/>
+          </a:bodyPr>
+          <a:lstStyle/>
+          <a:p>
+            <a:pPr algn="l">
+              <a:lnSpc>
+                <a:spcPct val="108000"/>
+              </a:lnSpc>
+              <a:spcAft>
+                <a:spcPts val="0"/>
+              </a:spcAft>
+            </a:pPr>
+            <a:r>
+              <a:rPr sz="2100" b="1" i="0">
+                <a:solidFill>
+                  <a:srgbClr val="B07C1F"/>
+                </a:solidFill>
+                <a:latin typeface="Calibri"/>
+              </a:rPr>
+              <a:t>•</a:t>
+            </a:r>
+          </a:p>
+        </p:txBody>
+      </p:sp>
+      <p:sp>
+        <p:nvSpPr>
+          <p:cNvPr id="41" name="TextBox 40"/>
+          <p:cNvSpPr txBox="1"/>
+          <p:nvPr/>
+        </p:nvSpPr>
+        <p:spPr>
+          <a:xfrm>
+            <a:off x="13533119" y="16470041"/>
+            <a:ext cx="7406640" cy="759459"/>
+          </a:xfrm>
+          <a:prstGeom prst="rect">
+            <a:avLst/>
+          </a:prstGeom>
+          <a:noFill/>
+        </p:spPr>
+        <p:txBody>
+          <a:bodyPr wrap="square" lIns="0" rIns="0" tIns="0" bIns="0" anchor="t">
+            <a:spAutoFit/>
+          </a:bodyPr>
+          <a:lstStyle/>
+          <a:p>
+            <a:pPr algn="l">
+              <a:lnSpc>
+                <a:spcPct val="128000"/>
+              </a:lnSpc>
+              <a:spcAft>
+                <a:spcPts val="0"/>
+              </a:spcAft>
+            </a:pPr>
+            <a:r>
+              <a:rPr sz="2300" b="0" i="0">
+                <a:solidFill>
+                  <a:srgbClr val="5F6670"/>
+                </a:solidFill>
+                <a:latin typeface="Calibri"/>
+              </a:rPr>
+              <a:t>Run twice: free, and again pinned to noon under a clear sky. The pin names no colour.</a:t>
+            </a:r>
+          </a:p>
+        </p:txBody>
+      </p:sp>
+      <p:sp>
+        <p:nvSpPr>
+          <p:cNvPr id="42" name="TextBox 41"/>
+          <p:cNvSpPr txBox="1"/>
+          <p:nvPr/>
+        </p:nvSpPr>
+        <p:spPr>
+          <a:xfrm>
+            <a:off x="13258799" y="17403237"/>
+            <a:ext cx="182880" cy="274320"/>
+          </a:xfrm>
+          <a:prstGeom prst="rect">
+            <a:avLst/>
+          </a:prstGeom>
+          <a:noFill/>
+        </p:spPr>
+        <p:txBody>
+          <a:bodyPr wrap="square" lIns="0" rIns="0" tIns="0" bIns="0" anchor="t">
+            <a:spAutoFit/>
+          </a:bodyPr>
+          <a:lstStyle/>
+          <a:p>
+            <a:pPr algn="l">
+              <a:lnSpc>
+                <a:spcPct val="108000"/>
+              </a:lnSpc>
+              <a:spcAft>
+                <a:spcPts val="0"/>
+              </a:spcAft>
+            </a:pPr>
+            <a:r>
+              <a:rPr sz="2100" b="1" i="0">
+                <a:solidFill>
+                  <a:srgbClr val="B07C1F"/>
+                </a:solidFill>
+                <a:latin typeface="Calibri"/>
+              </a:rPr>
+              <a:t>•</a:t>
+            </a:r>
+          </a:p>
+        </p:txBody>
+      </p:sp>
+      <p:sp>
+        <p:nvSpPr>
+          <p:cNvPr id="43" name="TextBox 42"/>
+          <p:cNvSpPr txBox="1"/>
+          <p:nvPr/>
+        </p:nvSpPr>
+        <p:spPr>
+          <a:xfrm>
+            <a:off x="13533119" y="17375805"/>
+            <a:ext cx="7406640" cy="759459"/>
+          </a:xfrm>
+          <a:prstGeom prst="rect">
+            <a:avLst/>
+          </a:prstGeom>
+          <a:noFill/>
+        </p:spPr>
+        <p:txBody>
+          <a:bodyPr wrap="square" lIns="0" rIns="0" tIns="0" bIns="0" anchor="t">
+            <a:spAutoFit/>
+          </a:bodyPr>
+          <a:lstStyle/>
+          <a:p>
+            <a:pPr algn="l">
+              <a:lnSpc>
+                <a:spcPct val="128000"/>
+              </a:lnSpc>
+              <a:spcAft>
+                <a:spcPts val="0"/>
+              </a:spcAft>
+            </a:pPr>
+            <a:r>
+              <a:rPr sz="2300" b="0" i="0">
+                <a:solidFill>
+                  <a:srgbClr val="5F6670"/>
+                </a:solidFill>
+                <a:latin typeface="Calibri"/>
+              </a:rPr>
+              <a:t>The same places with no country named, giving the model's own default to measure from.</a:t>
+            </a:r>
+          </a:p>
+        </p:txBody>
+      </p:sp>
+      <p:sp>
+        <p:nvSpPr>
+          <p:cNvPr id="44" name="TextBox 43"/>
+          <p:cNvSpPr txBox="1"/>
+          <p:nvPr/>
+        </p:nvSpPr>
+        <p:spPr>
+          <a:xfrm>
+            <a:off x="13258799" y="18309001"/>
+            <a:ext cx="182880" cy="274320"/>
+          </a:xfrm>
+          <a:prstGeom prst="rect">
+            <a:avLst/>
+          </a:prstGeom>
+          <a:noFill/>
+        </p:spPr>
+        <p:txBody>
+          <a:bodyPr wrap="square" lIns="0" rIns="0" tIns="0" bIns="0" anchor="t">
+            <a:spAutoFit/>
+          </a:bodyPr>
+          <a:lstStyle/>
+          <a:p>
+            <a:pPr algn="l">
+              <a:lnSpc>
+                <a:spcPct val="108000"/>
+              </a:lnSpc>
+              <a:spcAft>
+                <a:spcPts val="0"/>
+              </a:spcAft>
+            </a:pPr>
+            <a:r>
+              <a:rPr sz="2100" b="1" i="0">
+                <a:solidFill>
+                  <a:srgbClr val="B07C1F"/>
+                </a:solidFill>
+                <a:latin typeface="Calibri"/>
+              </a:rPr>
+              <a:t>•</a:t>
+            </a:r>
+          </a:p>
+        </p:txBody>
+      </p:sp>
+      <p:sp>
+        <p:nvSpPr>
+          <p:cNvPr id="45" name="TextBox 44"/>
+          <p:cNvSpPr txBox="1"/>
+          <p:nvPr/>
+        </p:nvSpPr>
+        <p:spPr>
+          <a:xfrm>
+            <a:off x="13533119" y="18281569"/>
+            <a:ext cx="7406640" cy="1139190"/>
+          </a:xfrm>
+          <a:prstGeom prst="rect">
+            <a:avLst/>
+          </a:prstGeom>
+          <a:noFill/>
+        </p:spPr>
+        <p:txBody>
+          <a:bodyPr wrap="square" lIns="0" rIns="0" tIns="0" bIns="0" anchor="t">
+            <a:spAutoFit/>
+          </a:bodyPr>
+          <a:lstStyle/>
+          <a:p>
+            <a:pPr algn="l">
+              <a:lnSpc>
+                <a:spcPct val="128000"/>
+              </a:lnSpc>
+              <a:spcAft>
+                <a:spcPts val="0"/>
+              </a:spcAft>
+            </a:pPr>
+            <a:r>
+              <a:rPr sz="2300" b="0" i="0">
+                <a:solidFill>
+                  <a:srgbClr val="5F6670"/>
+                </a:solidFill>
+                <a:latin typeface="Calibri"/>
+              </a:rPr>
+              <a:t>60 countries, 15 per income group, chosen so income and latitude pull apart (ρ = 0.25 here against 0.49 worldwide).</a:t>
+            </a:r>
+          </a:p>
+        </p:txBody>
+      </p:sp>
+      <p:sp>
+        <p:nvSpPr>
+          <p:cNvPr id="46" name="TextBox 45"/>
+          <p:cNvSpPr txBox="1"/>
+          <p:nvPr/>
+        </p:nvSpPr>
+        <p:spPr>
+          <a:xfrm>
+            <a:off x="13258799" y="19594495"/>
+            <a:ext cx="182880" cy="274320"/>
+          </a:xfrm>
+          <a:prstGeom prst="rect">
+            <a:avLst/>
+          </a:prstGeom>
+          <a:noFill/>
+        </p:spPr>
+        <p:txBody>
+          <a:bodyPr wrap="square" lIns="0" rIns="0" tIns="0" bIns="0" anchor="t">
+            <a:spAutoFit/>
+          </a:bodyPr>
+          <a:lstStyle/>
+          <a:p>
+            <a:pPr algn="l">
+              <a:lnSpc>
+                <a:spcPct val="108000"/>
+              </a:lnSpc>
+              <a:spcAft>
+                <a:spcPts val="0"/>
+              </a:spcAft>
+            </a:pPr>
+            <a:r>
+              <a:rPr sz="2100" b="1" i="0">
+                <a:solidFill>
+                  <a:srgbClr val="B07C1F"/>
+                </a:solidFill>
+                <a:latin typeface="Calibri"/>
+              </a:rPr>
+              <a:t>•</a:t>
+            </a:r>
+          </a:p>
+        </p:txBody>
+      </p:sp>
+      <p:sp>
+        <p:nvSpPr>
+          <p:cNvPr id="47" name="TextBox 46"/>
+          <p:cNvSpPr txBox="1"/>
+          <p:nvPr/>
+        </p:nvSpPr>
+        <p:spPr>
+          <a:xfrm>
+            <a:off x="13533119" y="19567063"/>
+            <a:ext cx="7406640" cy="759459"/>
+          </a:xfrm>
+          <a:prstGeom prst="rect">
+            <a:avLst/>
+          </a:prstGeom>
+          <a:noFill/>
+        </p:spPr>
+        <p:txBody>
+          <a:bodyPr wrap="square" lIns="0" rIns="0" tIns="0" bIns="0" anchor="t">
+            <a:spAutoFit/>
+          </a:bodyPr>
+          <a:lstStyle/>
+          <a:p>
+            <a:pPr algn="l">
+              <a:lnSpc>
+                <a:spcPct val="128000"/>
+              </a:lnSpc>
+              <a:spcAft>
+                <a:spcPts val="0"/>
+              </a:spcAft>
+            </a:pPr>
+            <a:r>
+              <a:rPr sz="2300" b="0" i="0">
+                <a:solidFill>
+                  <a:srgbClr val="5F6670"/>
+                </a:solidFill>
+                <a:latin typeface="Calibri"/>
+              </a:rPr>
+              <a:t>84 images per prompt, sized from a 3,300-image pilot's measured noise.</a:t>
+            </a:r>
+          </a:p>
+        </p:txBody>
+      </p:sp>
+      <p:sp>
+        <p:nvSpPr>
+          <p:cNvPr id="48" name="TextBox 47"/>
+          <p:cNvSpPr txBox="1"/>
+          <p:nvPr/>
+        </p:nvSpPr>
+        <p:spPr>
+          <a:xfrm>
+            <a:off x="13258799" y="20500259"/>
+            <a:ext cx="182880" cy="274320"/>
+          </a:xfrm>
+          <a:prstGeom prst="rect">
+            <a:avLst/>
+          </a:prstGeom>
+          <a:noFill/>
+        </p:spPr>
+        <p:txBody>
+          <a:bodyPr wrap="square" lIns="0" rIns="0" tIns="0" bIns="0" anchor="t">
+            <a:spAutoFit/>
+          </a:bodyPr>
+          <a:lstStyle/>
+          <a:p>
+            <a:pPr algn="l">
+              <a:lnSpc>
+                <a:spcPct val="108000"/>
+              </a:lnSpc>
+              <a:spcAft>
+                <a:spcPts val="0"/>
+              </a:spcAft>
+            </a:pPr>
+            <a:r>
+              <a:rPr sz="2100" b="1" i="0">
+                <a:solidFill>
+                  <a:srgbClr val="B07C1F"/>
+                </a:solidFill>
+                <a:latin typeface="Calibri"/>
+              </a:rPr>
+              <a:t>•</a:t>
+            </a:r>
+          </a:p>
+        </p:txBody>
+      </p:sp>
+      <p:sp>
+        <p:nvSpPr>
+          <p:cNvPr id="49" name="TextBox 48"/>
+          <p:cNvSpPr txBox="1"/>
+          <p:nvPr/>
+        </p:nvSpPr>
+        <p:spPr>
+          <a:xfrm>
+            <a:off x="13533119" y="20472827"/>
+            <a:ext cx="7406640" cy="759459"/>
+          </a:xfrm>
+          <a:prstGeom prst="rect">
+            <a:avLst/>
+          </a:prstGeom>
+          <a:noFill/>
+        </p:spPr>
+        <p:txBody>
+          <a:bodyPr wrap="square" lIns="0" rIns="0" tIns="0" bIns="0" anchor="t">
+            <a:spAutoFit/>
+          </a:bodyPr>
+          <a:lstStyle/>
+          <a:p>
+            <a:pPr algn="l">
+              <a:lnSpc>
+                <a:spcPct val="128000"/>
+              </a:lnSpc>
+              <a:spcAft>
+                <a:spcPts val="0"/>
+              </a:spcAft>
+            </a:pPr>
+            <a:r>
+              <a:rPr sz="2300" b="0" i="0">
+                <a:solidFill>
+                  <a:srgbClr val="5F6670"/>
+                </a:solidFill>
+                <a:latin typeface="Calibri"/>
+              </a:rPr>
+              <a:t>flux-schnell on Replicate, one pinned version, 1024×1024, every seed recorded.</a:t>
+            </a:r>
+          </a:p>
+        </p:txBody>
+      </p:sp>
+      <p:pic>
+        <p:nvPicPr>
+          <p:cNvPr id="50" name="Picture 49" descr="world-map.png"/>
+          <p:cNvPicPr>
+            <a:picLocks noChangeAspect="1"/>
+          </p:cNvPicPr>
+          <p:nvPr/>
+        </p:nvPicPr>
+        <p:blipFill>
+          <a:blip r:embed="rId4"/>
+          <a:stretch>
+            <a:fillRect/>
+          </a:stretch>
+        </p:blipFill>
+        <p:spPr>
+          <a:xfrm>
+            <a:off x="1005840" y="15416449"/>
+            <a:ext cx="11612880" cy="4914183"/>
+          </a:xfrm>
+          <a:prstGeom prst="rect">
+            <a:avLst/>
+          </a:prstGeom>
+        </p:spPr>
+      </p:pic>
+      <p:sp>
+        <p:nvSpPr>
+          <p:cNvPr id="51" name="TextBox 50"/>
+          <p:cNvSpPr txBox="1"/>
+          <p:nvPr/>
+        </p:nvSpPr>
+        <p:spPr>
+          <a:xfrm>
+            <a:off x="1005840" y="21835791"/>
+            <a:ext cx="9555480" cy="693420"/>
+          </a:xfrm>
+          <a:prstGeom prst="rect">
+            <a:avLst/>
+          </a:prstGeom>
+          <a:noFill/>
+        </p:spPr>
+        <p:txBody>
+          <a:bodyPr wrap="square" lIns="0" rIns="0" tIns="0" bIns="0" anchor="t">
+            <a:spAutoFit/>
+          </a:bodyPr>
+          <a:lstStyle/>
+          <a:p>
+            <a:pPr algn="l">
+              <a:lnSpc>
+                <a:spcPct val="108000"/>
+              </a:lnSpc>
+              <a:spcAft>
+                <a:spcPts val="0"/>
+              </a:spcAft>
+            </a:pPr>
+            <a:r>
+              <a:rPr sz="4200" b="1" i="0">
                 <a:solidFill>
                   <a:srgbClr val="1A1A1A"/>
                 </a:solidFill>
@@ -5168,15 +5306,15 @@
       </p:sp>
       <p:graphicFrame>
         <p:nvGraphicFramePr>
-          <p:cNvPr id="46" name="Table 45"/>
+          <p:cNvPr id="52" name="Table 51"/>
           <p:cNvGraphicFramePr>
             <a:graphicFrameLocks noGrp="1"/>
           </p:cNvGraphicFramePr>
           <p:nvPr/>
         </p:nvGraphicFramePr>
         <p:xfrm>
-          <a:off x="1005840" y="23703864"/>
-          <a:ext cx="9555478" cy="2487168"/>
+          <a:off x="1005840" y="22693803"/>
+          <a:ext cx="9555478" cy="3383280"/>
         </p:xfrm>
         <a:graphic>
           <a:graphicData uri="http://schemas.openxmlformats.org/drawingml/2006/table">
@@ -5191,7 +5329,7 @@
                 <a:gridCol w="1815541"/>
                 <a:gridCol w="1815541"/>
               </a:tblGrid>
-              <a:tr h="402336">
+              <a:tr h="530352">
                 <a:tc>
                   <a:txBody>
                     <a:bodyPr/>
@@ -5308,7 +5446,7 @@
                   </a:tcPr>
                 </a:tc>
               </a:tr>
-              <a:tr h="347472">
+              <a:tr h="475488">
                 <a:tc>
                   <a:txBody>
                     <a:bodyPr/>
@@ -5425,7 +5563,7 @@
                   </a:tcPr>
                 </a:tc>
               </a:tr>
-              <a:tr h="347472">
+              <a:tr h="475488">
                 <a:tc>
                   <a:txBody>
                     <a:bodyPr/>
@@ -5542,7 +5680,7 @@
                   </a:tcPr>
                 </a:tc>
               </a:tr>
-              <a:tr h="347472">
+              <a:tr h="475488">
                 <a:tc>
                   <a:txBody>
                     <a:bodyPr/>
@@ -5659,7 +5797,7 @@
                   </a:tcPr>
                 </a:tc>
               </a:tr>
-              <a:tr h="347472">
+              <a:tr h="475488">
                 <a:tc>
                   <a:txBody>
                     <a:bodyPr/>
@@ -5776,7 +5914,7 @@
                   </a:tcPr>
                 </a:tc>
               </a:tr>
-              <a:tr h="347472">
+              <a:tr h="475488">
                 <a:tc>
                   <a:txBody>
                     <a:bodyPr/>
@@ -5893,7 +6031,7 @@
                   </a:tcPr>
                 </a:tc>
               </a:tr>
-              <a:tr h="347472">
+              <a:tr h="475488">
                 <a:tc>
                   <a:txBody>
                     <a:bodyPr/>
@@ -6016,14 +6154,14 @@
       </p:graphicFrame>
       <p:sp>
         <p:nvSpPr>
-          <p:cNvPr id="47" name="TextBox 46"/>
+          <p:cNvPr id="53" name="TextBox 52"/>
           <p:cNvSpPr txBox="1"/>
           <p:nvPr/>
         </p:nvSpPr>
         <p:spPr>
           <a:xfrm>
-            <a:off x="1005840" y="26373912"/>
-            <a:ext cx="9555480" cy="914400"/>
+            <a:off x="1005840" y="26314827"/>
+            <a:ext cx="9555480" cy="693420"/>
           </a:xfrm>
           <a:prstGeom prst="rect">
             <a:avLst/>
@@ -6038,34 +6176,34 @@
           <a:p>
             <a:pPr algn="l">
               <a:lnSpc>
-                <a:spcPct val="125000"/>
+                <a:spcPct val="128000"/>
               </a:lnSpc>
               <a:spcAft>
                 <a:spcPts val="0"/>
               </a:spcAft>
             </a:pPr>
             <a:r>
-              <a:rPr sz="1350" b="0" i="0">
+              <a:rPr sz="2100" b="0" i="0">
                 <a:solidFill>
                   <a:srgbClr val="5F6670"/>
                 </a:solidFill>
                 <a:latin typeface="Calibri"/>
               </a:rPr>
-              <a:t>Each row holds a rival explanation constant and asks the comparison again. Cohen's d with the permutation p-value in brackets; r² is the share of the spread between countries that the controls account for.</a:t>
-            </a:r>
-          </a:p>
-        </p:txBody>
-      </p:sp>
-      <p:sp>
-        <p:nvSpPr>
-          <p:cNvPr id="48" name="TextBox 47"/>
+              <a:t>Each row holds a rival explanation constant and asks again. Cohen's d, permutation p in brackets.</a:t>
+            </a:r>
+          </a:p>
+        </p:txBody>
+      </p:sp>
+      <p:sp>
+        <p:nvSpPr>
+          <p:cNvPr id="54" name="TextBox 53"/>
           <p:cNvSpPr txBox="1"/>
           <p:nvPr/>
         </p:nvSpPr>
         <p:spPr>
           <a:xfrm>
-            <a:off x="11384280" y="23228376"/>
-            <a:ext cx="9555480" cy="402336"/>
+            <a:off x="11384280" y="21835791"/>
+            <a:ext cx="9555480" cy="693420"/>
           </a:xfrm>
           <a:prstGeom prst="rect">
             <a:avLst/>
@@ -6087,7 +6225,7 @@
               </a:spcAft>
             </a:pPr>
             <a:r>
-              <a:rPr sz="2600" b="1" i="0">
+              <a:rPr sz="4200" b="1" i="0">
                 <a:solidFill>
                   <a:srgbClr val="1A1A1A"/>
                 </a:solidFill>
@@ -6100,14 +6238,14 @@
       </p:sp>
       <p:sp>
         <p:nvSpPr>
-          <p:cNvPr id="49" name="TextBox 48"/>
+          <p:cNvPr id="55" name="TextBox 54"/>
           <p:cNvSpPr txBox="1"/>
           <p:nvPr/>
         </p:nvSpPr>
         <p:spPr>
           <a:xfrm>
-            <a:off x="11384280" y="23722152"/>
-            <a:ext cx="365760" cy="310896"/>
+            <a:off x="11384280" y="22721235"/>
+            <a:ext cx="457200" cy="402336"/>
           </a:xfrm>
           <a:prstGeom prst="rect">
             <a:avLst/>
@@ -6129,7 +6267,7 @@
               </a:spcAft>
             </a:pPr>
             <a:r>
-              <a:rPr sz="1800" b="1" i="0">
+              <a:rPr sz="2800" b="1" i="0">
                 <a:solidFill>
                   <a:srgbClr val="B07C1F"/>
                 </a:solidFill>
@@ -6142,14 +6280,14 @@
       </p:sp>
       <p:sp>
         <p:nvSpPr>
-          <p:cNvPr id="50" name="TextBox 49"/>
+          <p:cNvPr id="56" name="TextBox 55"/>
           <p:cNvSpPr txBox="1"/>
           <p:nvPr/>
         </p:nvSpPr>
         <p:spPr>
           <a:xfrm>
-            <a:off x="11768328" y="23703864"/>
-            <a:ext cx="9171432" cy="274320"/>
+            <a:off x="11932920" y="22693803"/>
+            <a:ext cx="9006840" cy="462280"/>
           </a:xfrm>
           <a:prstGeom prst="rect">
             <a:avLst/>
@@ -6171,7 +6309,7 @@
               </a:spcAft>
             </a:pPr>
             <a:r>
-              <a:rPr sz="1700" b="1" i="0">
+              <a:rPr sz="2800" b="1" i="0">
                 <a:solidFill>
                   <a:srgbClr val="1A1A1A"/>
                 </a:solidFill>
@@ -6184,14 +6322,14 @@
       </p:sp>
       <p:sp>
         <p:nvSpPr>
-          <p:cNvPr id="51" name="TextBox 50"/>
+          <p:cNvPr id="57" name="TextBox 56"/>
           <p:cNvSpPr txBox="1"/>
           <p:nvPr/>
         </p:nvSpPr>
         <p:spPr>
           <a:xfrm>
-            <a:off x="11768328" y="24005616"/>
-            <a:ext cx="9171432" cy="457200"/>
+            <a:off x="11932920" y="23210947"/>
+            <a:ext cx="9006840" cy="759459"/>
           </a:xfrm>
           <a:prstGeom prst="rect">
             <a:avLst/>
@@ -6206,34 +6344,34 @@
           <a:p>
             <a:pPr algn="l">
               <a:lnSpc>
-                <a:spcPct val="125000"/>
+                <a:spcPct val="128000"/>
               </a:lnSpc>
               <a:spcAft>
                 <a:spcPts val="0"/>
               </a:spcAft>
             </a:pPr>
             <a:r>
-              <a:rPr sz="1450" b="0" i="0">
+              <a:rPr sz="2300" b="0" i="0">
                 <a:solidFill>
                   <a:srgbClr val="5F6670"/>
                 </a:solidFill>
                 <a:latin typeface="Calibri"/>
               </a:rPr>
-              <a:t>53 of the 60 countries are warmer than the model's own no-country default. Norway is the only one consistently cooler.</a:t>
-            </a:r>
-          </a:p>
-        </p:txBody>
-      </p:sp>
-      <p:sp>
-        <p:nvSpPr>
-          <p:cNvPr id="52" name="TextBox 51"/>
+              <a:t>53 of 60 beat the model's no-country default. Norway alone is cooler.</a:t>
+            </a:r>
+          </a:p>
+        </p:txBody>
+      </p:sp>
+      <p:sp>
+        <p:nvSpPr>
+          <p:cNvPr id="58" name="TextBox 57"/>
           <p:cNvSpPr txBox="1"/>
           <p:nvPr/>
         </p:nvSpPr>
         <p:spPr>
           <a:xfrm>
-            <a:off x="11384280" y="24682272"/>
-            <a:ext cx="365760" cy="310896"/>
+            <a:off x="11384280" y="24253871"/>
+            <a:ext cx="457200" cy="402336"/>
           </a:xfrm>
           <a:prstGeom prst="rect">
             <a:avLst/>
@@ -6255,7 +6393,7 @@
               </a:spcAft>
             </a:pPr>
             <a:r>
-              <a:rPr sz="1800" b="1" i="0">
+              <a:rPr sz="2800" b="1" i="0">
                 <a:solidFill>
                   <a:srgbClr val="B07C1F"/>
                 </a:solidFill>
@@ -6268,14 +6406,14 @@
       </p:sp>
       <p:sp>
         <p:nvSpPr>
-          <p:cNvPr id="53" name="TextBox 52"/>
+          <p:cNvPr id="59" name="TextBox 58"/>
           <p:cNvSpPr txBox="1"/>
           <p:nvPr/>
         </p:nvSpPr>
         <p:spPr>
           <a:xfrm>
-            <a:off x="11768328" y="24663984"/>
-            <a:ext cx="9171432" cy="274320"/>
+            <a:off x="11932920" y="24226439"/>
+            <a:ext cx="9006840" cy="462280"/>
           </a:xfrm>
           <a:prstGeom prst="rect">
             <a:avLst/>
@@ -6297,7 +6435,7 @@
               </a:spcAft>
             </a:pPr>
             <a:r>
-              <a:rPr sz="1700" b="1" i="0">
+              <a:rPr sz="2800" b="1" i="0">
                 <a:solidFill>
                   <a:srgbClr val="1A1A1A"/>
                 </a:solidFill>
@@ -6310,14 +6448,14 @@
       </p:sp>
       <p:sp>
         <p:nvSpPr>
-          <p:cNvPr id="54" name="TextBox 53"/>
+          <p:cNvPr id="60" name="TextBox 59"/>
           <p:cNvSpPr txBox="1"/>
           <p:nvPr/>
         </p:nvSpPr>
         <p:spPr>
           <a:xfrm>
-            <a:off x="11768328" y="24965736"/>
-            <a:ext cx="9171432" cy="667512"/>
+            <a:off x="11932920" y="24743583"/>
+            <a:ext cx="9006840" cy="759459"/>
           </a:xfrm>
           <a:prstGeom prst="rect">
             <a:avLst/>
@@ -6332,34 +6470,34 @@
           <a:p>
             <a:pPr algn="l">
               <a:lnSpc>
-                <a:spcPct val="125000"/>
+                <a:spcPct val="128000"/>
               </a:lnSpc>
               <a:spcAft>
                 <a:spcPts val="0"/>
               </a:spcAft>
             </a:pPr>
             <a:r>
-              <a:rPr sz="1450" b="0" i="0">
+              <a:rPr sz="2300" b="0" i="0">
                 <a:solidFill>
                   <a:srgbClr val="5F6670"/>
                 </a:solidFill>
                 <a:latin typeface="Calibri"/>
               </a:rPr>
-              <a:t>The poorest group is warmer as measured (d = +0.72), but holding real latitude, temperature, rainfall and forest cover constant drops it to +0.52 — no longer distinguishable from chance. Of the four, forest cover is the one that moves it.</a:t>
-            </a:r>
-          </a:p>
-        </p:txBody>
-      </p:sp>
-      <p:sp>
-        <p:nvSpPr>
-          <p:cNvPr id="55" name="TextBox 54"/>
+              <a:t>d = +0.72 falls to +0.52, no better than chance. Forest cover is what moves it — not heat, not dryness, not latitude.</a:t>
+            </a:r>
+          </a:p>
+        </p:txBody>
+      </p:sp>
+      <p:sp>
+        <p:nvSpPr>
+          <p:cNvPr id="61" name="TextBox 60"/>
           <p:cNvSpPr txBox="1"/>
           <p:nvPr/>
         </p:nvSpPr>
         <p:spPr>
           <a:xfrm>
-            <a:off x="11384280" y="25852704"/>
-            <a:ext cx="365760" cy="310896"/>
+            <a:off x="11384280" y="25786507"/>
+            <a:ext cx="457200" cy="402336"/>
           </a:xfrm>
           <a:prstGeom prst="rect">
             <a:avLst/>
@@ -6381,7 +6519,7 @@
               </a:spcAft>
             </a:pPr>
             <a:r>
-              <a:rPr sz="1800" b="1" i="0">
+              <a:rPr sz="2800" b="1" i="0">
                 <a:solidFill>
                   <a:srgbClr val="B07C1F"/>
                 </a:solidFill>
@@ -6394,14 +6532,14 @@
       </p:sp>
       <p:sp>
         <p:nvSpPr>
-          <p:cNvPr id="56" name="TextBox 55"/>
+          <p:cNvPr id="62" name="TextBox 61"/>
           <p:cNvSpPr txBox="1"/>
           <p:nvPr/>
         </p:nvSpPr>
         <p:spPr>
           <a:xfrm>
-            <a:off x="11768328" y="25834416"/>
-            <a:ext cx="9171432" cy="274320"/>
+            <a:off x="11932920" y="25759075"/>
+            <a:ext cx="9006840" cy="462280"/>
           </a:xfrm>
           <a:prstGeom prst="rect">
             <a:avLst/>
@@ -6423,7 +6561,7 @@
               </a:spcAft>
             </a:pPr>
             <a:r>
-              <a:rPr sz="1700" b="1" i="0">
+              <a:rPr sz="2800" b="1" i="0">
                 <a:solidFill>
                   <a:srgbClr val="1A1A1A"/>
                 </a:solidFill>
@@ -6436,14 +6574,14 @@
       </p:sp>
       <p:sp>
         <p:nvSpPr>
-          <p:cNvPr id="57" name="TextBox 56"/>
+          <p:cNvPr id="63" name="TextBox 62"/>
           <p:cNvSpPr txBox="1"/>
           <p:nvPr/>
         </p:nvSpPr>
         <p:spPr>
           <a:xfrm>
-            <a:off x="11768328" y="26136168"/>
-            <a:ext cx="9171432" cy="457200"/>
+            <a:off x="11932920" y="26276219"/>
+            <a:ext cx="9006840" cy="759459"/>
           </a:xfrm>
           <a:prstGeom prst="rect">
             <a:avLst/>
@@ -6458,34 +6596,34 @@
           <a:p>
             <a:pPr algn="l">
               <a:lnSpc>
-                <a:spcPct val="125000"/>
+                <a:spcPct val="128000"/>
               </a:lnSpc>
               <a:spcAft>
                 <a:spcPts val="0"/>
               </a:spcAft>
             </a:pPr>
             <a:r>
-              <a:rPr sz="1450" b="0" i="0">
+              <a:rPr sz="2300" b="0" i="0">
                 <a:solidFill>
                   <a:srgbClr val="5F6670"/>
                 </a:solidFill>
                 <a:latin typeface="Calibri"/>
               </a:rPr>
-              <a:t>The country list was built to defeat it, and it accounts for about 5%. Forest cover alone accounts for 30%.</a:t>
-            </a:r>
-          </a:p>
-        </p:txBody>
-      </p:sp>
-      <p:sp>
-        <p:nvSpPr>
-          <p:cNvPr id="58" name="TextBox 57"/>
+              <a:t>The country list was built to defeat it. It explains 5%. Forest cover explains 30%.</a:t>
+            </a:r>
+          </a:p>
+        </p:txBody>
+      </p:sp>
+      <p:sp>
+        <p:nvSpPr>
+          <p:cNvPr id="64" name="TextBox 63"/>
           <p:cNvSpPr txBox="1"/>
           <p:nvPr/>
         </p:nvSpPr>
         <p:spPr>
           <a:xfrm>
-            <a:off x="11384280" y="26812824"/>
-            <a:ext cx="365760" cy="310896"/>
+            <a:off x="11384280" y="27319143"/>
+            <a:ext cx="457200" cy="402336"/>
           </a:xfrm>
           <a:prstGeom prst="rect">
             <a:avLst/>
@@ -6507,7 +6645,7 @@
               </a:spcAft>
             </a:pPr>
             <a:r>
-              <a:rPr sz="1800" b="1" i="0">
+              <a:rPr sz="2800" b="1" i="0">
                 <a:solidFill>
                   <a:srgbClr val="B07C1F"/>
                 </a:solidFill>
@@ -6520,14 +6658,14 @@
       </p:sp>
       <p:sp>
         <p:nvSpPr>
-          <p:cNvPr id="59" name="TextBox 58"/>
+          <p:cNvPr id="65" name="TextBox 64"/>
           <p:cNvSpPr txBox="1"/>
           <p:nvPr/>
         </p:nvSpPr>
         <p:spPr>
           <a:xfrm>
-            <a:off x="11768328" y="26794536"/>
-            <a:ext cx="9171432" cy="274320"/>
+            <a:off x="11932920" y="27291711"/>
+            <a:ext cx="9006840" cy="462280"/>
           </a:xfrm>
           <a:prstGeom prst="rect">
             <a:avLst/>
@@ -6549,7 +6687,7 @@
               </a:spcAft>
             </a:pPr>
             <a:r>
-              <a:rPr sz="1700" b="1" i="0">
+              <a:rPr sz="2800" b="1" i="0">
                 <a:solidFill>
                   <a:srgbClr val="1A1A1A"/>
                 </a:solidFill>
@@ -6562,14 +6700,14 @@
       </p:sp>
       <p:sp>
         <p:nvSpPr>
-          <p:cNvPr id="60" name="TextBox 59"/>
+          <p:cNvPr id="66" name="TextBox 65"/>
           <p:cNvSpPr txBox="1"/>
           <p:nvPr/>
         </p:nvSpPr>
         <p:spPr>
           <a:xfrm>
-            <a:off x="11768328" y="27096288"/>
-            <a:ext cx="9171432" cy="457200"/>
+            <a:off x="11932920" y="27808855"/>
+            <a:ext cx="9006840" cy="759459"/>
           </a:xfrm>
           <a:prstGeom prst="rect">
             <a:avLst/>
@@ -6584,160 +6722,34 @@
           <a:p>
             <a:pPr algn="l">
               <a:lnSpc>
-                <a:spcPct val="125000"/>
+                <a:spcPct val="128000"/>
               </a:lnSpc>
               <a:spcAft>
                 <a:spcPts val="0"/>
               </a:spcAft>
             </a:pPr>
             <a:r>
-              <a:rPr sz="1450" b="0" i="0">
+              <a:rPr sz="2300" b="0" i="0">
                 <a:solidFill>
                   <a:srgbClr val="5F6670"/>
                 </a:solidFill>
                 <a:latin typeface="Calibri"/>
               </a:rPr>
-              <a:t>Africa's gap vanishes under the controls (−0.03). Asia's survives everything (+0.73, p = .011) and holds separately in all six kinds of place.</a:t>
-            </a:r>
-          </a:p>
-        </p:txBody>
-      </p:sp>
-      <p:sp>
-        <p:nvSpPr>
-          <p:cNvPr id="61" name="TextBox 60"/>
-          <p:cNvSpPr txBox="1"/>
-          <p:nvPr/>
-        </p:nvSpPr>
-        <p:spPr>
-          <a:xfrm>
-            <a:off x="11384280" y="27772944"/>
-            <a:ext cx="365760" cy="310896"/>
-          </a:xfrm>
-          <a:prstGeom prst="rect">
-            <a:avLst/>
-          </a:prstGeom>
-          <a:noFill/>
-        </p:spPr>
-        <p:txBody>
-          <a:bodyPr wrap="square" lIns="0" rIns="0" tIns="0" bIns="0" anchor="t">
-            <a:spAutoFit/>
-          </a:bodyPr>
-          <a:lstStyle/>
-          <a:p>
-            <a:pPr algn="l">
-              <a:lnSpc>
-                <a:spcPct val="108000"/>
-              </a:lnSpc>
-              <a:spcAft>
-                <a:spcPts val="0"/>
-              </a:spcAft>
-            </a:pPr>
-            <a:r>
-              <a:rPr sz="1800" b="1" i="0">
-                <a:solidFill>
-                  <a:srgbClr val="B07C1F"/>
-                </a:solidFill>
-                <a:latin typeface="Cambria"/>
-              </a:rPr>
-              <a:t>5</a:t>
-            </a:r>
-          </a:p>
-        </p:txBody>
-      </p:sp>
-      <p:sp>
-        <p:nvSpPr>
-          <p:cNvPr id="62" name="TextBox 61"/>
-          <p:cNvSpPr txBox="1"/>
-          <p:nvPr/>
-        </p:nvSpPr>
-        <p:spPr>
-          <a:xfrm>
-            <a:off x="11768328" y="27754656"/>
-            <a:ext cx="9171432" cy="274320"/>
-          </a:xfrm>
-          <a:prstGeom prst="rect">
-            <a:avLst/>
-          </a:prstGeom>
-          <a:noFill/>
-        </p:spPr>
-        <p:txBody>
-          <a:bodyPr wrap="square" lIns="0" rIns="0" tIns="0" bIns="0" anchor="t">
-            <a:spAutoFit/>
-          </a:bodyPr>
-          <a:lstStyle/>
-          <a:p>
-            <a:pPr algn="l">
-              <a:lnSpc>
-                <a:spcPct val="108000"/>
-              </a:lnSpc>
-              <a:spcAft>
-                <a:spcPts val="0"/>
-              </a:spcAft>
-            </a:pPr>
-            <a:r>
-              <a:rPr sz="1700" b="1" i="0">
-                <a:solidFill>
-                  <a:srgbClr val="1A1A1A"/>
-                </a:solidFill>
-                <a:latin typeface="Cambria"/>
-              </a:rPr>
-              <a:t>The light control is what makes it visible</a:t>
-            </a:r>
-          </a:p>
-        </p:txBody>
-      </p:sp>
-      <p:sp>
-        <p:nvSpPr>
-          <p:cNvPr id="63" name="TextBox 62"/>
-          <p:cNvSpPr txBox="1"/>
-          <p:nvPr/>
-        </p:nvSpPr>
-        <p:spPr>
-          <a:xfrm>
-            <a:off x="11768328" y="28056408"/>
-            <a:ext cx="9171432" cy="667512"/>
-          </a:xfrm>
-          <a:prstGeom prst="rect">
-            <a:avLst/>
-          </a:prstGeom>
-          <a:noFill/>
-        </p:spPr>
-        <p:txBody>
-          <a:bodyPr wrap="square" lIns="0" rIns="0" tIns="0" bIns="0" anchor="t">
-            <a:spAutoFit/>
-          </a:bodyPr>
-          <a:lstStyle/>
-          <a:p>
-            <a:pPr algn="l">
-              <a:lnSpc>
-                <a:spcPct val="125000"/>
-              </a:lnSpc>
-              <a:spcAft>
-                <a:spcPts val="0"/>
-              </a:spcAft>
-            </a:pPr>
-            <a:r>
-              <a:rPr sz="1450" b="0" i="0">
-                <a:solidFill>
-                  <a:srgbClr val="5F6670"/>
-                </a:solidFill>
-                <a:latin typeface="Calibri"/>
-              </a:rPr>
-              <a:t>Under the free prompt climate explains 10% of the spread against 46% under the pinned light, and no group effect survives. The model's own choice of hour was drowning out the country.</a:t>
-            </a:r>
-          </a:p>
-        </p:txBody>
-      </p:sp>
-      <p:sp>
-        <p:nvSpPr>
-          <p:cNvPr id="64" name="Rectangle 63"/>
+              <a:t>Africa's gap vanishes (−0.03). Asia's survives everything (+0.73, p = .011) and holds in all six kinds of place.</a:t>
+            </a:r>
+          </a:p>
+        </p:txBody>
+      </p:sp>
+      <p:sp>
+        <p:nvSpPr>
+          <p:cNvPr id="67" name="Rectangle 66"/>
           <p:cNvSpPr/>
           <p:nvPr/>
         </p:nvSpPr>
         <p:spPr>
           <a:xfrm>
-            <a:off x="1005840" y="29153688"/>
-            <a:ext cx="19933920" cy="10972"/>
+            <a:off x="1005840" y="29098667"/>
+            <a:ext cx="19933920" cy="12801"/>
           </a:xfrm>
           <a:prstGeom prst="rect">
             <a:avLst/>
@@ -6774,14 +6786,14 @@
       </p:sp>
       <p:sp>
         <p:nvSpPr>
-          <p:cNvPr id="65" name="TextBox 64"/>
+          <p:cNvPr id="68" name="TextBox 67"/>
           <p:cNvSpPr txBox="1"/>
           <p:nvPr/>
         </p:nvSpPr>
         <p:spPr>
           <a:xfrm>
-            <a:off x="1005840" y="29482872"/>
-            <a:ext cx="19933920" cy="384048"/>
+            <a:off x="1005840" y="29482715"/>
+            <a:ext cx="19933920" cy="512064"/>
           </a:xfrm>
           <a:prstGeom prst="rect">
             <a:avLst/>
@@ -6803,7 +6815,7 @@
               </a:spcAft>
             </a:pPr>
             <a:r>
-              <a:rPr sz="2400" b="1" i="0">
+              <a:rPr sz="4200" b="1" i="0">
                 <a:solidFill>
                   <a:srgbClr val="1A1A1A"/>
                 </a:solidFill>
@@ -6816,14 +6828,14 @@
       </p:sp>
       <p:sp>
         <p:nvSpPr>
-          <p:cNvPr id="66" name="TextBox 65"/>
+          <p:cNvPr id="69" name="TextBox 68"/>
           <p:cNvSpPr txBox="1"/>
           <p:nvPr/>
         </p:nvSpPr>
         <p:spPr>
           <a:xfrm>
-            <a:off x="1005840" y="29958360"/>
-            <a:ext cx="164592" cy="237744"/>
+            <a:off x="1005840" y="30131939"/>
+            <a:ext cx="182880" cy="274320"/>
           </a:xfrm>
           <a:prstGeom prst="rect">
             <a:avLst/>
@@ -6845,7 +6857,7 @@
               </a:spcAft>
             </a:pPr>
             <a:r>
-              <a:rPr sz="1500" b="1" i="0">
+              <a:rPr sz="2100" b="1" i="0">
                 <a:solidFill>
                   <a:srgbClr val="B07C1F"/>
                 </a:solidFill>
@@ -6858,14 +6870,14 @@
       </p:sp>
       <p:sp>
         <p:nvSpPr>
-          <p:cNvPr id="67" name="TextBox 66"/>
+          <p:cNvPr id="70" name="TextBox 69"/>
           <p:cNvSpPr txBox="1"/>
           <p:nvPr/>
         </p:nvSpPr>
         <p:spPr>
           <a:xfrm>
-            <a:off x="1225296" y="29940072"/>
-            <a:ext cx="9336024" cy="242316"/>
+            <a:off x="1280160" y="30104507"/>
+            <a:ext cx="9281160" cy="379729"/>
           </a:xfrm>
           <a:prstGeom prst="rect">
             <a:avLst/>
@@ -6880,14 +6892,14 @@
           <a:p>
             <a:pPr algn="l">
               <a:lnSpc>
-                <a:spcPct val="125000"/>
+                <a:spcPct val="128000"/>
               </a:lnSpc>
               <a:spcAft>
                 <a:spcPts val="0"/>
               </a:spcAft>
             </a:pPr>
             <a:r>
-              <a:rPr sz="1400" b="0" i="0">
+              <a:rPr sz="2300" b="0" i="0">
                 <a:solidFill>
                   <a:srgbClr val="5F6670"/>
                 </a:solidFill>
@@ -6900,14 +6912,14 @@
       </p:sp>
       <p:sp>
         <p:nvSpPr>
-          <p:cNvPr id="68" name="TextBox 67"/>
+          <p:cNvPr id="71" name="TextBox 70"/>
           <p:cNvSpPr txBox="1"/>
           <p:nvPr/>
         </p:nvSpPr>
         <p:spPr>
           <a:xfrm>
-            <a:off x="1005840" y="30319548"/>
-            <a:ext cx="164592" cy="237744"/>
+            <a:off x="1005840" y="30676261"/>
+            <a:ext cx="182880" cy="274320"/>
           </a:xfrm>
           <a:prstGeom prst="rect">
             <a:avLst/>
@@ -6929,7 +6941,7 @@
               </a:spcAft>
             </a:pPr>
             <a:r>
-              <a:rPr sz="1500" b="1" i="0">
+              <a:rPr sz="2100" b="1" i="0">
                 <a:solidFill>
                   <a:srgbClr val="B07C1F"/>
                 </a:solidFill>
@@ -6942,14 +6954,14 @@
       </p:sp>
       <p:sp>
         <p:nvSpPr>
-          <p:cNvPr id="69" name="TextBox 68"/>
+          <p:cNvPr id="72" name="TextBox 71"/>
           <p:cNvSpPr txBox="1"/>
           <p:nvPr/>
         </p:nvSpPr>
         <p:spPr>
           <a:xfrm>
-            <a:off x="1225296" y="30301260"/>
-            <a:ext cx="9336024" cy="448056"/>
+            <a:off x="1280160" y="30648829"/>
+            <a:ext cx="9281160" cy="759459"/>
           </a:xfrm>
           <a:prstGeom prst="rect">
             <a:avLst/>
@@ -6964,34 +6976,34 @@
           <a:p>
             <a:pPr algn="l">
               <a:lnSpc>
-                <a:spcPct val="125000"/>
+                <a:spcPct val="128000"/>
               </a:lnSpc>
               <a:spcAft>
                 <a:spcPts val="0"/>
               </a:spcAft>
             </a:pPr>
             <a:r>
-              <a:rPr sz="1400" b="0" i="0">
+              <a:rPr sz="2300" b="0" i="0">
                 <a:solidFill>
                   <a:srgbClr val="5F6670"/>
                 </a:solidFill>
                 <a:latin typeface="Calibri"/>
               </a:rPr>
-              <a:t>Four country averages is a blunt control, and it leaves 54% of the spread unexplained.</a:t>
-            </a:r>
-          </a:p>
-        </p:txBody>
-      </p:sp>
-      <p:sp>
-        <p:nvSpPr>
-          <p:cNvPr id="70" name="TextBox 69"/>
+              <a:t>Four country averages is a blunt control; 54% of the spread is unexplained.</a:t>
+            </a:r>
+          </a:p>
+        </p:txBody>
+      </p:sp>
+      <p:sp>
+        <p:nvSpPr>
+          <p:cNvPr id="73" name="TextBox 72"/>
           <p:cNvSpPr txBox="1"/>
           <p:nvPr/>
         </p:nvSpPr>
         <p:spPr>
           <a:xfrm>
-            <a:off x="1005840" y="30886476"/>
-            <a:ext cx="164592" cy="237744"/>
+            <a:off x="11384280" y="30131939"/>
+            <a:ext cx="182880" cy="274320"/>
           </a:xfrm>
           <a:prstGeom prst="rect">
             <a:avLst/>
@@ -7013,7 +7025,7 @@
               </a:spcAft>
             </a:pPr>
             <a:r>
-              <a:rPr sz="1500" b="1" i="0">
+              <a:rPr sz="2100" b="1" i="0">
                 <a:solidFill>
                   <a:srgbClr val="B07C1F"/>
                 </a:solidFill>
@@ -7026,14 +7038,14 @@
       </p:sp>
       <p:sp>
         <p:nvSpPr>
-          <p:cNvPr id="71" name="TextBox 70"/>
+          <p:cNvPr id="74" name="TextBox 73"/>
           <p:cNvSpPr txBox="1"/>
           <p:nvPr/>
         </p:nvSpPr>
         <p:spPr>
           <a:xfrm>
-            <a:off x="1225296" y="30868188"/>
-            <a:ext cx="9336024" cy="653796"/>
+            <a:off x="11658600" y="30104507"/>
+            <a:ext cx="9281160" cy="379729"/>
           </a:xfrm>
           <a:prstGeom prst="rect">
             <a:avLst/>
@@ -7048,34 +7060,34 @@
           <a:p>
             <a:pPr algn="l">
               <a:lnSpc>
-                <a:spcPct val="125000"/>
+                <a:spcPct val="128000"/>
               </a:lnSpc>
               <a:spcAft>
                 <a:spcPts val="0"/>
               </a:spcAft>
             </a:pPr>
             <a:r>
-              <a:rPr sz="1400" b="0" i="0">
+              <a:rPr sz="2300" b="0" i="0">
                 <a:solidFill>
                   <a:srgbClr val="5F6670"/>
                 </a:solidFill>
                 <a:latin typeface="Calibri"/>
               </a:rPr>
-              <a:t>Controlling for climate may control away part of the question. The controls use each country's real climate, not the drawn one, so a place rendered drier than it is counts as signal — but content against habit is a judgement this cannot make.</a:t>
-            </a:r>
-          </a:p>
-        </p:txBody>
-      </p:sp>
-      <p:sp>
-        <p:nvSpPr>
-          <p:cNvPr id="72" name="TextBox 71"/>
+              <a:t>Controlling for climate may control away part of the question.</a:t>
+            </a:r>
+          </a:p>
+        </p:txBody>
+      </p:sp>
+      <p:sp>
+        <p:nvSpPr>
+          <p:cNvPr id="75" name="TextBox 74"/>
           <p:cNvSpPr txBox="1"/>
           <p:nvPr/>
         </p:nvSpPr>
         <p:spPr>
           <a:xfrm>
-            <a:off x="11384280" y="29958360"/>
-            <a:ext cx="164592" cy="237744"/>
+            <a:off x="11384280" y="30676261"/>
+            <a:ext cx="182880" cy="274320"/>
           </a:xfrm>
           <a:prstGeom prst="rect">
             <a:avLst/>
@@ -7097,7 +7109,7 @@
               </a:spcAft>
             </a:pPr>
             <a:r>
-              <a:rPr sz="1500" b="1" i="0">
+              <a:rPr sz="2100" b="1" i="0">
                 <a:solidFill>
                   <a:srgbClr val="B07C1F"/>
                 </a:solidFill>
@@ -7110,14 +7122,14 @@
       </p:sp>
       <p:sp>
         <p:nvSpPr>
-          <p:cNvPr id="73" name="TextBox 72"/>
+          <p:cNvPr id="76" name="TextBox 75"/>
           <p:cNvSpPr txBox="1"/>
           <p:nvPr/>
         </p:nvSpPr>
         <p:spPr>
           <a:xfrm>
-            <a:off x="11603736" y="29940072"/>
-            <a:ext cx="9336024" cy="448056"/>
+            <a:off x="11658600" y="30648829"/>
+            <a:ext cx="9281160" cy="759459"/>
           </a:xfrm>
           <a:prstGeom prst="rect">
             <a:avLst/>
@@ -7132,118 +7144,34 @@
           <a:p>
             <a:pPr algn="l">
               <a:lnSpc>
-                <a:spcPct val="125000"/>
+                <a:spcPct val="128000"/>
               </a:lnSpc>
               <a:spcAft>
                 <a:spcPts val="0"/>
               </a:spcAft>
             </a:pPr>
             <a:r>
-              <a:rPr sz="1400" b="0" i="0">
+              <a:rPr sz="2300" b="0" i="0">
                 <a:solidFill>
                   <a:srgbClr val="5F6670"/>
                 </a:solidFill>
                 <a:latin typeface="Calibri"/>
               </a:rPr>
-              <a:t>18 comparisons per metric: only Asia, the Americas and upper-middle income on haze and lightness carry real weight.</a:t>
-            </a:r>
-          </a:p>
-        </p:txBody>
-      </p:sp>
-      <p:sp>
-        <p:nvSpPr>
-          <p:cNvPr id="74" name="TextBox 73"/>
-          <p:cNvSpPr txBox="1"/>
-          <p:nvPr/>
-        </p:nvSpPr>
-        <p:spPr>
-          <a:xfrm>
-            <a:off x="11384280" y="30525288"/>
-            <a:ext cx="164592" cy="237744"/>
-          </a:xfrm>
-          <a:prstGeom prst="rect">
-            <a:avLst/>
-          </a:prstGeom>
-          <a:noFill/>
-        </p:spPr>
-        <p:txBody>
-          <a:bodyPr wrap="square" lIns="0" rIns="0" tIns="0" bIns="0" anchor="t">
-            <a:spAutoFit/>
-          </a:bodyPr>
-          <a:lstStyle/>
-          <a:p>
-            <a:pPr algn="l">
-              <a:lnSpc>
-                <a:spcPct val="108000"/>
-              </a:lnSpc>
-              <a:spcAft>
-                <a:spcPts val="0"/>
-              </a:spcAft>
-            </a:pPr>
-            <a:r>
-              <a:rPr sz="1500" b="1" i="0">
-                <a:solidFill>
-                  <a:srgbClr val="B07C1F"/>
-                </a:solidFill>
-                <a:latin typeface="Calibri"/>
-              </a:rPr>
-              <a:t>•</a:t>
-            </a:r>
-          </a:p>
-        </p:txBody>
-      </p:sp>
-      <p:sp>
-        <p:nvSpPr>
-          <p:cNvPr id="75" name="TextBox 74"/>
-          <p:cNvSpPr txBox="1"/>
-          <p:nvPr/>
-        </p:nvSpPr>
-        <p:spPr>
-          <a:xfrm>
-            <a:off x="11603736" y="30507000"/>
-            <a:ext cx="9336024" cy="448056"/>
-          </a:xfrm>
-          <a:prstGeom prst="rect">
-            <a:avLst/>
-          </a:prstGeom>
-          <a:noFill/>
-        </p:spPr>
-        <p:txBody>
-          <a:bodyPr wrap="square" lIns="0" rIns="0" tIns="0" bIns="0" anchor="t">
-            <a:spAutoFit/>
-          </a:bodyPr>
-          <a:lstStyle/>
-          <a:p>
-            <a:pPr algn="l">
-              <a:lnSpc>
-                <a:spcPct val="125000"/>
-              </a:lnSpc>
-              <a:spcAft>
-                <a:spcPts val="0"/>
-              </a:spcAft>
-            </a:pPr>
-            <a:r>
-              <a:rPr sz="1400" b="0" i="0">
-                <a:solidFill>
-                  <a:srgbClr val="5F6670"/>
-                </a:solidFill>
-                <a:latin typeface="Calibri"/>
-              </a:rPr>
-              <a:t>Europe is three countries here and Oceania two; the list balances income, not regions.</a:t>
-            </a:r>
-          </a:p>
-        </p:txBody>
-      </p:sp>
-      <p:sp>
-        <p:nvSpPr>
-          <p:cNvPr id="76" name="Rectangle 75"/>
+              <a:t>18 comparisons per metric, and Europe is three countries here against Oceania’s two — only the strongest results carry weight.</a:t>
+            </a:r>
+          </a:p>
+        </p:txBody>
+      </p:sp>
+      <p:sp>
+        <p:nvSpPr>
+          <p:cNvPr id="77" name="Rectangle 76"/>
           <p:cNvSpPr/>
           <p:nvPr/>
         </p:nvSpPr>
         <p:spPr>
           <a:xfrm>
-            <a:off x="1005840" y="31915176"/>
-            <a:ext cx="19933920" cy="10972"/>
+            <a:off x="1005840" y="31755761"/>
+            <a:ext cx="19933920" cy="12801"/>
           </a:xfrm>
           <a:prstGeom prst="rect">
             <a:avLst/>
@@ -7280,14 +7208,14 @@
       </p:sp>
       <p:sp>
         <p:nvSpPr>
-          <p:cNvPr id="77" name="TextBox 76"/>
+          <p:cNvPr id="78" name="TextBox 77"/>
           <p:cNvSpPr txBox="1"/>
           <p:nvPr/>
         </p:nvSpPr>
         <p:spPr>
           <a:xfrm>
-            <a:off x="1005840" y="32098056"/>
-            <a:ext cx="19933920" cy="329184"/>
+            <a:off x="1005840" y="31975217"/>
+            <a:ext cx="19933920" cy="402336"/>
           </a:xfrm>
           <a:prstGeom prst="rect">
             <a:avLst/>
@@ -7309,13 +7237,13 @@
               </a:spcAft>
             </a:pPr>
             <a:r>
-              <a:rPr sz="1400" b="0" i="0">
+              <a:rPr sz="2200" b="0" i="0">
                 <a:solidFill>
                   <a:srgbClr val="5F6670"/>
                 </a:solidFill>
                 <a:latin typeface="Calibri"/>
               </a:rPr>
-              <a:t>github.com/haydn-s/blurred-lens  ·  interactive globe, every prompt and every measurement in the repository  ·  generated October 2026 for $185</a:t>
+              <a:t>Every prompt, image and measurement — github.com/haydn-s/blurred-lens  ·  October 2026  ·  $185 of compute</a:t>
             </a:r>
           </a:p>
         </p:txBody>

--- a/deliverables/Poster Presentation.pptx
+++ b/deliverables/Poster Presentation.pptx
@@ -3097,7 +3097,7 @@
         <p:spPr>
           <a:xfrm>
             <a:off x="1005840" y="1005840"/>
-            <a:ext cx="19933920" cy="1536192"/>
+            <a:ext cx="19933920" cy="1097280"/>
           </a:xfrm>
           <a:prstGeom prst="rect">
             <a:avLst/>
@@ -3119,7 +3119,7 @@
               </a:spcAft>
             </a:pPr>
             <a:r>
-              <a:rPr sz="12000" b="1" i="0">
+              <a:rPr sz="8400" b="1" i="0">
                 <a:solidFill>
                   <a:srgbClr val="1A1A1A"/>
                 </a:solidFill>
@@ -3138,8 +3138,8 @@
         </p:nvSpPr>
         <p:spPr>
           <a:xfrm>
-            <a:off x="1005840" y="2596896"/>
-            <a:ext cx="19385280" cy="1254760"/>
+            <a:off x="1005840" y="2139696"/>
+            <a:ext cx="19385280" cy="1122680"/>
           </a:xfrm>
           <a:prstGeom prst="rect">
             <a:avLst/>
@@ -3161,13 +3161,13 @@
               </a:spcAft>
             </a:pPr>
             <a:r>
-              <a:rPr sz="3800" b="0" i="1">
+              <a:rPr sz="3400" b="0" i="1">
                 <a:solidFill>
                   <a:srgbClr val="5F6670"/>
                 </a:solidFill>
                 <a:latin typeface="Cambria"/>
               </a:rPr>
-              <a:t>An AI image model pictures drier countries in warmer colour — not poorer ones. And it draws Asia warmer than any climate explains.</a:t>
+              <a:t>Does an AI image model paint poorer countries in warmer colour? 61,488 generated photographs say the honest answer is more interesting than yes.</a:t>
             </a:r>
           </a:p>
         </p:txBody>
@@ -3180,7 +3180,7 @@
         </p:nvSpPr>
         <p:spPr>
           <a:xfrm>
-            <a:off x="1005840" y="4016248"/>
+            <a:off x="1005840" y="3372104"/>
             <a:ext cx="19933920" cy="347472"/>
           </a:xfrm>
           <a:prstGeom prst="rect">
@@ -3222,7 +3222,7 @@
         </p:nvSpPr>
         <p:spPr>
           <a:xfrm>
-            <a:off x="1005840" y="4546600"/>
+            <a:off x="1005840" y="3829304"/>
             <a:ext cx="19933920" cy="18288"/>
           </a:xfrm>
           <a:prstGeom prst="rect">
@@ -3266,8 +3266,8 @@
         </p:nvSpPr>
         <p:spPr>
           <a:xfrm>
-            <a:off x="1005840" y="4930648"/>
-            <a:ext cx="4805172" cy="1572768"/>
+            <a:off x="1005840" y="4140200"/>
+            <a:ext cx="4805172" cy="1115568"/>
           </a:xfrm>
           <a:prstGeom prst="roundRect">
             <a:avLst>
@@ -3312,8 +3312,8 @@
         </p:nvSpPr>
         <p:spPr>
           <a:xfrm>
-            <a:off x="1298448" y="5113528"/>
-            <a:ext cx="4219956" cy="768096"/>
+            <a:off x="1298448" y="4259072"/>
+            <a:ext cx="4219956" cy="576072"/>
           </a:xfrm>
           <a:prstGeom prst="rect">
             <a:avLst/>
@@ -3335,7 +3335,7 @@
               </a:spcAft>
             </a:pPr>
             <a:r>
-              <a:rPr sz="6400" b="1" i="0">
+              <a:rPr sz="5200" b="1" i="0">
                 <a:solidFill>
                   <a:srgbClr val="B07C1F"/>
                 </a:solidFill>
@@ -3354,7 +3354,7 @@
         </p:nvSpPr>
         <p:spPr>
           <a:xfrm>
-            <a:off x="1298448" y="5918200"/>
+            <a:off x="1298448" y="4853432"/>
             <a:ext cx="4219956" cy="512064"/>
           </a:xfrm>
           <a:prstGeom prst="rect">
@@ -3396,8 +3396,8 @@
         </p:nvSpPr>
         <p:spPr>
           <a:xfrm>
-            <a:off x="6048756" y="4930648"/>
-            <a:ext cx="4805172" cy="1572768"/>
+            <a:off x="6048756" y="4140200"/>
+            <a:ext cx="4805172" cy="1115568"/>
           </a:xfrm>
           <a:prstGeom prst="roundRect">
             <a:avLst>
@@ -3442,8 +3442,8 @@
         </p:nvSpPr>
         <p:spPr>
           <a:xfrm>
-            <a:off x="6341364" y="5113528"/>
-            <a:ext cx="4219956" cy="768096"/>
+            <a:off x="6341364" y="4259072"/>
+            <a:ext cx="4219956" cy="576072"/>
           </a:xfrm>
           <a:prstGeom prst="rect">
             <a:avLst/>
@@ -3465,7 +3465,7 @@
               </a:spcAft>
             </a:pPr>
             <a:r>
-              <a:rPr sz="6400" b="1" i="0">
+              <a:rPr sz="5200" b="1" i="0">
                 <a:solidFill>
                   <a:srgbClr val="B07C1F"/>
                 </a:solidFill>
@@ -3484,7 +3484,7 @@
         </p:nvSpPr>
         <p:spPr>
           <a:xfrm>
-            <a:off x="6341364" y="5918200"/>
+            <a:off x="6341364" y="4853432"/>
             <a:ext cx="4219956" cy="512064"/>
           </a:xfrm>
           <a:prstGeom prst="rect">
@@ -3513,7 +3513,7 @@
                 </a:solidFill>
                 <a:latin typeface="Calibri"/>
               </a:rPr>
-              <a:t>countries × places</a:t>
+              <a:t>countries × kinds of place</a:t>
             </a:r>
           </a:p>
         </p:txBody>
@@ -3526,8 +3526,8 @@
         </p:nvSpPr>
         <p:spPr>
           <a:xfrm>
-            <a:off x="11091672" y="4930648"/>
-            <a:ext cx="4805172" cy="1572768"/>
+            <a:off x="11091672" y="4140200"/>
+            <a:ext cx="4805172" cy="1115568"/>
           </a:xfrm>
           <a:prstGeom prst="roundRect">
             <a:avLst>
@@ -3572,8 +3572,8 @@
         </p:nvSpPr>
         <p:spPr>
           <a:xfrm>
-            <a:off x="11384280" y="5113528"/>
-            <a:ext cx="4219956" cy="768096"/>
+            <a:off x="11384280" y="4259072"/>
+            <a:ext cx="4219956" cy="576072"/>
           </a:xfrm>
           <a:prstGeom prst="rect">
             <a:avLst/>
@@ -3595,7 +3595,7 @@
               </a:spcAft>
             </a:pPr>
             <a:r>
-              <a:rPr sz="6400" b="1" i="0">
+              <a:rPr sz="5200" b="1" i="0">
                 <a:solidFill>
                   <a:srgbClr val="B07C1F"/>
                 </a:solidFill>
@@ -3614,7 +3614,7 @@
         </p:nvSpPr>
         <p:spPr>
           <a:xfrm>
-            <a:off x="11384280" y="5918200"/>
+            <a:off x="11384280" y="4853432"/>
             <a:ext cx="4219956" cy="512064"/>
           </a:xfrm>
           <a:prstGeom prst="rect">
@@ -3656,8 +3656,8 @@
         </p:nvSpPr>
         <p:spPr>
           <a:xfrm>
-            <a:off x="16134588" y="4930648"/>
-            <a:ext cx="4805172" cy="1572768"/>
+            <a:off x="16134588" y="4140200"/>
+            <a:ext cx="4805172" cy="1115568"/>
           </a:xfrm>
           <a:prstGeom prst="roundRect">
             <a:avLst>
@@ -3702,8 +3702,8 @@
         </p:nvSpPr>
         <p:spPr>
           <a:xfrm>
-            <a:off x="16427196" y="5113528"/>
-            <a:ext cx="4219956" cy="768096"/>
+            <a:off x="16427196" y="4259072"/>
+            <a:ext cx="4219956" cy="576072"/>
           </a:xfrm>
           <a:prstGeom prst="rect">
             <a:avLst/>
@@ -3725,7 +3725,7 @@
               </a:spcAft>
             </a:pPr>
             <a:r>
-              <a:rPr sz="6400" b="1" i="0">
+              <a:rPr sz="5200" b="1" i="0">
                 <a:solidFill>
                   <a:srgbClr val="B07C1F"/>
                 </a:solidFill>
@@ -3744,7 +3744,7 @@
         </p:nvSpPr>
         <p:spPr>
           <a:xfrm>
-            <a:off x="16427196" y="5918200"/>
+            <a:off x="16427196" y="4853432"/>
             <a:ext cx="4219956" cy="512064"/>
           </a:xfrm>
           <a:prstGeom prst="rect">
@@ -3786,8 +3786,8 @@
         </p:nvSpPr>
         <p:spPr>
           <a:xfrm>
-            <a:off x="1005840" y="6887464"/>
-            <a:ext cx="11612880" cy="693420"/>
+            <a:off x="1005840" y="5566664"/>
+            <a:ext cx="19933920" cy="594360"/>
           </a:xfrm>
           <a:prstGeom prst="rect">
             <a:avLst/>
@@ -3809,12 +3809,852 @@
               </a:spcAft>
             </a:pPr>
             <a:r>
-              <a:rPr sz="4200" b="1" i="0">
+              <a:rPr sz="3600" b="1" i="0">
                 <a:solidFill>
                   <a:srgbClr val="1A1A1A"/>
                 </a:solidFill>
                 <a:latin typeface="Cambria"/>
               </a:rPr>
+              <a:t>The problem</a:t>
+            </a:r>
+          </a:p>
+        </p:txBody>
+      </p:sp>
+      <p:sp>
+        <p:nvSpPr>
+          <p:cNvPr id="19" name="TextBox 18"/>
+          <p:cNvSpPr txBox="1"/>
+          <p:nvPr/>
+        </p:nvSpPr>
+        <p:spPr>
+          <a:xfrm>
+            <a:off x="1005840" y="6289040"/>
+            <a:ext cx="9555480" cy="1188720"/>
+          </a:xfrm>
+          <a:prstGeom prst="rect">
+            <a:avLst/>
+          </a:prstGeom>
+          <a:noFill/>
+        </p:spPr>
+        <p:txBody>
+          <a:bodyPr wrap="square" lIns="0" rIns="0" tIns="0" bIns="0" anchor="t">
+            <a:spAutoFit/>
+          </a:bodyPr>
+          <a:lstStyle/>
+          <a:p>
+            <a:pPr algn="l">
+              <a:lnSpc>
+                <a:spcPct val="130000"/>
+              </a:lnSpc>
+              <a:spcAft>
+                <a:spcPts val="0"/>
+              </a:spcAft>
+            </a:pPr>
+            <a:r>
+              <a:rPr sz="2400" b="0" i="0">
+                <a:solidFill>
+                  <a:srgbClr val="1A1A1A"/>
+                </a:solidFill>
+                <a:latin typeface="Calibri"/>
+              </a:rPr>
+              <a:t>Film colours places. A sepia wash over Mexico; dust and amber for “somewhere dangerous.” A yellow filter tells an audience a place is poor, hot and unsafe before a word is spoken.</a:t>
+            </a:r>
+          </a:p>
+        </p:txBody>
+      </p:sp>
+      <p:sp>
+        <p:nvSpPr>
+          <p:cNvPr id="20" name="TextBox 19"/>
+          <p:cNvSpPr txBox="1"/>
+          <p:nvPr/>
+        </p:nvSpPr>
+        <p:spPr>
+          <a:xfrm>
+            <a:off x="11384280" y="6289040"/>
+            <a:ext cx="9555480" cy="1188720"/>
+          </a:xfrm>
+          <a:prstGeom prst="rect">
+            <a:avLst/>
+          </a:prstGeom>
+          <a:noFill/>
+        </p:spPr>
+        <p:txBody>
+          <a:bodyPr wrap="square" lIns="0" rIns="0" tIns="0" bIns="0" anchor="t">
+            <a:spAutoFit/>
+          </a:bodyPr>
+          <a:lstStyle/>
+          <a:p>
+            <a:pPr algn="l">
+              <a:lnSpc>
+                <a:spcPct val="130000"/>
+              </a:lnSpc>
+              <a:spcAft>
+                <a:spcPts val="0"/>
+              </a:spcAft>
+            </a:pPr>
+            <a:r>
+              <a:rPr sz="2400" b="0" i="0">
+                <a:solidFill>
+                  <a:srgbClr val="1A1A1A"/>
+                </a:solidFill>
+                <a:latin typeface="Calibri"/>
+              </a:rPr>
+              <a:t>Image models learn from pictures like those. If one inherited the habit, every picture it makes of a country carries a quiet judgement — and no single image can show you.</a:t>
+            </a:r>
+          </a:p>
+        </p:txBody>
+      </p:sp>
+      <p:sp>
+        <p:nvSpPr>
+          <p:cNvPr id="21" name="TextBox 20"/>
+          <p:cNvSpPr txBox="1"/>
+          <p:nvPr/>
+        </p:nvSpPr>
+        <p:spPr>
+          <a:xfrm>
+            <a:off x="1005840" y="7806943"/>
+            <a:ext cx="19933920" cy="594360"/>
+          </a:xfrm>
+          <a:prstGeom prst="rect">
+            <a:avLst/>
+          </a:prstGeom>
+          <a:noFill/>
+        </p:spPr>
+        <p:txBody>
+          <a:bodyPr wrap="square" lIns="0" rIns="0" tIns="0" bIns="0" anchor="t">
+            <a:spAutoFit/>
+          </a:bodyPr>
+          <a:lstStyle/>
+          <a:p>
+            <a:pPr algn="l">
+              <a:lnSpc>
+                <a:spcPct val="108000"/>
+              </a:lnSpc>
+              <a:spcAft>
+                <a:spcPts val="0"/>
+              </a:spcAft>
+            </a:pPr>
+            <a:r>
+              <a:rPr sz="3600" b="1" i="0">
+                <a:solidFill>
+                  <a:srgbClr val="1A1A1A"/>
+                </a:solidFill>
+                <a:latin typeface="Cambria"/>
+              </a:rPr>
+              <a:t>How we looked</a:t>
+            </a:r>
+          </a:p>
+        </p:txBody>
+      </p:sp>
+      <p:sp>
+        <p:nvSpPr>
+          <p:cNvPr id="22" name="TextBox 21"/>
+          <p:cNvSpPr txBox="1"/>
+          <p:nvPr/>
+        </p:nvSpPr>
+        <p:spPr>
+          <a:xfrm>
+            <a:off x="1005840" y="8547608"/>
+            <a:ext cx="457200" cy="402336"/>
+          </a:xfrm>
+          <a:prstGeom prst="rect">
+            <a:avLst/>
+          </a:prstGeom>
+          <a:noFill/>
+        </p:spPr>
+        <p:txBody>
+          <a:bodyPr wrap="square" lIns="0" rIns="0" tIns="0" bIns="0" anchor="t">
+            <a:spAutoFit/>
+          </a:bodyPr>
+          <a:lstStyle/>
+          <a:p>
+            <a:pPr algn="l">
+              <a:lnSpc>
+                <a:spcPct val="108000"/>
+              </a:lnSpc>
+              <a:spcAft>
+                <a:spcPts val="0"/>
+              </a:spcAft>
+            </a:pPr>
+            <a:r>
+              <a:rPr sz="2600" b="1" i="0">
+                <a:solidFill>
+                  <a:srgbClr val="B07C1F"/>
+                </a:solidFill>
+                <a:latin typeface="Cambria"/>
+              </a:rPr>
+              <a:t>1</a:t>
+            </a:r>
+          </a:p>
+        </p:txBody>
+      </p:sp>
+      <p:sp>
+        <p:nvSpPr>
+          <p:cNvPr id="23" name="TextBox 22"/>
+          <p:cNvSpPr txBox="1"/>
+          <p:nvPr/>
+        </p:nvSpPr>
+        <p:spPr>
+          <a:xfrm>
+            <a:off x="1508760" y="8529320"/>
+            <a:ext cx="3264408" cy="858520"/>
+          </a:xfrm>
+          <a:prstGeom prst="rect">
+            <a:avLst/>
+          </a:prstGeom>
+          <a:noFill/>
+        </p:spPr>
+        <p:txBody>
+          <a:bodyPr wrap="square" lIns="0" rIns="0" tIns="0" bIns="0" anchor="t">
+            <a:spAutoFit/>
+          </a:bodyPr>
+          <a:lstStyle/>
+          <a:p>
+            <a:pPr algn="l">
+              <a:lnSpc>
+                <a:spcPct val="108000"/>
+              </a:lnSpc>
+              <a:spcAft>
+                <a:spcPts val="0"/>
+              </a:spcAft>
+            </a:pPr>
+            <a:r>
+              <a:rPr sz="2600" b="1" i="0">
+                <a:solidFill>
+                  <a:srgbClr val="1A1A1A"/>
+                </a:solidFill>
+                <a:latin typeface="Cambria"/>
+              </a:rPr>
+              <a:t>Ask everyone the same thing</a:t>
+            </a:r>
+          </a:p>
+        </p:txBody>
+      </p:sp>
+      <p:sp>
+        <p:nvSpPr>
+          <p:cNvPr id="24" name="TextBox 23"/>
+          <p:cNvSpPr txBox="1"/>
+          <p:nvPr/>
+        </p:nvSpPr>
+        <p:spPr>
+          <a:xfrm>
+            <a:off x="1005840" y="9497567"/>
+            <a:ext cx="3767328" cy="693420"/>
+          </a:xfrm>
+          <a:prstGeom prst="rect">
+            <a:avLst/>
+          </a:prstGeom>
+          <a:noFill/>
+        </p:spPr>
+        <p:txBody>
+          <a:bodyPr wrap="square" lIns="0" rIns="0" tIns="0" bIns="0" anchor="t">
+            <a:spAutoFit/>
+          </a:bodyPr>
+          <a:lstStyle/>
+          <a:p>
+            <a:pPr algn="l">
+              <a:lnSpc>
+                <a:spcPct val="128000"/>
+              </a:lnSpc>
+              <a:spcAft>
+                <a:spcPts val="0"/>
+              </a:spcAft>
+            </a:pPr>
+            <a:r>
+              <a:rPr sz="2100" b="0" i="0">
+                <a:solidFill>
+                  <a:srgbClr val="5F6670"/>
+                </a:solidFill>
+                <a:latin typeface="Calibri"/>
+              </a:rPr>
+              <a:t>One sentence, one fixed camera, 84 times per prompt.</a:t>
+            </a:r>
+          </a:p>
+        </p:txBody>
+      </p:sp>
+      <p:sp>
+        <p:nvSpPr>
+          <p:cNvPr id="25" name="TextBox 24"/>
+          <p:cNvSpPr txBox="1"/>
+          <p:nvPr/>
+        </p:nvSpPr>
+        <p:spPr>
+          <a:xfrm>
+            <a:off x="5047488" y="8547608"/>
+            <a:ext cx="457200" cy="402336"/>
+          </a:xfrm>
+          <a:prstGeom prst="rect">
+            <a:avLst/>
+          </a:prstGeom>
+          <a:noFill/>
+        </p:spPr>
+        <p:txBody>
+          <a:bodyPr wrap="square" lIns="0" rIns="0" tIns="0" bIns="0" anchor="t">
+            <a:spAutoFit/>
+          </a:bodyPr>
+          <a:lstStyle/>
+          <a:p>
+            <a:pPr algn="l">
+              <a:lnSpc>
+                <a:spcPct val="108000"/>
+              </a:lnSpc>
+              <a:spcAft>
+                <a:spcPts val="0"/>
+              </a:spcAft>
+            </a:pPr>
+            <a:r>
+              <a:rPr sz="2600" b="1" i="0">
+                <a:solidFill>
+                  <a:srgbClr val="B07C1F"/>
+                </a:solidFill>
+                <a:latin typeface="Cambria"/>
+              </a:rPr>
+              <a:t>2</a:t>
+            </a:r>
+          </a:p>
+        </p:txBody>
+      </p:sp>
+      <p:sp>
+        <p:nvSpPr>
+          <p:cNvPr id="26" name="TextBox 25"/>
+          <p:cNvSpPr txBox="1"/>
+          <p:nvPr/>
+        </p:nvSpPr>
+        <p:spPr>
+          <a:xfrm>
+            <a:off x="5550407" y="8529320"/>
+            <a:ext cx="3264408" cy="858520"/>
+          </a:xfrm>
+          <a:prstGeom prst="rect">
+            <a:avLst/>
+          </a:prstGeom>
+          <a:noFill/>
+        </p:spPr>
+        <p:txBody>
+          <a:bodyPr wrap="square" lIns="0" rIns="0" tIns="0" bIns="0" anchor="t">
+            <a:spAutoFit/>
+          </a:bodyPr>
+          <a:lstStyle/>
+          <a:p>
+            <a:pPr algn="l">
+              <a:lnSpc>
+                <a:spcPct val="108000"/>
+              </a:lnSpc>
+              <a:spcAft>
+                <a:spcPts val="0"/>
+              </a:spcAft>
+            </a:pPr>
+            <a:r>
+              <a:rPr sz="2600" b="1" i="0">
+                <a:solidFill>
+                  <a:srgbClr val="1A1A1A"/>
+                </a:solidFill>
+                <a:latin typeface="Cambria"/>
+              </a:rPr>
+              <a:t>Take away the easy excuse</a:t>
+            </a:r>
+          </a:p>
+        </p:txBody>
+      </p:sp>
+      <p:sp>
+        <p:nvSpPr>
+          <p:cNvPr id="27" name="TextBox 26"/>
+          <p:cNvSpPr txBox="1"/>
+          <p:nvPr/>
+        </p:nvSpPr>
+        <p:spPr>
+          <a:xfrm>
+            <a:off x="5047488" y="9497567"/>
+            <a:ext cx="3767328" cy="1040130"/>
+          </a:xfrm>
+          <a:prstGeom prst="rect">
+            <a:avLst/>
+          </a:prstGeom>
+          <a:noFill/>
+        </p:spPr>
+        <p:txBody>
+          <a:bodyPr wrap="square" lIns="0" rIns="0" tIns="0" bIns="0" anchor="t">
+            <a:spAutoFit/>
+          </a:bodyPr>
+          <a:lstStyle/>
+          <a:p>
+            <a:pPr algn="l">
+              <a:lnSpc>
+                <a:spcPct val="128000"/>
+              </a:lnSpc>
+              <a:spcAft>
+                <a:spcPts val="0"/>
+              </a:spcAft>
+            </a:pPr>
+            <a:r>
+              <a:rPr sz="2100" b="0" i="0">
+                <a:solidFill>
+                  <a:srgbClr val="5F6670"/>
+                </a:solidFill>
+                <a:latin typeface="Calibri"/>
+              </a:rPr>
+              <a:t>Run it again pinned to noon under a clear sky. The pin names no colour.</a:t>
+            </a:r>
+          </a:p>
+        </p:txBody>
+      </p:sp>
+      <p:sp>
+        <p:nvSpPr>
+          <p:cNvPr id="28" name="TextBox 27"/>
+          <p:cNvSpPr txBox="1"/>
+          <p:nvPr/>
+        </p:nvSpPr>
+        <p:spPr>
+          <a:xfrm>
+            <a:off x="9089136" y="8547608"/>
+            <a:ext cx="457200" cy="402336"/>
+          </a:xfrm>
+          <a:prstGeom prst="rect">
+            <a:avLst/>
+          </a:prstGeom>
+          <a:noFill/>
+        </p:spPr>
+        <p:txBody>
+          <a:bodyPr wrap="square" lIns="0" rIns="0" tIns="0" bIns="0" anchor="t">
+            <a:spAutoFit/>
+          </a:bodyPr>
+          <a:lstStyle/>
+          <a:p>
+            <a:pPr algn="l">
+              <a:lnSpc>
+                <a:spcPct val="108000"/>
+              </a:lnSpc>
+              <a:spcAft>
+                <a:spcPts val="0"/>
+              </a:spcAft>
+            </a:pPr>
+            <a:r>
+              <a:rPr sz="2600" b="1" i="0">
+                <a:solidFill>
+                  <a:srgbClr val="B07C1F"/>
+                </a:solidFill>
+                <a:latin typeface="Cambria"/>
+              </a:rPr>
+              <a:t>3</a:t>
+            </a:r>
+          </a:p>
+        </p:txBody>
+      </p:sp>
+      <p:sp>
+        <p:nvSpPr>
+          <p:cNvPr id="29" name="TextBox 28"/>
+          <p:cNvSpPr txBox="1"/>
+          <p:nvPr/>
+        </p:nvSpPr>
+        <p:spPr>
+          <a:xfrm>
+            <a:off x="9592056" y="8529320"/>
+            <a:ext cx="3264408" cy="429260"/>
+          </a:xfrm>
+          <a:prstGeom prst="rect">
+            <a:avLst/>
+          </a:prstGeom>
+          <a:noFill/>
+        </p:spPr>
+        <p:txBody>
+          <a:bodyPr wrap="square" lIns="0" rIns="0" tIns="0" bIns="0" anchor="t">
+            <a:spAutoFit/>
+          </a:bodyPr>
+          <a:lstStyle/>
+          <a:p>
+            <a:pPr algn="l">
+              <a:lnSpc>
+                <a:spcPct val="108000"/>
+              </a:lnSpc>
+              <a:spcAft>
+                <a:spcPts val="0"/>
+              </a:spcAft>
+            </a:pPr>
+            <a:r>
+              <a:rPr sz="2600" b="1" i="0">
+                <a:solidFill>
+                  <a:srgbClr val="1A1A1A"/>
+                </a:solidFill>
+                <a:latin typeface="Cambria"/>
+              </a:rPr>
+              <a:t>Give it a zero</a:t>
+            </a:r>
+          </a:p>
+        </p:txBody>
+      </p:sp>
+      <p:sp>
+        <p:nvSpPr>
+          <p:cNvPr id="30" name="TextBox 29"/>
+          <p:cNvSpPr txBox="1"/>
+          <p:nvPr/>
+        </p:nvSpPr>
+        <p:spPr>
+          <a:xfrm>
+            <a:off x="9089136" y="9068308"/>
+            <a:ext cx="3767328" cy="1040130"/>
+          </a:xfrm>
+          <a:prstGeom prst="rect">
+            <a:avLst/>
+          </a:prstGeom>
+          <a:noFill/>
+        </p:spPr>
+        <p:txBody>
+          <a:bodyPr wrap="square" lIns="0" rIns="0" tIns="0" bIns="0" anchor="t">
+            <a:spAutoFit/>
+          </a:bodyPr>
+          <a:lstStyle/>
+          <a:p>
+            <a:pPr algn="l">
+              <a:lnSpc>
+                <a:spcPct val="128000"/>
+              </a:lnSpc>
+              <a:spcAft>
+                <a:spcPts val="0"/>
+              </a:spcAft>
+            </a:pPr>
+            <a:r>
+              <a:rPr sz="2100" b="0" i="0">
+                <a:solidFill>
+                  <a:srgbClr val="5F6670"/>
+                </a:solidFill>
+                <a:latin typeface="Calibri"/>
+              </a:rPr>
+              <a:t>The same places with no country named — the model's own default.</a:t>
+            </a:r>
+          </a:p>
+        </p:txBody>
+      </p:sp>
+      <p:sp>
+        <p:nvSpPr>
+          <p:cNvPr id="31" name="TextBox 30"/>
+          <p:cNvSpPr txBox="1"/>
+          <p:nvPr/>
+        </p:nvSpPr>
+        <p:spPr>
+          <a:xfrm>
+            <a:off x="13130784" y="8547608"/>
+            <a:ext cx="457200" cy="402336"/>
+          </a:xfrm>
+          <a:prstGeom prst="rect">
+            <a:avLst/>
+          </a:prstGeom>
+          <a:noFill/>
+        </p:spPr>
+        <p:txBody>
+          <a:bodyPr wrap="square" lIns="0" rIns="0" tIns="0" bIns="0" anchor="t">
+            <a:spAutoFit/>
+          </a:bodyPr>
+          <a:lstStyle/>
+          <a:p>
+            <a:pPr algn="l">
+              <a:lnSpc>
+                <a:spcPct val="108000"/>
+              </a:lnSpc>
+              <a:spcAft>
+                <a:spcPts val="0"/>
+              </a:spcAft>
+            </a:pPr>
+            <a:r>
+              <a:rPr sz="2600" b="1" i="0">
+                <a:solidFill>
+                  <a:srgbClr val="B07C1F"/>
+                </a:solidFill>
+                <a:latin typeface="Cambria"/>
+              </a:rPr>
+              <a:t>4</a:t>
+            </a:r>
+          </a:p>
+        </p:txBody>
+      </p:sp>
+      <p:sp>
+        <p:nvSpPr>
+          <p:cNvPr id="32" name="TextBox 31"/>
+          <p:cNvSpPr txBox="1"/>
+          <p:nvPr/>
+        </p:nvSpPr>
+        <p:spPr>
+          <a:xfrm>
+            <a:off x="13633704" y="8529320"/>
+            <a:ext cx="3264408" cy="858520"/>
+          </a:xfrm>
+          <a:prstGeom prst="rect">
+            <a:avLst/>
+          </a:prstGeom>
+          <a:noFill/>
+        </p:spPr>
+        <p:txBody>
+          <a:bodyPr wrap="square" lIns="0" rIns="0" tIns="0" bIns="0" anchor="t">
+            <a:spAutoFit/>
+          </a:bodyPr>
+          <a:lstStyle/>
+          <a:p>
+            <a:pPr algn="l">
+              <a:lnSpc>
+                <a:spcPct val="108000"/>
+              </a:lnSpc>
+              <a:spcAft>
+                <a:spcPts val="0"/>
+              </a:spcAft>
+            </a:pPr>
+            <a:r>
+              <a:rPr sz="2600" b="1" i="0">
+                <a:solidFill>
+                  <a:srgbClr val="1A1A1A"/>
+                </a:solidFill>
+                <a:latin typeface="Cambria"/>
+              </a:rPr>
+              <a:t>Pick countries that disagree</a:t>
+            </a:r>
+          </a:p>
+        </p:txBody>
+      </p:sp>
+      <p:sp>
+        <p:nvSpPr>
+          <p:cNvPr id="33" name="TextBox 32"/>
+          <p:cNvSpPr txBox="1"/>
+          <p:nvPr/>
+        </p:nvSpPr>
+        <p:spPr>
+          <a:xfrm>
+            <a:off x="13130784" y="9497567"/>
+            <a:ext cx="3767328" cy="1040130"/>
+          </a:xfrm>
+          <a:prstGeom prst="rect">
+            <a:avLst/>
+          </a:prstGeom>
+          <a:noFill/>
+        </p:spPr>
+        <p:txBody>
+          <a:bodyPr wrap="square" lIns="0" rIns="0" tIns="0" bIns="0" anchor="t">
+            <a:spAutoFit/>
+          </a:bodyPr>
+          <a:lstStyle/>
+          <a:p>
+            <a:pPr algn="l">
+              <a:lnSpc>
+                <a:spcPct val="128000"/>
+              </a:lnSpc>
+              <a:spcAft>
+                <a:spcPts val="0"/>
+              </a:spcAft>
+            </a:pPr>
+            <a:r>
+              <a:rPr sz="2100" b="0" i="0">
+                <a:solidFill>
+                  <a:srgbClr val="5F6670"/>
+                </a:solidFill>
+                <a:latin typeface="Calibri"/>
+              </a:rPr>
+              <a:t>15 per income group, so income and latitude pull apart (ρ = 0.25 against 0.49).</a:t>
+            </a:r>
+          </a:p>
+        </p:txBody>
+      </p:sp>
+      <p:sp>
+        <p:nvSpPr>
+          <p:cNvPr id="34" name="TextBox 33"/>
+          <p:cNvSpPr txBox="1"/>
+          <p:nvPr/>
+        </p:nvSpPr>
+        <p:spPr>
+          <a:xfrm>
+            <a:off x="17172432" y="8547608"/>
+            <a:ext cx="457200" cy="402336"/>
+          </a:xfrm>
+          <a:prstGeom prst="rect">
+            <a:avLst/>
+          </a:prstGeom>
+          <a:noFill/>
+        </p:spPr>
+        <p:txBody>
+          <a:bodyPr wrap="square" lIns="0" rIns="0" tIns="0" bIns="0" anchor="t">
+            <a:spAutoFit/>
+          </a:bodyPr>
+          <a:lstStyle/>
+          <a:p>
+            <a:pPr algn="l">
+              <a:lnSpc>
+                <a:spcPct val="108000"/>
+              </a:lnSpc>
+              <a:spcAft>
+                <a:spcPts val="0"/>
+              </a:spcAft>
+            </a:pPr>
+            <a:r>
+              <a:rPr sz="2600" b="1" i="0">
+                <a:solidFill>
+                  <a:srgbClr val="B07C1F"/>
+                </a:solidFill>
+                <a:latin typeface="Cambria"/>
+              </a:rPr>
+              <a:t>5</a:t>
+            </a:r>
+          </a:p>
+        </p:txBody>
+      </p:sp>
+      <p:sp>
+        <p:nvSpPr>
+          <p:cNvPr id="35" name="TextBox 34"/>
+          <p:cNvSpPr txBox="1"/>
+          <p:nvPr/>
+        </p:nvSpPr>
+        <p:spPr>
+          <a:xfrm>
+            <a:off x="17675352" y="8529320"/>
+            <a:ext cx="3264408" cy="858520"/>
+          </a:xfrm>
+          <a:prstGeom prst="rect">
+            <a:avLst/>
+          </a:prstGeom>
+          <a:noFill/>
+        </p:spPr>
+        <p:txBody>
+          <a:bodyPr wrap="square" lIns="0" rIns="0" tIns="0" bIns="0" anchor="t">
+            <a:spAutoFit/>
+          </a:bodyPr>
+          <a:lstStyle/>
+          <a:p>
+            <a:pPr algn="l">
+              <a:lnSpc>
+                <a:spcPct val="108000"/>
+              </a:lnSpc>
+              <a:spcAft>
+                <a:spcPts val="0"/>
+              </a:spcAft>
+            </a:pPr>
+            <a:r>
+              <a:rPr sz="2600" b="1" i="0">
+                <a:solidFill>
+                  <a:srgbClr val="1A1A1A"/>
+                </a:solidFill>
+                <a:latin typeface="Cambria"/>
+              </a:rPr>
+              <a:t>Make the rivals compete</a:t>
+            </a:r>
+          </a:p>
+        </p:txBody>
+      </p:sp>
+      <p:sp>
+        <p:nvSpPr>
+          <p:cNvPr id="36" name="TextBox 35"/>
+          <p:cNvSpPr txBox="1"/>
+          <p:nvPr/>
+        </p:nvSpPr>
+        <p:spPr>
+          <a:xfrm>
+            <a:off x="17172432" y="9497567"/>
+            <a:ext cx="3767328" cy="1040130"/>
+          </a:xfrm>
+          <a:prstGeom prst="rect">
+            <a:avLst/>
+          </a:prstGeom>
+          <a:noFill/>
+        </p:spPr>
+        <p:txBody>
+          <a:bodyPr wrap="square" lIns="0" rIns="0" tIns="0" bIns="0" anchor="t">
+            <a:spAutoFit/>
+          </a:bodyPr>
+          <a:lstStyle/>
+          <a:p>
+            <a:pPr algn="l">
+              <a:lnSpc>
+                <a:spcPct val="128000"/>
+              </a:lnSpc>
+              <a:spcAft>
+                <a:spcPts val="0"/>
+              </a:spcAft>
+            </a:pPr>
+            <a:r>
+              <a:rPr sz="2100" b="0" i="0">
+                <a:solidFill>
+                  <a:srgbClr val="5F6670"/>
+                </a:solidFill>
+                <a:latin typeface="Calibri"/>
+              </a:rPr>
+              <a:t>Hold real latitude, temperature, rainfall and forest cover constant. Ask again.</a:t>
+            </a:r>
+          </a:p>
+        </p:txBody>
+      </p:sp>
+      <p:sp>
+        <p:nvSpPr>
+          <p:cNvPr id="37" name="TextBox 36"/>
+          <p:cNvSpPr txBox="1"/>
+          <p:nvPr/>
+        </p:nvSpPr>
+        <p:spPr>
+          <a:xfrm>
+            <a:off x="1005840" y="10866881"/>
+            <a:ext cx="19933920" cy="594360"/>
+          </a:xfrm>
+          <a:prstGeom prst="rect">
+            <a:avLst/>
+          </a:prstGeom>
+          <a:noFill/>
+        </p:spPr>
+        <p:txBody>
+          <a:bodyPr wrap="square" lIns="0" rIns="0" tIns="0" bIns="0" anchor="t">
+            <a:spAutoFit/>
+          </a:bodyPr>
+          <a:lstStyle/>
+          <a:p>
+            <a:pPr algn="l">
+              <a:lnSpc>
+                <a:spcPct val="108000"/>
+              </a:lnSpc>
+              <a:spcAft>
+                <a:spcPts val="0"/>
+              </a:spcAft>
+            </a:pPr>
+            <a:r>
+              <a:rPr sz="3600" b="1" i="0">
+                <a:solidFill>
+                  <a:srgbClr val="1A1A1A"/>
+                </a:solidFill>
+                <a:latin typeface="Cambria"/>
+              </a:rPr>
+              <a:t>What we found</a:t>
+            </a:r>
+          </a:p>
+        </p:txBody>
+      </p:sp>
+      <p:sp>
+        <p:nvSpPr>
+          <p:cNvPr id="38" name="TextBox 37"/>
+          <p:cNvSpPr txBox="1"/>
+          <p:nvPr/>
+        </p:nvSpPr>
+        <p:spPr>
+          <a:xfrm>
+            <a:off x="1005840" y="11589258"/>
+            <a:ext cx="19933920" cy="429260"/>
+          </a:xfrm>
+          <a:prstGeom prst="rect">
+            <a:avLst/>
+          </a:prstGeom>
+          <a:noFill/>
+        </p:spPr>
+        <p:txBody>
+          <a:bodyPr wrap="square" lIns="0" rIns="0" tIns="0" bIns="0" anchor="t">
+            <a:spAutoFit/>
+          </a:bodyPr>
+          <a:lstStyle/>
+          <a:p>
+            <a:pPr algn="l">
+              <a:lnSpc>
+                <a:spcPct val="108000"/>
+              </a:lnSpc>
+              <a:spcAft>
+                <a:spcPts val="0"/>
+              </a:spcAft>
+            </a:pPr>
+            <a:r>
+              <a:rPr sz="2600" b="1" i="0">
+                <a:solidFill>
+                  <a:srgbClr val="1A1A1A"/>
+                </a:solidFill>
+                <a:latin typeface="Cambria"/>
+              </a:rPr>
               <a:t>Only the country changed</a:t>
             </a:r>
           </a:p>
@@ -3822,14 +4662,14 @@
       </p:sp>
       <p:sp>
         <p:nvSpPr>
-          <p:cNvPr id="19" name="TextBox 18"/>
-          <p:cNvSpPr txBox="1"/>
-          <p:nvPr/>
-        </p:nvSpPr>
-        <p:spPr>
-          <a:xfrm>
-            <a:off x="1005840" y="7745476"/>
-            <a:ext cx="11612880" cy="329184"/>
+          <p:cNvPr id="39" name="TextBox 38"/>
+          <p:cNvSpPr txBox="1"/>
+          <p:nvPr/>
+        </p:nvSpPr>
+        <p:spPr>
+          <a:xfrm>
+            <a:off x="1005840" y="12128246"/>
+            <a:ext cx="9738360" cy="310896"/>
           </a:xfrm>
           <a:prstGeom prst="rect">
             <a:avLst/>
@@ -3864,14 +4704,14 @@
       </p:sp>
       <p:sp>
         <p:nvSpPr>
-          <p:cNvPr id="20" name="TextBox 19"/>
-          <p:cNvSpPr txBox="1"/>
-          <p:nvPr/>
-        </p:nvSpPr>
-        <p:spPr>
-          <a:xfrm>
-            <a:off x="1005840" y="8129524"/>
-            <a:ext cx="2855213" cy="384048"/>
+          <p:cNvPr id="40" name="TextBox 39"/>
+          <p:cNvSpPr txBox="1"/>
+          <p:nvPr/>
+        </p:nvSpPr>
+        <p:spPr>
+          <a:xfrm>
+            <a:off x="1005840" y="12475718"/>
+            <a:ext cx="2386584" cy="365760"/>
           </a:xfrm>
           <a:prstGeom prst="rect">
             <a:avLst/>
@@ -3899,7 +4739,7 @@
                 </a:solidFill>
                 <a:latin typeface="Cambria"/>
               </a:rPr>
-              <a:t>Niger  </a:t>
+              <a:t>Niger </a:t>
             </a:r>
           </a:p>
           <a:p>
@@ -3925,14 +4765,14 @@
       </p:sp>
       <p:sp>
         <p:nvSpPr>
-          <p:cNvPr id="21" name="TextBox 20"/>
-          <p:cNvSpPr txBox="1"/>
-          <p:nvPr/>
-        </p:nvSpPr>
-        <p:spPr>
-          <a:xfrm>
-            <a:off x="3925061" y="8129524"/>
-            <a:ext cx="2855213" cy="384048"/>
+          <p:cNvPr id="41" name="TextBox 40"/>
+          <p:cNvSpPr txBox="1"/>
+          <p:nvPr/>
+        </p:nvSpPr>
+        <p:spPr>
+          <a:xfrm>
+            <a:off x="3456432" y="12475718"/>
+            <a:ext cx="2386584" cy="365760"/>
           </a:xfrm>
           <a:prstGeom prst="rect">
             <a:avLst/>
@@ -3960,7 +4800,7 @@
                 </a:solidFill>
                 <a:latin typeface="Cambria"/>
               </a:rPr>
-              <a:t>Nigeria  </a:t>
+              <a:t>Nigeria </a:t>
             </a:r>
           </a:p>
           <a:p>
@@ -3986,14 +4826,14 @@
       </p:sp>
       <p:sp>
         <p:nvSpPr>
-          <p:cNvPr id="22" name="TextBox 21"/>
-          <p:cNvSpPr txBox="1"/>
-          <p:nvPr/>
-        </p:nvSpPr>
-        <p:spPr>
-          <a:xfrm>
-            <a:off x="6844283" y="8129524"/>
-            <a:ext cx="2855213" cy="384048"/>
+          <p:cNvPr id="42" name="TextBox 41"/>
+          <p:cNvSpPr txBox="1"/>
+          <p:nvPr/>
+        </p:nvSpPr>
+        <p:spPr>
+          <a:xfrm>
+            <a:off x="5907023" y="12475718"/>
+            <a:ext cx="2386584" cy="365760"/>
           </a:xfrm>
           <a:prstGeom prst="rect">
             <a:avLst/>
@@ -4021,7 +4861,7 @@
                 </a:solidFill>
                 <a:latin typeface="Cambria"/>
               </a:rPr>
-              <a:t>Chad  </a:t>
+              <a:t>Chad </a:t>
             </a:r>
           </a:p>
           <a:p>
@@ -4047,14 +4887,14 @@
       </p:sp>
       <p:sp>
         <p:nvSpPr>
-          <p:cNvPr id="23" name="TextBox 22"/>
-          <p:cNvSpPr txBox="1"/>
-          <p:nvPr/>
-        </p:nvSpPr>
-        <p:spPr>
-          <a:xfrm>
-            <a:off x="9763505" y="8129524"/>
-            <a:ext cx="2855213" cy="384048"/>
+          <p:cNvPr id="43" name="TextBox 42"/>
+          <p:cNvSpPr txBox="1"/>
+          <p:nvPr/>
+        </p:nvSpPr>
+        <p:spPr>
+          <a:xfrm>
+            <a:off x="8357615" y="12475718"/>
+            <a:ext cx="2386584" cy="365760"/>
           </a:xfrm>
           <a:prstGeom prst="rect">
             <a:avLst/>
@@ -4082,7 +4922,7 @@
                 </a:solidFill>
                 <a:latin typeface="Cambria"/>
               </a:rPr>
-              <a:t>Mali  </a:t>
+              <a:t>Mali </a:t>
             </a:r>
           </a:p>
           <a:p>
@@ -4108,7 +4948,7 @@
       </p:sp>
       <p:pic>
         <p:nvPicPr>
-          <p:cNvPr id="24" name="Picture 23" descr="warm-row.jpg"/>
+          <p:cNvPr id="44" name="Picture 43" descr="warm-row.jpg"/>
           <p:cNvPicPr>
             <a:picLocks noChangeAspect="1"/>
           </p:cNvPicPr>
@@ -4122,8 +4962,8 @@
         </p:blipFill>
         <p:spPr>
           <a:xfrm>
-            <a:off x="1005840" y="8550148"/>
-            <a:ext cx="11612880" cy="1916770"/>
+            <a:off x="1005840" y="12841477"/>
+            <a:ext cx="9738360" cy="1607370"/>
           </a:xfrm>
           <a:prstGeom prst="rect">
             <a:avLst/>
@@ -4132,14 +4972,14 @@
       </p:pic>
       <p:sp>
         <p:nvSpPr>
-          <p:cNvPr id="25" name="TextBox 24"/>
-          <p:cNvSpPr txBox="1"/>
-          <p:nvPr/>
-        </p:nvSpPr>
-        <p:spPr>
-          <a:xfrm>
-            <a:off x="1005840" y="10686374"/>
-            <a:ext cx="11612880" cy="329184"/>
+          <p:cNvPr id="45" name="TextBox 44"/>
+          <p:cNvSpPr txBox="1"/>
+          <p:nvPr/>
+        </p:nvSpPr>
+        <p:spPr>
+          <a:xfrm>
+            <a:off x="11201400" y="12128246"/>
+            <a:ext cx="9738360" cy="310896"/>
           </a:xfrm>
           <a:prstGeom prst="rect">
             <a:avLst/>
@@ -4174,14 +5014,14 @@
       </p:sp>
       <p:sp>
         <p:nvSpPr>
-          <p:cNvPr id="26" name="TextBox 25"/>
-          <p:cNvSpPr txBox="1"/>
-          <p:nvPr/>
-        </p:nvSpPr>
-        <p:spPr>
-          <a:xfrm>
-            <a:off x="1005840" y="11070422"/>
-            <a:ext cx="2855213" cy="384048"/>
+          <p:cNvPr id="46" name="TextBox 45"/>
+          <p:cNvSpPr txBox="1"/>
+          <p:nvPr/>
+        </p:nvSpPr>
+        <p:spPr>
+          <a:xfrm>
+            <a:off x="11201400" y="12475718"/>
+            <a:ext cx="2386584" cy="365760"/>
           </a:xfrm>
           <a:prstGeom prst="rect">
             <a:avLst/>
@@ -4209,7 +5049,7 @@
                 </a:solidFill>
                 <a:latin typeface="Cambria"/>
               </a:rPr>
-              <a:t>Norway  </a:t>
+              <a:t>Norway </a:t>
             </a:r>
           </a:p>
           <a:p>
@@ -4235,14 +5075,14 @@
       </p:sp>
       <p:sp>
         <p:nvSpPr>
-          <p:cNvPr id="27" name="TextBox 26"/>
-          <p:cNvSpPr txBox="1"/>
-          <p:nvPr/>
-        </p:nvSpPr>
-        <p:spPr>
-          <a:xfrm>
-            <a:off x="3925061" y="11070422"/>
-            <a:ext cx="2855213" cy="384048"/>
+          <p:cNvPr id="47" name="TextBox 46"/>
+          <p:cNvSpPr txBox="1"/>
+          <p:nvPr/>
+        </p:nvSpPr>
+        <p:spPr>
+          <a:xfrm>
+            <a:off x="13651992" y="12475718"/>
+            <a:ext cx="2386584" cy="365760"/>
           </a:xfrm>
           <a:prstGeom prst="rect">
             <a:avLst/>
@@ -4270,7 +5110,7 @@
                 </a:solidFill>
                 <a:latin typeface="Cambria"/>
               </a:rPr>
-              <a:t>Australia  </a:t>
+              <a:t>Australia </a:t>
             </a:r>
           </a:p>
           <a:p>
@@ -4296,14 +5136,14 @@
       </p:sp>
       <p:sp>
         <p:nvSpPr>
-          <p:cNvPr id="28" name="TextBox 27"/>
-          <p:cNvSpPr txBox="1"/>
-          <p:nvPr/>
-        </p:nvSpPr>
-        <p:spPr>
-          <a:xfrm>
-            <a:off x="6844283" y="11070422"/>
-            <a:ext cx="2855213" cy="384048"/>
+          <p:cNvPr id="48" name="TextBox 47"/>
+          <p:cNvSpPr txBox="1"/>
+          <p:nvPr/>
+        </p:nvSpPr>
+        <p:spPr>
+          <a:xfrm>
+            <a:off x="16102584" y="12475718"/>
+            <a:ext cx="2386584" cy="365760"/>
           </a:xfrm>
           <a:prstGeom prst="rect">
             <a:avLst/>
@@ -4331,7 +5171,7 @@
                 </a:solidFill>
                 <a:latin typeface="Cambria"/>
               </a:rPr>
-              <a:t>Costa Rica  </a:t>
+              <a:t>Costa Rica </a:t>
             </a:r>
           </a:p>
           <a:p>
@@ -4357,14 +5197,14 @@
       </p:sp>
       <p:sp>
         <p:nvSpPr>
-          <p:cNvPr id="29" name="TextBox 28"/>
-          <p:cNvSpPr txBox="1"/>
-          <p:nvPr/>
-        </p:nvSpPr>
-        <p:spPr>
-          <a:xfrm>
-            <a:off x="9763505" y="11070422"/>
-            <a:ext cx="2855213" cy="384048"/>
+          <p:cNvPr id="49" name="TextBox 48"/>
+          <p:cNvSpPr txBox="1"/>
+          <p:nvPr/>
+        </p:nvSpPr>
+        <p:spPr>
+          <a:xfrm>
+            <a:off x="18553176" y="12475718"/>
+            <a:ext cx="2386584" cy="365760"/>
           </a:xfrm>
           <a:prstGeom prst="rect">
             <a:avLst/>
@@ -4392,7 +5232,7 @@
                 </a:solidFill>
                 <a:latin typeface="Cambria"/>
               </a:rPr>
-              <a:t>South Africa  </a:t>
+              <a:t>South Africa </a:t>
             </a:r>
           </a:p>
           <a:p>
@@ -4418,7 +5258,7 @@
       </p:sp>
       <p:pic>
         <p:nvPicPr>
-          <p:cNvPr id="30" name="Picture 29" descr="cool-row.jpg"/>
+          <p:cNvPr id="50" name="Picture 49" descr="cool-row.jpg"/>
           <p:cNvPicPr>
             <a:picLocks noChangeAspect="1"/>
           </p:cNvPicPr>
@@ -4432,8 +5272,8 @@
         </p:blipFill>
         <p:spPr>
           <a:xfrm>
-            <a:off x="1005840" y="11491046"/>
-            <a:ext cx="11612880" cy="1916770"/>
+            <a:off x="11201400" y="12841477"/>
+            <a:ext cx="9738360" cy="1607370"/>
           </a:xfrm>
           <a:prstGeom prst="rect">
             <a:avLst/>
@@ -4442,14 +5282,75 @@
       </p:pic>
       <p:sp>
         <p:nvSpPr>
-          <p:cNvPr id="31" name="TextBox 30"/>
-          <p:cNvSpPr txBox="1"/>
-          <p:nvPr/>
-        </p:nvSpPr>
-        <p:spPr>
-          <a:xfrm>
-            <a:off x="13258799" y="6887464"/>
-            <a:ext cx="7680960" cy="457200"/>
+          <p:cNvPr id="51" name="TextBox 50"/>
+          <p:cNvSpPr txBox="1"/>
+          <p:nvPr/>
+        </p:nvSpPr>
+        <p:spPr>
+          <a:xfrm>
+            <a:off x="1005840" y="14613440"/>
+            <a:ext cx="19933920" cy="693420"/>
+          </a:xfrm>
+          <a:prstGeom prst="rect">
+            <a:avLst/>
+          </a:prstGeom>
+          <a:noFill/>
+        </p:spPr>
+        <p:txBody>
+          <a:bodyPr wrap="square" lIns="0" rIns="0" tIns="0" bIns="0" anchor="t">
+            <a:spAutoFit/>
+          </a:bodyPr>
+          <a:lstStyle/>
+          <a:p>
+            <a:pPr algn="l">
+              <a:lnSpc>
+                <a:spcPct val="128000"/>
+              </a:lnSpc>
+              <a:spcAft>
+                <a:spcPts val="0"/>
+              </a:spcAft>
+            </a:pPr>
+            <a:r>
+              <a:rPr sz="2100" b="1" i="0">
+                <a:solidFill>
+                  <a:srgbClr val="1A1A1A"/>
+                </a:solidFill>
+                <a:latin typeface="Calibri"/>
+              </a:rPr>
+              <a:t>What you are looking at  </a:t>
+            </a:r>
+          </a:p>
+          <a:p>
+            <a:pPr algn="l">
+              <a:lnSpc>
+                <a:spcPct val="128000"/>
+              </a:lnSpc>
+              <a:spcAft>
+                <a:spcPts val="0"/>
+              </a:spcAft>
+            </a:pPr>
+            <a:r>
+              <a:rPr sz="2100" b="0" i="0">
+                <a:solidFill>
+                  <a:srgbClr val="5F6670"/>
+                </a:solidFill>
+                <a:latin typeface="Calibri"/>
+              </a:rPr>
+              <a:t>Image 1 of every prompt uses the same seed, so all eight start from identical noise and the street recedes the same way. The only difference is the country named. Figures are standard deviations from the average country.</a:t>
+            </a:r>
+          </a:p>
+        </p:txBody>
+      </p:sp>
+      <p:sp>
+        <p:nvSpPr>
+          <p:cNvPr id="52" name="TextBox 51"/>
+          <p:cNvSpPr txBox="1"/>
+          <p:nvPr/>
+        </p:nvSpPr>
+        <p:spPr>
+          <a:xfrm>
+            <a:off x="1005840" y="15645188"/>
+            <a:ext cx="384048" cy="384048"/>
           </a:xfrm>
           <a:prstGeom prst="rect">
             <a:avLst/>
@@ -4471,69 +5372,237 @@
               </a:spcAft>
             </a:pPr>
             <a:r>
-              <a:rPr sz="2800" b="1" i="0">
+              <a:rPr sz="2100" b="0" i="0">
+                <a:solidFill>
+                  <a:srgbClr val="B07C1F"/>
+                </a:solidFill>
+                <a:latin typeface="Calibri"/>
+              </a:rPr>
+              <a:t>●</a:t>
+            </a:r>
+          </a:p>
+        </p:txBody>
+      </p:sp>
+      <p:sp>
+        <p:nvSpPr>
+          <p:cNvPr id="53" name="TextBox 52"/>
+          <p:cNvSpPr txBox="1"/>
+          <p:nvPr/>
+        </p:nvSpPr>
+        <p:spPr>
+          <a:xfrm>
+            <a:off x="1463040" y="15617756"/>
+            <a:ext cx="9098280" cy="429260"/>
+          </a:xfrm>
+          <a:prstGeom prst="rect">
+            <a:avLst/>
+          </a:prstGeom>
+          <a:noFill/>
+        </p:spPr>
+        <p:txBody>
+          <a:bodyPr wrap="square" lIns="0" rIns="0" tIns="0" bIns="0" anchor="t">
+            <a:spAutoFit/>
+          </a:bodyPr>
+          <a:lstStyle/>
+          <a:p>
+            <a:pPr algn="l">
+              <a:lnSpc>
+                <a:spcPct val="108000"/>
+              </a:lnSpc>
+              <a:spcAft>
+                <a:spcPts val="0"/>
+              </a:spcAft>
+            </a:pPr>
+            <a:r>
+              <a:rPr sz="2600" b="1" i="0">
                 <a:solidFill>
                   <a:srgbClr val="1A1A1A"/>
                 </a:solidFill>
                 <a:latin typeface="Cambria"/>
               </a:rPr>
-              <a:t>The question</a:t>
-            </a:r>
-          </a:p>
-        </p:txBody>
-      </p:sp>
-      <p:sp>
-        <p:nvSpPr>
-          <p:cNvPr id="32" name="TextBox 31"/>
-          <p:cNvSpPr txBox="1"/>
-          <p:nvPr/>
-        </p:nvSpPr>
-        <p:spPr>
-          <a:xfrm>
-            <a:off x="13258799" y="7436103"/>
-            <a:ext cx="7680960" cy="1584960"/>
-          </a:xfrm>
-          <a:prstGeom prst="rect">
-            <a:avLst/>
-          </a:prstGeom>
-          <a:noFill/>
-        </p:spPr>
-        <p:txBody>
-          <a:bodyPr wrap="square" lIns="0" rIns="0" tIns="0" bIns="0" anchor="t">
-            <a:spAutoFit/>
-          </a:bodyPr>
-          <a:lstStyle/>
-          <a:p>
-            <a:pPr algn="l">
-              <a:lnSpc>
-                <a:spcPct val="130000"/>
-              </a:lnSpc>
-              <a:spcAft>
-                <a:spcPts val="0"/>
-              </a:spcAft>
-            </a:pPr>
-            <a:r>
-              <a:rPr sz="2400" b="0" i="0">
+              <a:t>It really does grade countries</a:t>
+            </a:r>
+          </a:p>
+        </p:txBody>
+      </p:sp>
+      <p:sp>
+        <p:nvSpPr>
+          <p:cNvPr id="54" name="TextBox 53"/>
+          <p:cNvSpPr txBox="1"/>
+          <p:nvPr/>
+        </p:nvSpPr>
+        <p:spPr>
+          <a:xfrm>
+            <a:off x="1463040" y="16101880"/>
+            <a:ext cx="9098280" cy="379729"/>
+          </a:xfrm>
+          <a:prstGeom prst="rect">
+            <a:avLst/>
+          </a:prstGeom>
+          <a:noFill/>
+        </p:spPr>
+        <p:txBody>
+          <a:bodyPr wrap="square" lIns="0" rIns="0" tIns="0" bIns="0" anchor="t">
+            <a:spAutoFit/>
+          </a:bodyPr>
+          <a:lstStyle/>
+          <a:p>
+            <a:pPr algn="l">
+              <a:lnSpc>
+                <a:spcPct val="128000"/>
+              </a:lnSpc>
+              <a:spcAft>
+                <a:spcPts val="0"/>
+              </a:spcAft>
+            </a:pPr>
+            <a:r>
+              <a:rPr sz="2300" b="0" i="0">
+                <a:solidFill>
+                  <a:srgbClr val="5F6670"/>
+                </a:solidFill>
+                <a:latin typeface="Calibri"/>
+              </a:rPr>
+              <a:t>53 of 60 beat its own no-country default. Norway alone is cooler.</a:t>
+            </a:r>
+          </a:p>
+        </p:txBody>
+      </p:sp>
+      <p:sp>
+        <p:nvSpPr>
+          <p:cNvPr id="55" name="TextBox 54"/>
+          <p:cNvSpPr txBox="1"/>
+          <p:nvPr/>
+        </p:nvSpPr>
+        <p:spPr>
+          <a:xfrm>
+            <a:off x="11384280" y="15645188"/>
+            <a:ext cx="384048" cy="384048"/>
+          </a:xfrm>
+          <a:prstGeom prst="rect">
+            <a:avLst/>
+          </a:prstGeom>
+          <a:noFill/>
+        </p:spPr>
+        <p:txBody>
+          <a:bodyPr wrap="square" lIns="0" rIns="0" tIns="0" bIns="0" anchor="t">
+            <a:spAutoFit/>
+          </a:bodyPr>
+          <a:lstStyle/>
+          <a:p>
+            <a:pPr algn="l">
+              <a:lnSpc>
+                <a:spcPct val="108000"/>
+              </a:lnSpc>
+              <a:spcAft>
+                <a:spcPts val="0"/>
+              </a:spcAft>
+            </a:pPr>
+            <a:r>
+              <a:rPr sz="2100" b="0" i="0">
+                <a:solidFill>
+                  <a:srgbClr val="B07C1F"/>
+                </a:solidFill>
+                <a:latin typeface="Calibri"/>
+              </a:rPr>
+              <a:t>●</a:t>
+            </a:r>
+          </a:p>
+        </p:txBody>
+      </p:sp>
+      <p:sp>
+        <p:nvSpPr>
+          <p:cNvPr id="56" name="TextBox 55"/>
+          <p:cNvSpPr txBox="1"/>
+          <p:nvPr/>
+        </p:nvSpPr>
+        <p:spPr>
+          <a:xfrm>
+            <a:off x="11841480" y="15617756"/>
+            <a:ext cx="9098280" cy="429260"/>
+          </a:xfrm>
+          <a:prstGeom prst="rect">
+            <a:avLst/>
+          </a:prstGeom>
+          <a:noFill/>
+        </p:spPr>
+        <p:txBody>
+          <a:bodyPr wrap="square" lIns="0" rIns="0" tIns="0" bIns="0" anchor="t">
+            <a:spAutoFit/>
+          </a:bodyPr>
+          <a:lstStyle/>
+          <a:p>
+            <a:pPr algn="l">
+              <a:lnSpc>
+                <a:spcPct val="108000"/>
+              </a:lnSpc>
+              <a:spcAft>
+                <a:spcPts val="0"/>
+              </a:spcAft>
+            </a:pPr>
+            <a:r>
+              <a:rPr sz="2600" b="1" i="0">
                 <a:solidFill>
                   <a:srgbClr val="1A1A1A"/>
                 </a:solidFill>
+                <a:latin typeface="Cambria"/>
+              </a:rPr>
+              <a:t>But not the poor ones — the dry ones</a:t>
+            </a:r>
+          </a:p>
+        </p:txBody>
+      </p:sp>
+      <p:sp>
+        <p:nvSpPr>
+          <p:cNvPr id="57" name="TextBox 56"/>
+          <p:cNvSpPr txBox="1"/>
+          <p:nvPr/>
+        </p:nvSpPr>
+        <p:spPr>
+          <a:xfrm>
+            <a:off x="11841480" y="16101880"/>
+            <a:ext cx="9098280" cy="379729"/>
+          </a:xfrm>
+          <a:prstGeom prst="rect">
+            <a:avLst/>
+          </a:prstGeom>
+          <a:noFill/>
+        </p:spPr>
+        <p:txBody>
+          <a:bodyPr wrap="square" lIns="0" rIns="0" tIns="0" bIns="0" anchor="t">
+            <a:spAutoFit/>
+          </a:bodyPr>
+          <a:lstStyle/>
+          <a:p>
+            <a:pPr algn="l">
+              <a:lnSpc>
+                <a:spcPct val="128000"/>
+              </a:lnSpc>
+              <a:spcAft>
+                <a:spcPts val="0"/>
+              </a:spcAft>
+            </a:pPr>
+            <a:r>
+              <a:rPr sz="2300" b="0" i="0">
+                <a:solidFill>
+                  <a:srgbClr val="5F6670"/>
+                </a:solidFill>
                 <a:latin typeface="Calibri"/>
               </a:rPr>
-              <a:t>Film colours places: a sepia wash over Mexico, dust and amber for “somewhere dangerous.” A model trained on those pictures may have learned the habit. Does it warm the countries that are poorer?</a:t>
-            </a:r>
-          </a:p>
-        </p:txBody>
-      </p:sp>
-      <p:sp>
-        <p:nvSpPr>
-          <p:cNvPr id="33" name="TextBox 32"/>
-          <p:cNvSpPr txBox="1"/>
-          <p:nvPr/>
-        </p:nvSpPr>
-        <p:spPr>
-          <a:xfrm>
-            <a:off x="13258799" y="9523984"/>
-            <a:ext cx="7680960" cy="420624"/>
+              <a:t>Saudi Arabia and Kuwait are high-income and near the top.</a:t>
+            </a:r>
+          </a:p>
+        </p:txBody>
+      </p:sp>
+      <p:sp>
+        <p:nvSpPr>
+          <p:cNvPr id="58" name="TextBox 57"/>
+          <p:cNvSpPr txBox="1"/>
+          <p:nvPr/>
+        </p:nvSpPr>
+        <p:spPr>
+          <a:xfrm>
+            <a:off x="1005840" y="16728498"/>
+            <a:ext cx="384048" cy="384048"/>
           </a:xfrm>
           <a:prstGeom prst="rect">
             <a:avLst/>
@@ -4555,42 +5624,126 @@
               </a:spcAft>
             </a:pPr>
             <a:r>
-              <a:rPr sz="2800" b="1" i="0">
+              <a:rPr sz="2100" b="0" i="0">
+                <a:solidFill>
+                  <a:srgbClr val="B07C1F"/>
+                </a:solidFill>
+                <a:latin typeface="Calibri"/>
+              </a:rPr>
+              <a:t>●</a:t>
+            </a:r>
+          </a:p>
+        </p:txBody>
+      </p:sp>
+      <p:sp>
+        <p:nvSpPr>
+          <p:cNvPr id="59" name="TextBox 58"/>
+          <p:cNvSpPr txBox="1"/>
+          <p:nvPr/>
+        </p:nvSpPr>
+        <p:spPr>
+          <a:xfrm>
+            <a:off x="1463040" y="16701066"/>
+            <a:ext cx="9098280" cy="429260"/>
+          </a:xfrm>
+          <a:prstGeom prst="rect">
+            <a:avLst/>
+          </a:prstGeom>
+          <a:noFill/>
+        </p:spPr>
+        <p:txBody>
+          <a:bodyPr wrap="square" lIns="0" rIns="0" tIns="0" bIns="0" anchor="t">
+            <a:spAutoFit/>
+          </a:bodyPr>
+          <a:lstStyle/>
+          <a:p>
+            <a:pPr algn="l">
+              <a:lnSpc>
+                <a:spcPct val="108000"/>
+              </a:lnSpc>
+              <a:spcAft>
+                <a:spcPts val="0"/>
+              </a:spcAft>
+            </a:pPr>
+            <a:r>
+              <a:rPr sz="2600" b="1" i="0">
                 <a:solidFill>
                   <a:srgbClr val="1A1A1A"/>
                 </a:solidFill>
                 <a:latin typeface="Cambria"/>
               </a:rPr>
-              <a:t>What you are looking at</a:t>
-            </a:r>
-          </a:p>
-        </p:txBody>
-      </p:sp>
-      <p:sp>
-        <p:nvSpPr>
-          <p:cNvPr id="34" name="TextBox 33"/>
-          <p:cNvSpPr txBox="1"/>
-          <p:nvPr/>
-        </p:nvSpPr>
-        <p:spPr>
-          <a:xfrm>
-            <a:off x="13258799" y="10036048"/>
-            <a:ext cx="7680960" cy="1386840"/>
-          </a:xfrm>
-          <a:prstGeom prst="rect">
-            <a:avLst/>
-          </a:prstGeom>
-          <a:noFill/>
-        </p:spPr>
-        <p:txBody>
-          <a:bodyPr wrap="square" lIns="0" rIns="0" tIns="0" bIns="0" anchor="t">
-            <a:spAutoFit/>
-          </a:bodyPr>
-          <a:lstStyle/>
-          <a:p>
-            <a:pPr algn="l">
-              <a:lnSpc>
-                <a:spcPct val="130000"/>
+              <a:t>Income looks real until climate is held constant</a:t>
+            </a:r>
+          </a:p>
+        </p:txBody>
+      </p:sp>
+      <p:sp>
+        <p:nvSpPr>
+          <p:cNvPr id="60" name="TextBox 59"/>
+          <p:cNvSpPr txBox="1"/>
+          <p:nvPr/>
+        </p:nvSpPr>
+        <p:spPr>
+          <a:xfrm>
+            <a:off x="1463040" y="17185190"/>
+            <a:ext cx="9098280" cy="379729"/>
+          </a:xfrm>
+          <a:prstGeom prst="rect">
+            <a:avLst/>
+          </a:prstGeom>
+          <a:noFill/>
+        </p:spPr>
+        <p:txBody>
+          <a:bodyPr wrap="square" lIns="0" rIns="0" tIns="0" bIns="0" anchor="t">
+            <a:spAutoFit/>
+          </a:bodyPr>
+          <a:lstStyle/>
+          <a:p>
+            <a:pPr algn="l">
+              <a:lnSpc>
+                <a:spcPct val="128000"/>
+              </a:lnSpc>
+              <a:spcAft>
+                <a:spcPts val="0"/>
+              </a:spcAft>
+            </a:pPr>
+            <a:r>
+              <a:rPr sz="2300" b="0" i="0">
+                <a:solidFill>
+                  <a:srgbClr val="5F6670"/>
+                </a:solidFill>
+                <a:latin typeface="Calibri"/>
+              </a:rPr>
+              <a:t>d = +0.72 (p = .018) falls to +0.52, no better than chance.</a:t>
+            </a:r>
+          </a:p>
+        </p:txBody>
+      </p:sp>
+      <p:sp>
+        <p:nvSpPr>
+          <p:cNvPr id="61" name="TextBox 60"/>
+          <p:cNvSpPr txBox="1"/>
+          <p:nvPr/>
+        </p:nvSpPr>
+        <p:spPr>
+          <a:xfrm>
+            <a:off x="11384280" y="16728498"/>
+            <a:ext cx="384048" cy="384048"/>
+          </a:xfrm>
+          <a:prstGeom prst="rect">
+            <a:avLst/>
+          </a:prstGeom>
+          <a:noFill/>
+        </p:spPr>
+        <p:txBody>
+          <a:bodyPr wrap="square" lIns="0" rIns="0" tIns="0" bIns="0" anchor="t">
+            <a:spAutoFit/>
+          </a:bodyPr>
+          <a:lstStyle/>
+          <a:p>
+            <a:pPr algn="l">
+              <a:lnSpc>
+                <a:spcPct val="108000"/>
               </a:lnSpc>
               <a:spcAft>
                 <a:spcPts val="0"/>
@@ -4599,25 +5752,109 @@
             <a:r>
               <a:rPr sz="2100" b="0" i="0">
                 <a:solidFill>
+                  <a:srgbClr val="B07C1F"/>
+                </a:solidFill>
+                <a:latin typeface="Calibri"/>
+              </a:rPr>
+              <a:t>●</a:t>
+            </a:r>
+          </a:p>
+        </p:txBody>
+      </p:sp>
+      <p:sp>
+        <p:nvSpPr>
+          <p:cNvPr id="62" name="TextBox 61"/>
+          <p:cNvSpPr txBox="1"/>
+          <p:nvPr/>
+        </p:nvSpPr>
+        <p:spPr>
+          <a:xfrm>
+            <a:off x="11841480" y="16701066"/>
+            <a:ext cx="9098280" cy="429260"/>
+          </a:xfrm>
+          <a:prstGeom prst="rect">
+            <a:avLst/>
+          </a:prstGeom>
+          <a:noFill/>
+        </p:spPr>
+        <p:txBody>
+          <a:bodyPr wrap="square" lIns="0" rIns="0" tIns="0" bIns="0" anchor="t">
+            <a:spAutoFit/>
+          </a:bodyPr>
+          <a:lstStyle/>
+          <a:p>
+            <a:pPr algn="l">
+              <a:lnSpc>
+                <a:spcPct val="108000"/>
+              </a:lnSpc>
+              <a:spcAft>
+                <a:spcPts val="0"/>
+              </a:spcAft>
+            </a:pPr>
+            <a:r>
+              <a:rPr sz="2600" b="1" i="0">
+                <a:solidFill>
+                  <a:srgbClr val="1A1A1A"/>
+                </a:solidFill>
+                <a:latin typeface="Cambria"/>
+              </a:rPr>
+              <a:t>Latitude was the wrong confound</a:t>
+            </a:r>
+          </a:p>
+        </p:txBody>
+      </p:sp>
+      <p:sp>
+        <p:nvSpPr>
+          <p:cNvPr id="63" name="TextBox 62"/>
+          <p:cNvSpPr txBox="1"/>
+          <p:nvPr/>
+        </p:nvSpPr>
+        <p:spPr>
+          <a:xfrm>
+            <a:off x="11841480" y="17185190"/>
+            <a:ext cx="9098280" cy="379729"/>
+          </a:xfrm>
+          <a:prstGeom prst="rect">
+            <a:avLst/>
+          </a:prstGeom>
+          <a:noFill/>
+        </p:spPr>
+        <p:txBody>
+          <a:bodyPr wrap="square" lIns="0" rIns="0" tIns="0" bIns="0" anchor="t">
+            <a:spAutoFit/>
+          </a:bodyPr>
+          <a:lstStyle/>
+          <a:p>
+            <a:pPr algn="l">
+              <a:lnSpc>
+                <a:spcPct val="128000"/>
+              </a:lnSpc>
+              <a:spcAft>
+                <a:spcPts val="0"/>
+              </a:spcAft>
+            </a:pPr>
+            <a:r>
+              <a:rPr sz="2300" b="0" i="0">
+                <a:solidFill>
                   <a:srgbClr val="5F6670"/>
                 </a:solidFill>
                 <a:latin typeface="Calibri"/>
               </a:rPr>
-              <a:t>Image 1 of every prompt uses the same seed, so all eight start from identical noise and the street recedes the same way. Only the country in the sentence differs. Figures are standard deviations from the average country.</a:t>
-            </a:r>
-          </a:p>
-        </p:txBody>
-      </p:sp>
-      <p:sp>
-        <p:nvSpPr>
-          <p:cNvPr id="35" name="TextBox 34"/>
-          <p:cNvSpPr txBox="1"/>
-          <p:nvPr/>
-        </p:nvSpPr>
-        <p:spPr>
-          <a:xfrm>
-            <a:off x="1005840" y="13865017"/>
-            <a:ext cx="11612880" cy="1386840"/>
+              <a:t>It accounts for 5%. Forest cover accounts for 30%.</a:t>
+            </a:r>
+          </a:p>
+        </p:txBody>
+      </p:sp>
+      <p:sp>
+        <p:nvSpPr>
+          <p:cNvPr id="64" name="TextBox 63"/>
+          <p:cNvSpPr txBox="1"/>
+          <p:nvPr/>
+        </p:nvSpPr>
+        <p:spPr>
+          <a:xfrm>
+            <a:off x="1005840" y="17811808"/>
+            <a:ext cx="384048" cy="384048"/>
           </a:xfrm>
           <a:prstGeom prst="rect">
             <a:avLst/>
@@ -4639,69 +5876,111 @@
               </a:spcAft>
             </a:pPr>
             <a:r>
-              <a:rPr sz="4200" b="1" i="0">
+              <a:rPr sz="2100" b="0" i="0">
+                <a:solidFill>
+                  <a:srgbClr val="B07C1F"/>
+                </a:solidFill>
+                <a:latin typeface="Calibri"/>
+              </a:rPr>
+              <a:t>●</a:t>
+            </a:r>
+          </a:p>
+        </p:txBody>
+      </p:sp>
+      <p:sp>
+        <p:nvSpPr>
+          <p:cNvPr id="65" name="TextBox 64"/>
+          <p:cNvSpPr txBox="1"/>
+          <p:nvPr/>
+        </p:nvSpPr>
+        <p:spPr>
+          <a:xfrm>
+            <a:off x="1463040" y="17784376"/>
+            <a:ext cx="9098280" cy="429260"/>
+          </a:xfrm>
+          <a:prstGeom prst="rect">
+            <a:avLst/>
+          </a:prstGeom>
+          <a:noFill/>
+        </p:spPr>
+        <p:txBody>
+          <a:bodyPr wrap="square" lIns="0" rIns="0" tIns="0" bIns="0" anchor="t">
+            <a:spAutoFit/>
+          </a:bodyPr>
+          <a:lstStyle/>
+          <a:p>
+            <a:pPr algn="l">
+              <a:lnSpc>
+                <a:spcPct val="108000"/>
+              </a:lnSpc>
+              <a:spcAft>
+                <a:spcPts val="0"/>
+              </a:spcAft>
+            </a:pPr>
+            <a:r>
+              <a:rPr sz="2600" b="1" i="0">
                 <a:solidFill>
                   <a:srgbClr val="1A1A1A"/>
                 </a:solidFill>
                 <a:latin typeface="Cambria"/>
               </a:rPr>
-              <a:t>How the model colours each of the 60 countries</a:t>
-            </a:r>
-          </a:p>
-        </p:txBody>
-      </p:sp>
-      <p:sp>
-        <p:nvSpPr>
-          <p:cNvPr id="36" name="TextBox 35"/>
-          <p:cNvSpPr txBox="1"/>
-          <p:nvPr/>
-        </p:nvSpPr>
-        <p:spPr>
-          <a:xfrm>
-            <a:off x="13258799" y="13919881"/>
-            <a:ext cx="7680960" cy="693420"/>
-          </a:xfrm>
-          <a:prstGeom prst="rect">
-            <a:avLst/>
-          </a:prstGeom>
-          <a:noFill/>
-        </p:spPr>
-        <p:txBody>
-          <a:bodyPr wrap="square" lIns="0" rIns="0" tIns="0" bIns="0" anchor="t">
-            <a:spAutoFit/>
-          </a:bodyPr>
-          <a:lstStyle/>
-          <a:p>
-            <a:pPr algn="l">
-              <a:lnSpc>
-                <a:spcPct val="130000"/>
-              </a:lnSpc>
-              <a:spcAft>
-                <a:spcPts val="0"/>
-              </a:spcAft>
-            </a:pPr>
-            <a:r>
-              <a:rPr sz="2100" b="0" i="0">
+              <a:t>Asia survives everything</a:t>
+            </a:r>
+          </a:p>
+        </p:txBody>
+      </p:sp>
+      <p:sp>
+        <p:nvSpPr>
+          <p:cNvPr id="66" name="TextBox 65"/>
+          <p:cNvSpPr txBox="1"/>
+          <p:nvPr/>
+        </p:nvSpPr>
+        <p:spPr>
+          <a:xfrm>
+            <a:off x="1463040" y="18268500"/>
+            <a:ext cx="9098280" cy="759459"/>
+          </a:xfrm>
+          <a:prstGeom prst="rect">
+            <a:avLst/>
+          </a:prstGeom>
+          <a:noFill/>
+        </p:spPr>
+        <p:txBody>
+          <a:bodyPr wrap="square" lIns="0" rIns="0" tIns="0" bIns="0" anchor="t">
+            <a:spAutoFit/>
+          </a:bodyPr>
+          <a:lstStyle/>
+          <a:p>
+            <a:pPr algn="l">
+              <a:lnSpc>
+                <a:spcPct val="128000"/>
+              </a:lnSpc>
+              <a:spcAft>
+                <a:spcPts val="0"/>
+              </a:spcAft>
+            </a:pPr>
+            <a:r>
+              <a:rPr sz="2300" b="0" i="0">
                 <a:solidFill>
                   <a:srgbClr val="5F6670"/>
                 </a:solidFill>
                 <a:latin typeface="Calibri"/>
               </a:rPr>
-              <a:t>Amber: warmer than the average country. Blue: cooler. Grey: the middle of the pack. Pale: not in this run.</a:t>
-            </a:r>
-          </a:p>
-        </p:txBody>
-      </p:sp>
-      <p:sp>
-        <p:nvSpPr>
-          <p:cNvPr id="37" name="TextBox 36"/>
-          <p:cNvSpPr txBox="1"/>
-          <p:nvPr/>
-        </p:nvSpPr>
-        <p:spPr>
-          <a:xfrm>
-            <a:off x="13258799" y="15015637"/>
-            <a:ext cx="7680960" cy="457200"/>
+              <a:t>+0.73 (p = .011) after every control, in all six kinds of place. Africa's gap vanishes.</a:t>
+            </a:r>
+          </a:p>
+        </p:txBody>
+      </p:sp>
+      <p:sp>
+        <p:nvSpPr>
+          <p:cNvPr id="67" name="TextBox 66"/>
+          <p:cNvSpPr txBox="1"/>
+          <p:nvPr/>
+        </p:nvSpPr>
+        <p:spPr>
+          <a:xfrm>
+            <a:off x="1005840" y="19521736"/>
+            <a:ext cx="9555480" cy="429260"/>
           </a:xfrm>
           <a:prstGeom prst="rect">
             <a:avLst/>
@@ -4723,524 +6002,20 @@
               </a:spcAft>
             </a:pPr>
             <a:r>
-              <a:rPr sz="2800" b="1" i="0">
+              <a:rPr sz="2600" b="1" i="0">
                 <a:solidFill>
                   <a:srgbClr val="1A1A1A"/>
                 </a:solidFill>
                 <a:latin typeface="Cambria"/>
               </a:rPr>
-              <a:t>How it was measured</a:t>
-            </a:r>
-          </a:p>
-        </p:txBody>
-      </p:sp>
-      <p:sp>
-        <p:nvSpPr>
-          <p:cNvPr id="38" name="TextBox 37"/>
-          <p:cNvSpPr txBox="1"/>
-          <p:nvPr/>
-        </p:nvSpPr>
-        <p:spPr>
-          <a:xfrm>
-            <a:off x="13258799" y="15591709"/>
-            <a:ext cx="182880" cy="274320"/>
-          </a:xfrm>
-          <a:prstGeom prst="rect">
-            <a:avLst/>
-          </a:prstGeom>
-          <a:noFill/>
-        </p:spPr>
-        <p:txBody>
-          <a:bodyPr wrap="square" lIns="0" rIns="0" tIns="0" bIns="0" anchor="t">
-            <a:spAutoFit/>
-          </a:bodyPr>
-          <a:lstStyle/>
-          <a:p>
-            <a:pPr algn="l">
-              <a:lnSpc>
-                <a:spcPct val="108000"/>
-              </a:lnSpc>
-              <a:spcAft>
-                <a:spcPts val="0"/>
-              </a:spcAft>
-            </a:pPr>
-            <a:r>
-              <a:rPr sz="2100" b="1" i="0">
-                <a:solidFill>
-                  <a:srgbClr val="B07C1F"/>
-                </a:solidFill>
-                <a:latin typeface="Calibri"/>
-              </a:rPr>
-              <a:t>•</a:t>
-            </a:r>
-          </a:p>
-        </p:txBody>
-      </p:sp>
-      <p:sp>
-        <p:nvSpPr>
-          <p:cNvPr id="39" name="TextBox 38"/>
-          <p:cNvSpPr txBox="1"/>
-          <p:nvPr/>
-        </p:nvSpPr>
-        <p:spPr>
-          <a:xfrm>
-            <a:off x="13533119" y="15564277"/>
-            <a:ext cx="7406640" cy="759459"/>
-          </a:xfrm>
-          <a:prstGeom prst="rect">
-            <a:avLst/>
-          </a:prstGeom>
-          <a:noFill/>
-        </p:spPr>
-        <p:txBody>
-          <a:bodyPr wrap="square" lIns="0" rIns="0" tIns="0" bIns="0" anchor="t">
-            <a:spAutoFit/>
-          </a:bodyPr>
-          <a:lstStyle/>
-          <a:p>
-            <a:pPr algn="l">
-              <a:lnSpc>
-                <a:spcPct val="128000"/>
-              </a:lnSpc>
-              <a:spcAft>
-                <a:spcPts val="0"/>
-              </a:spcAft>
-            </a:pPr>
-            <a:r>
-              <a:rPr sz="2300" b="0" i="0">
-                <a:solidFill>
-                  <a:srgbClr val="5F6670"/>
-                </a:solidFill>
-                <a:latin typeface="Calibri"/>
-              </a:rPr>
-              <a:t>“A photograph of {place} in {country}, {view}.” One camera per kind of place.</a:t>
-            </a:r>
-          </a:p>
-        </p:txBody>
-      </p:sp>
-      <p:sp>
-        <p:nvSpPr>
-          <p:cNvPr id="40" name="TextBox 39"/>
-          <p:cNvSpPr txBox="1"/>
-          <p:nvPr/>
-        </p:nvSpPr>
-        <p:spPr>
-          <a:xfrm>
-            <a:off x="13258799" y="16497473"/>
-            <a:ext cx="182880" cy="274320"/>
-          </a:xfrm>
-          <a:prstGeom prst="rect">
-            <a:avLst/>
-          </a:prstGeom>
-          <a:noFill/>
-        </p:spPr>
-        <p:txBody>
-          <a:bodyPr wrap="square" lIns="0" rIns="0" tIns="0" bIns="0" anchor="t">
-            <a:spAutoFit/>
-          </a:bodyPr>
-          <a:lstStyle/>
-          <a:p>
-            <a:pPr algn="l">
-              <a:lnSpc>
-                <a:spcPct val="108000"/>
-              </a:lnSpc>
-              <a:spcAft>
-                <a:spcPts val="0"/>
-              </a:spcAft>
-            </a:pPr>
-            <a:r>
-              <a:rPr sz="2100" b="1" i="0">
-                <a:solidFill>
-                  <a:srgbClr val="B07C1F"/>
-                </a:solidFill>
-                <a:latin typeface="Calibri"/>
-              </a:rPr>
-              <a:t>•</a:t>
-            </a:r>
-          </a:p>
-        </p:txBody>
-      </p:sp>
-      <p:sp>
-        <p:nvSpPr>
-          <p:cNvPr id="41" name="TextBox 40"/>
-          <p:cNvSpPr txBox="1"/>
-          <p:nvPr/>
-        </p:nvSpPr>
-        <p:spPr>
-          <a:xfrm>
-            <a:off x="13533119" y="16470041"/>
-            <a:ext cx="7406640" cy="759459"/>
-          </a:xfrm>
-          <a:prstGeom prst="rect">
-            <a:avLst/>
-          </a:prstGeom>
-          <a:noFill/>
-        </p:spPr>
-        <p:txBody>
-          <a:bodyPr wrap="square" lIns="0" rIns="0" tIns="0" bIns="0" anchor="t">
-            <a:spAutoFit/>
-          </a:bodyPr>
-          <a:lstStyle/>
-          <a:p>
-            <a:pPr algn="l">
-              <a:lnSpc>
-                <a:spcPct val="128000"/>
-              </a:lnSpc>
-              <a:spcAft>
-                <a:spcPts val="0"/>
-              </a:spcAft>
-            </a:pPr>
-            <a:r>
-              <a:rPr sz="2300" b="0" i="0">
-                <a:solidFill>
-                  <a:srgbClr val="5F6670"/>
-                </a:solidFill>
-                <a:latin typeface="Calibri"/>
-              </a:rPr>
-              <a:t>Run twice: free, and again pinned to noon under a clear sky. The pin names no colour.</a:t>
-            </a:r>
-          </a:p>
-        </p:txBody>
-      </p:sp>
-      <p:sp>
-        <p:nvSpPr>
-          <p:cNvPr id="42" name="TextBox 41"/>
-          <p:cNvSpPr txBox="1"/>
-          <p:nvPr/>
-        </p:nvSpPr>
-        <p:spPr>
-          <a:xfrm>
-            <a:off x="13258799" y="17403237"/>
-            <a:ext cx="182880" cy="274320"/>
-          </a:xfrm>
-          <a:prstGeom prst="rect">
-            <a:avLst/>
-          </a:prstGeom>
-          <a:noFill/>
-        </p:spPr>
-        <p:txBody>
-          <a:bodyPr wrap="square" lIns="0" rIns="0" tIns="0" bIns="0" anchor="t">
-            <a:spAutoFit/>
-          </a:bodyPr>
-          <a:lstStyle/>
-          <a:p>
-            <a:pPr algn="l">
-              <a:lnSpc>
-                <a:spcPct val="108000"/>
-              </a:lnSpc>
-              <a:spcAft>
-                <a:spcPts val="0"/>
-              </a:spcAft>
-            </a:pPr>
-            <a:r>
-              <a:rPr sz="2100" b="1" i="0">
-                <a:solidFill>
-                  <a:srgbClr val="B07C1F"/>
-                </a:solidFill>
-                <a:latin typeface="Calibri"/>
-              </a:rPr>
-              <a:t>•</a:t>
-            </a:r>
-          </a:p>
-        </p:txBody>
-      </p:sp>
-      <p:sp>
-        <p:nvSpPr>
-          <p:cNvPr id="43" name="TextBox 42"/>
-          <p:cNvSpPr txBox="1"/>
-          <p:nvPr/>
-        </p:nvSpPr>
-        <p:spPr>
-          <a:xfrm>
-            <a:off x="13533119" y="17375805"/>
-            <a:ext cx="7406640" cy="759459"/>
-          </a:xfrm>
-          <a:prstGeom prst="rect">
-            <a:avLst/>
-          </a:prstGeom>
-          <a:noFill/>
-        </p:spPr>
-        <p:txBody>
-          <a:bodyPr wrap="square" lIns="0" rIns="0" tIns="0" bIns="0" anchor="t">
-            <a:spAutoFit/>
-          </a:bodyPr>
-          <a:lstStyle/>
-          <a:p>
-            <a:pPr algn="l">
-              <a:lnSpc>
-                <a:spcPct val="128000"/>
-              </a:lnSpc>
-              <a:spcAft>
-                <a:spcPts val="0"/>
-              </a:spcAft>
-            </a:pPr>
-            <a:r>
-              <a:rPr sz="2300" b="0" i="0">
-                <a:solidFill>
-                  <a:srgbClr val="5F6670"/>
-                </a:solidFill>
-                <a:latin typeface="Calibri"/>
-              </a:rPr>
-              <a:t>The same places with no country named, giving the model's own default to measure from.</a:t>
-            </a:r>
-          </a:p>
-        </p:txBody>
-      </p:sp>
-      <p:sp>
-        <p:nvSpPr>
-          <p:cNvPr id="44" name="TextBox 43"/>
-          <p:cNvSpPr txBox="1"/>
-          <p:nvPr/>
-        </p:nvSpPr>
-        <p:spPr>
-          <a:xfrm>
-            <a:off x="13258799" y="18309001"/>
-            <a:ext cx="182880" cy="274320"/>
-          </a:xfrm>
-          <a:prstGeom prst="rect">
-            <a:avLst/>
-          </a:prstGeom>
-          <a:noFill/>
-        </p:spPr>
-        <p:txBody>
-          <a:bodyPr wrap="square" lIns="0" rIns="0" tIns="0" bIns="0" anchor="t">
-            <a:spAutoFit/>
-          </a:bodyPr>
-          <a:lstStyle/>
-          <a:p>
-            <a:pPr algn="l">
-              <a:lnSpc>
-                <a:spcPct val="108000"/>
-              </a:lnSpc>
-              <a:spcAft>
-                <a:spcPts val="0"/>
-              </a:spcAft>
-            </a:pPr>
-            <a:r>
-              <a:rPr sz="2100" b="1" i="0">
-                <a:solidFill>
-                  <a:srgbClr val="B07C1F"/>
-                </a:solidFill>
-                <a:latin typeface="Calibri"/>
-              </a:rPr>
-              <a:t>•</a:t>
-            </a:r>
-          </a:p>
-        </p:txBody>
-      </p:sp>
-      <p:sp>
-        <p:nvSpPr>
-          <p:cNvPr id="45" name="TextBox 44"/>
-          <p:cNvSpPr txBox="1"/>
-          <p:nvPr/>
-        </p:nvSpPr>
-        <p:spPr>
-          <a:xfrm>
-            <a:off x="13533119" y="18281569"/>
-            <a:ext cx="7406640" cy="1139190"/>
-          </a:xfrm>
-          <a:prstGeom prst="rect">
-            <a:avLst/>
-          </a:prstGeom>
-          <a:noFill/>
-        </p:spPr>
-        <p:txBody>
-          <a:bodyPr wrap="square" lIns="0" rIns="0" tIns="0" bIns="0" anchor="t">
-            <a:spAutoFit/>
-          </a:bodyPr>
-          <a:lstStyle/>
-          <a:p>
-            <a:pPr algn="l">
-              <a:lnSpc>
-                <a:spcPct val="128000"/>
-              </a:lnSpc>
-              <a:spcAft>
-                <a:spcPts val="0"/>
-              </a:spcAft>
-            </a:pPr>
-            <a:r>
-              <a:rPr sz="2300" b="0" i="0">
-                <a:solidFill>
-                  <a:srgbClr val="5F6670"/>
-                </a:solidFill>
-                <a:latin typeface="Calibri"/>
-              </a:rPr>
-              <a:t>60 countries, 15 per income group, chosen so income and latitude pull apart (ρ = 0.25 here against 0.49 worldwide).</a:t>
-            </a:r>
-          </a:p>
-        </p:txBody>
-      </p:sp>
-      <p:sp>
-        <p:nvSpPr>
-          <p:cNvPr id="46" name="TextBox 45"/>
-          <p:cNvSpPr txBox="1"/>
-          <p:nvPr/>
-        </p:nvSpPr>
-        <p:spPr>
-          <a:xfrm>
-            <a:off x="13258799" y="19594495"/>
-            <a:ext cx="182880" cy="274320"/>
-          </a:xfrm>
-          <a:prstGeom prst="rect">
-            <a:avLst/>
-          </a:prstGeom>
-          <a:noFill/>
-        </p:spPr>
-        <p:txBody>
-          <a:bodyPr wrap="square" lIns="0" rIns="0" tIns="0" bIns="0" anchor="t">
-            <a:spAutoFit/>
-          </a:bodyPr>
-          <a:lstStyle/>
-          <a:p>
-            <a:pPr algn="l">
-              <a:lnSpc>
-                <a:spcPct val="108000"/>
-              </a:lnSpc>
-              <a:spcAft>
-                <a:spcPts val="0"/>
-              </a:spcAft>
-            </a:pPr>
-            <a:r>
-              <a:rPr sz="2100" b="1" i="0">
-                <a:solidFill>
-                  <a:srgbClr val="B07C1F"/>
-                </a:solidFill>
-                <a:latin typeface="Calibri"/>
-              </a:rPr>
-              <a:t>•</a:t>
-            </a:r>
-          </a:p>
-        </p:txBody>
-      </p:sp>
-      <p:sp>
-        <p:nvSpPr>
-          <p:cNvPr id="47" name="TextBox 46"/>
-          <p:cNvSpPr txBox="1"/>
-          <p:nvPr/>
-        </p:nvSpPr>
-        <p:spPr>
-          <a:xfrm>
-            <a:off x="13533119" y="19567063"/>
-            <a:ext cx="7406640" cy="759459"/>
-          </a:xfrm>
-          <a:prstGeom prst="rect">
-            <a:avLst/>
-          </a:prstGeom>
-          <a:noFill/>
-        </p:spPr>
-        <p:txBody>
-          <a:bodyPr wrap="square" lIns="0" rIns="0" tIns="0" bIns="0" anchor="t">
-            <a:spAutoFit/>
-          </a:bodyPr>
-          <a:lstStyle/>
-          <a:p>
-            <a:pPr algn="l">
-              <a:lnSpc>
-                <a:spcPct val="128000"/>
-              </a:lnSpc>
-              <a:spcAft>
-                <a:spcPts val="0"/>
-              </a:spcAft>
-            </a:pPr>
-            <a:r>
-              <a:rPr sz="2300" b="0" i="0">
-                <a:solidFill>
-                  <a:srgbClr val="5F6670"/>
-                </a:solidFill>
-                <a:latin typeface="Calibri"/>
-              </a:rPr>
-              <a:t>84 images per prompt, sized from a 3,300-image pilot's measured noise.</a:t>
-            </a:r>
-          </a:p>
-        </p:txBody>
-      </p:sp>
-      <p:sp>
-        <p:nvSpPr>
-          <p:cNvPr id="48" name="TextBox 47"/>
-          <p:cNvSpPr txBox="1"/>
-          <p:nvPr/>
-        </p:nvSpPr>
-        <p:spPr>
-          <a:xfrm>
-            <a:off x="13258799" y="20500259"/>
-            <a:ext cx="182880" cy="274320"/>
-          </a:xfrm>
-          <a:prstGeom prst="rect">
-            <a:avLst/>
-          </a:prstGeom>
-          <a:noFill/>
-        </p:spPr>
-        <p:txBody>
-          <a:bodyPr wrap="square" lIns="0" rIns="0" tIns="0" bIns="0" anchor="t">
-            <a:spAutoFit/>
-          </a:bodyPr>
-          <a:lstStyle/>
-          <a:p>
-            <a:pPr algn="l">
-              <a:lnSpc>
-                <a:spcPct val="108000"/>
-              </a:lnSpc>
-              <a:spcAft>
-                <a:spcPts val="0"/>
-              </a:spcAft>
-            </a:pPr>
-            <a:r>
-              <a:rPr sz="2100" b="1" i="0">
-                <a:solidFill>
-                  <a:srgbClr val="B07C1F"/>
-                </a:solidFill>
-                <a:latin typeface="Calibri"/>
-              </a:rPr>
-              <a:t>•</a:t>
-            </a:r>
-          </a:p>
-        </p:txBody>
-      </p:sp>
-      <p:sp>
-        <p:nvSpPr>
-          <p:cNvPr id="49" name="TextBox 48"/>
-          <p:cNvSpPr txBox="1"/>
-          <p:nvPr/>
-        </p:nvSpPr>
-        <p:spPr>
-          <a:xfrm>
-            <a:off x="13533119" y="20472827"/>
-            <a:ext cx="7406640" cy="759459"/>
-          </a:xfrm>
-          <a:prstGeom prst="rect">
-            <a:avLst/>
-          </a:prstGeom>
-          <a:noFill/>
-        </p:spPr>
-        <p:txBody>
-          <a:bodyPr wrap="square" lIns="0" rIns="0" tIns="0" bIns="0" anchor="t">
-            <a:spAutoFit/>
-          </a:bodyPr>
-          <a:lstStyle/>
-          <a:p>
-            <a:pPr algn="l">
-              <a:lnSpc>
-                <a:spcPct val="128000"/>
-              </a:lnSpc>
-              <a:spcAft>
-                <a:spcPts val="0"/>
-              </a:spcAft>
-            </a:pPr>
-            <a:r>
-              <a:rPr sz="2300" b="0" i="0">
-                <a:solidFill>
-                  <a:srgbClr val="5F6670"/>
-                </a:solidFill>
-                <a:latin typeface="Calibri"/>
-              </a:rPr>
-              <a:t>flux-schnell on Replicate, one pinned version, 1024×1024, every seed recorded.</a:t>
+              <a:t>Every country, coloured by how the model paints it</a:t>
             </a:r>
           </a:p>
         </p:txBody>
       </p:sp>
       <p:pic>
         <p:nvPicPr>
-          <p:cNvPr id="50" name="Picture 49" descr="world-map.png"/>
+          <p:cNvPr id="68" name="Picture 67" descr="world-map.png"/>
           <p:cNvPicPr>
             <a:picLocks noChangeAspect="1"/>
           </p:cNvPicPr>
@@ -5254,8 +6029,8 @@
         </p:blipFill>
         <p:spPr>
           <a:xfrm>
-            <a:off x="1005840" y="15416449"/>
-            <a:ext cx="11612880" cy="4914183"/>
+            <a:off x="1005840" y="20060724"/>
+            <a:ext cx="8549640" cy="3617922"/>
           </a:xfrm>
           <a:prstGeom prst="rect">
             <a:avLst/>
@@ -5264,14 +6039,56 @@
       </p:pic>
       <p:sp>
         <p:nvSpPr>
-          <p:cNvPr id="51" name="TextBox 50"/>
-          <p:cNvSpPr txBox="1"/>
-          <p:nvPr/>
-        </p:nvSpPr>
-        <p:spPr>
-          <a:xfrm>
-            <a:off x="1005840" y="21835791"/>
-            <a:ext cx="9555480" cy="693420"/>
+          <p:cNvPr id="69" name="TextBox 68"/>
+          <p:cNvSpPr txBox="1"/>
+          <p:nvPr/>
+        </p:nvSpPr>
+        <p:spPr>
+          <a:xfrm>
+            <a:off x="1005840" y="23733511"/>
+            <a:ext cx="9555480" cy="346710"/>
+          </a:xfrm>
+          <a:prstGeom prst="rect">
+            <a:avLst/>
+          </a:prstGeom>
+          <a:noFill/>
+        </p:spPr>
+        <p:txBody>
+          <a:bodyPr wrap="square" lIns="0" rIns="0" tIns="0" bIns="0" anchor="t">
+            <a:spAutoFit/>
+          </a:bodyPr>
+          <a:lstStyle/>
+          <a:p>
+            <a:pPr algn="l">
+              <a:lnSpc>
+                <a:spcPct val="128000"/>
+              </a:lnSpc>
+              <a:spcAft>
+                <a:spcPts val="0"/>
+              </a:spcAft>
+            </a:pPr>
+            <a:r>
+              <a:rPr sz="2100" b="0" i="0">
+                <a:solidFill>
+                  <a:srgbClr val="5F6670"/>
+                </a:solidFill>
+                <a:latin typeface="Calibri"/>
+              </a:rPr>
+              <a:t>Amber: warmer than average. Blue: cooler. Pale: not in this run.</a:t>
+            </a:r>
+          </a:p>
+        </p:txBody>
+      </p:sp>
+      <p:sp>
+        <p:nvSpPr>
+          <p:cNvPr id="70" name="TextBox 69"/>
+          <p:cNvSpPr txBox="1"/>
+          <p:nvPr/>
+        </p:nvSpPr>
+        <p:spPr>
+          <a:xfrm>
+            <a:off x="11384280" y="19521736"/>
+            <a:ext cx="9555480" cy="429260"/>
           </a:xfrm>
           <a:prstGeom prst="rect">
             <a:avLst/>
@@ -5293,1469 +6110,77 @@
               </a:spcAft>
             </a:pPr>
             <a:r>
-              <a:rPr sz="4200" b="1" i="0">
+              <a:rPr sz="2600" b="1" i="0">
                 <a:solidFill>
                   <a:srgbClr val="1A1A1A"/>
                 </a:solidFill>
                 <a:latin typeface="Cambria"/>
               </a:rPr>
-              <a:t>What predicts the warmth</a:t>
-            </a:r>
-          </a:p>
-        </p:txBody>
-      </p:sp>
-      <p:graphicFrame>
-        <p:nvGraphicFramePr>
-          <p:cNvPr id="52" name="Table 51"/>
-          <p:cNvGraphicFramePr>
-            <a:graphicFrameLocks noGrp="1"/>
-          </p:cNvGraphicFramePr>
-          <p:nvPr/>
-        </p:nvGraphicFramePr>
-        <p:xfrm>
-          <a:off x="1005840" y="22693803"/>
-          <a:ext cx="9555478" cy="3383280"/>
-        </p:xfrm>
-        <a:graphic>
-          <a:graphicData uri="http://schemas.openxmlformats.org/drawingml/2006/table">
-            <a:tbl>
-              <a:tblPr firstRow="1" bandRow="1">
-                <a:tableStyleId>{5C22544A-7EE6-4342-B048-85BDC9FD1C3A}</a:tableStyleId>
-              </a:tblPr>
-              <a:tblGrid>
-                <a:gridCol w="2866644"/>
-                <a:gridCol w="1051102"/>
-                <a:gridCol w="2006650"/>
-                <a:gridCol w="1815541"/>
-                <a:gridCol w="1815541"/>
-              </a:tblGrid>
-              <a:tr h="530352">
-                <a:tc>
-                  <a:txBody>
-                    <a:bodyPr/>
-                    <a:lstStyle/>
-                    <a:p>
-                      <a:pPr algn="l"/>
-                      <a:r>
-                        <a:rPr sz="1500" b="1">
-                          <a:solidFill>
-                            <a:srgbClr val="5F6670"/>
-                          </a:solidFill>
-                          <a:latin typeface="Calibri"/>
-                        </a:rPr>
-                        <a:t>held constant</a:t>
-                      </a:r>
-                    </a:p>
-                  </a:txBody>
-                  <a:tcPr marL="91440" marR="91440" marT="27432" marB="27432" anchor="ctr">
-                    <a:solidFill>
-                      <a:srgbClr val="F4F6F8"/>
-                    </a:solidFill>
-                  </a:tcPr>
-                </a:tc>
-                <a:tc>
-                  <a:txBody>
-                    <a:bodyPr/>
-                    <a:lstStyle/>
-                    <a:p>
-                      <a:pPr algn="r"/>
-                      <a:r>
-                        <a:rPr sz="1500" b="1">
-                          <a:solidFill>
-                            <a:srgbClr val="5F6670"/>
-                          </a:solidFill>
-                          <a:latin typeface="Calibri"/>
-                        </a:rPr>
-                        <a:t>r²</a:t>
-                      </a:r>
-                    </a:p>
-                  </a:txBody>
-                  <a:tcPr marL="91440" marR="91440" marT="27432" marB="27432" anchor="ctr">
-                    <a:solidFill>
-                      <a:srgbClr val="F4F6F8"/>
-                    </a:solidFill>
-                  </a:tcPr>
-                </a:tc>
-                <a:tc>
-                  <a:txBody>
-                    <a:bodyPr/>
-                    <a:lstStyle/>
-                    <a:p>
-                      <a:pPr algn="r"/>
-                      <a:r>
-                        <a:rPr sz="1500" b="1">
-                          <a:solidFill>
-                            <a:srgbClr val="5F6670"/>
-                          </a:solidFill>
-                          <a:latin typeface="Calibri"/>
-                        </a:rPr>
-                        <a:t>low income</a:t>
-                      </a:r>
-                    </a:p>
-                  </a:txBody>
-                  <a:tcPr marL="91440" marR="91440" marT="27432" marB="27432" anchor="ctr">
-                    <a:solidFill>
-                      <a:srgbClr val="F4F6F8"/>
-                    </a:solidFill>
-                  </a:tcPr>
-                </a:tc>
-                <a:tc>
-                  <a:txBody>
-                    <a:bodyPr/>
-                    <a:lstStyle/>
-                    <a:p>
-                      <a:pPr algn="r"/>
-                      <a:r>
-                        <a:rPr sz="1500" b="1">
-                          <a:solidFill>
-                            <a:srgbClr val="5F6670"/>
-                          </a:solidFill>
-                          <a:latin typeface="Calibri"/>
-                        </a:rPr>
-                        <a:t>Africa</a:t>
-                      </a:r>
-                    </a:p>
-                  </a:txBody>
-                  <a:tcPr marL="91440" marR="91440" marT="27432" marB="27432" anchor="ctr">
-                    <a:solidFill>
-                      <a:srgbClr val="F4F6F8"/>
-                    </a:solidFill>
-                  </a:tcPr>
-                </a:tc>
-                <a:tc>
-                  <a:txBody>
-                    <a:bodyPr/>
-                    <a:lstStyle/>
-                    <a:p>
-                      <a:pPr algn="r"/>
-                      <a:r>
-                        <a:rPr sz="1500" b="1">
-                          <a:solidFill>
-                            <a:srgbClr val="5F6670"/>
-                          </a:solidFill>
-                          <a:latin typeface="Calibri"/>
-                        </a:rPr>
-                        <a:t>Asia</a:t>
-                      </a:r>
-                    </a:p>
-                  </a:txBody>
-                  <a:tcPr marL="91440" marR="91440" marT="27432" marB="27432" anchor="ctr">
-                    <a:solidFill>
-                      <a:srgbClr val="F4F6F8"/>
-                    </a:solidFill>
-                  </a:tcPr>
-                </a:tc>
-              </a:tr>
-              <a:tr h="475488">
-                <a:tc>
-                  <a:txBody>
-                    <a:bodyPr/>
-                    <a:lstStyle/>
-                    <a:p>
-                      <a:pPr algn="l"/>
-                      <a:r>
-                        <a:rPr sz="1600" b="0">
-                          <a:solidFill>
-                            <a:srgbClr val="1A1A1A"/>
-                          </a:solidFill>
-                          <a:latin typeface="Calibri"/>
-                        </a:rPr>
-                        <a:t>nothing</a:t>
-                      </a:r>
-                    </a:p>
-                  </a:txBody>
-                  <a:tcPr marL="91440" marR="91440" marT="27432" marB="27432" anchor="ctr">
-                    <a:solidFill>
-                      <a:srgbClr val="FFFFFF"/>
-                    </a:solidFill>
-                  </a:tcPr>
-                </a:tc>
-                <a:tc>
-                  <a:txBody>
-                    <a:bodyPr/>
-                    <a:lstStyle/>
-                    <a:p>
-                      <a:pPr algn="r"/>
-                      <a:r>
-                        <a:rPr sz="1600" b="0">
-                          <a:solidFill>
-                            <a:srgbClr val="1A1A1A"/>
-                          </a:solidFill>
-                          <a:latin typeface="Calibri"/>
-                        </a:rPr>
-                        <a:t>—</a:t>
-                      </a:r>
-                    </a:p>
-                  </a:txBody>
-                  <a:tcPr marL="91440" marR="91440" marT="27432" marB="27432" anchor="ctr">
-                    <a:solidFill>
-                      <a:srgbClr val="FFFFFF"/>
-                    </a:solidFill>
-                  </a:tcPr>
-                </a:tc>
-                <a:tc>
-                  <a:txBody>
-                    <a:bodyPr/>
-                    <a:lstStyle/>
-                    <a:p>
-                      <a:pPr algn="r"/>
-                      <a:r>
-                        <a:rPr sz="1600" b="0">
-                          <a:solidFill>
-                            <a:srgbClr val="1A1A1A"/>
-                          </a:solidFill>
-                          <a:latin typeface="Calibri"/>
-                        </a:rPr>
-                        <a:t>+0.72 (.018)</a:t>
-                      </a:r>
-                    </a:p>
-                  </a:txBody>
-                  <a:tcPr marL="91440" marR="91440" marT="27432" marB="27432" anchor="ctr">
-                    <a:solidFill>
-                      <a:srgbClr val="FFFFFF"/>
-                    </a:solidFill>
-                  </a:tcPr>
-                </a:tc>
-                <a:tc>
-                  <a:txBody>
-                    <a:bodyPr/>
-                    <a:lstStyle/>
-                    <a:p>
-                      <a:pPr algn="r"/>
-                      <a:r>
-                        <a:rPr sz="1600" b="0">
-                          <a:solidFill>
-                            <a:srgbClr val="1A1A1A"/>
-                          </a:solidFill>
-                          <a:latin typeface="Calibri"/>
-                        </a:rPr>
-                        <a:t>+0.62 (.030)</a:t>
-                      </a:r>
-                    </a:p>
-                  </a:txBody>
-                  <a:tcPr marL="91440" marR="91440" marT="27432" marB="27432" anchor="ctr">
-                    <a:solidFill>
-                      <a:srgbClr val="FFFFFF"/>
-                    </a:solidFill>
-                  </a:tcPr>
-                </a:tc>
-                <a:tc>
-                  <a:txBody>
-                    <a:bodyPr/>
-                    <a:lstStyle/>
-                    <a:p>
-                      <a:pPr algn="r"/>
-                      <a:r>
-                        <a:rPr sz="1600" b="0">
-                          <a:solidFill>
-                            <a:srgbClr val="1A1A1A"/>
-                          </a:solidFill>
-                          <a:latin typeface="Calibri"/>
-                        </a:rPr>
-                        <a:t>+0.60 (.026)</a:t>
-                      </a:r>
-                    </a:p>
-                  </a:txBody>
-                  <a:tcPr marL="91440" marR="91440" marT="27432" marB="27432" anchor="ctr">
-                    <a:solidFill>
-                      <a:srgbClr val="FFFFFF"/>
-                    </a:solidFill>
-                  </a:tcPr>
-                </a:tc>
-              </a:tr>
-              <a:tr h="475488">
-                <a:tc>
-                  <a:txBody>
-                    <a:bodyPr/>
-                    <a:lstStyle/>
-                    <a:p>
-                      <a:pPr algn="l"/>
-                      <a:r>
-                        <a:rPr sz="1600" b="0">
-                          <a:solidFill>
-                            <a:srgbClr val="1A1A1A"/>
-                          </a:solidFill>
-                          <a:latin typeface="Calibri"/>
-                        </a:rPr>
-                        <a:t>|latitude|</a:t>
-                      </a:r>
-                    </a:p>
-                  </a:txBody>
-                  <a:tcPr marL="91440" marR="91440" marT="27432" marB="27432" anchor="ctr">
-                    <a:solidFill>
-                      <a:srgbClr val="F4F6F8"/>
-                    </a:solidFill>
-                  </a:tcPr>
-                </a:tc>
-                <a:tc>
-                  <a:txBody>
-                    <a:bodyPr/>
-                    <a:lstStyle/>
-                    <a:p>
-                      <a:pPr algn="r"/>
-                      <a:r>
-                        <a:rPr sz="1600" b="0">
-                          <a:solidFill>
-                            <a:srgbClr val="1A1A1A"/>
-                          </a:solidFill>
-                          <a:latin typeface="Calibri"/>
-                        </a:rPr>
-                        <a:t>5%</a:t>
-                      </a:r>
-                    </a:p>
-                  </a:txBody>
-                  <a:tcPr marL="91440" marR="91440" marT="27432" marB="27432" anchor="ctr">
-                    <a:solidFill>
-                      <a:srgbClr val="F4F6F8"/>
-                    </a:solidFill>
-                  </a:tcPr>
-                </a:tc>
-                <a:tc>
-                  <a:txBody>
-                    <a:bodyPr/>
-                    <a:lstStyle/>
-                    <a:p>
-                      <a:pPr algn="r"/>
-                      <a:r>
-                        <a:rPr sz="1600" b="0">
-                          <a:solidFill>
-                            <a:srgbClr val="1A1A1A"/>
-                          </a:solidFill>
-                          <a:latin typeface="Calibri"/>
-                        </a:rPr>
-                        <a:t>+0.62 (.041)</a:t>
-                      </a:r>
-                    </a:p>
-                  </a:txBody>
-                  <a:tcPr marL="91440" marR="91440" marT="27432" marB="27432" anchor="ctr">
-                    <a:solidFill>
-                      <a:srgbClr val="F4F6F8"/>
-                    </a:solidFill>
-                  </a:tcPr>
-                </a:tc>
-                <a:tc>
-                  <a:txBody>
-                    <a:bodyPr/>
-                    <a:lstStyle/>
-                    <a:p>
-                      <a:pPr algn="r"/>
-                      <a:r>
-                        <a:rPr sz="1600" b="0">
-                          <a:solidFill>
-                            <a:srgbClr val="1A1A1A"/>
-                          </a:solidFill>
-                          <a:latin typeface="Calibri"/>
-                        </a:rPr>
-                        <a:t>+0.47 (.097)</a:t>
-                      </a:r>
-                    </a:p>
-                  </a:txBody>
-                  <a:tcPr marL="91440" marR="91440" marT="27432" marB="27432" anchor="ctr">
-                    <a:solidFill>
-                      <a:srgbClr val="F4F6F8"/>
-                    </a:solidFill>
-                  </a:tcPr>
-                </a:tc>
-                <a:tc>
-                  <a:txBody>
-                    <a:bodyPr/>
-                    <a:lstStyle/>
-                    <a:p>
-                      <a:pPr algn="r"/>
-                      <a:r>
-                        <a:rPr sz="1600" b="0">
-                          <a:solidFill>
-                            <a:srgbClr val="1A1A1A"/>
-                          </a:solidFill>
-                          <a:latin typeface="Calibri"/>
-                        </a:rPr>
-                        <a:t>+0.79 (.005)</a:t>
-                      </a:r>
-                    </a:p>
-                  </a:txBody>
-                  <a:tcPr marL="91440" marR="91440" marT="27432" marB="27432" anchor="ctr">
-                    <a:solidFill>
-                      <a:srgbClr val="F4F6F8"/>
-                    </a:solidFill>
-                  </a:tcPr>
-                </a:tc>
-              </a:tr>
-              <a:tr h="475488">
-                <a:tc>
-                  <a:txBody>
-                    <a:bodyPr/>
-                    <a:lstStyle/>
-                    <a:p>
-                      <a:pPr algn="l"/>
-                      <a:r>
-                        <a:rPr sz="1600" b="0">
-                          <a:solidFill>
-                            <a:srgbClr val="1A1A1A"/>
-                          </a:solidFill>
-                          <a:latin typeface="Calibri"/>
-                        </a:rPr>
-                        <a:t>log rainfall</a:t>
-                      </a:r>
-                    </a:p>
-                  </a:txBody>
-                  <a:tcPr marL="91440" marR="91440" marT="27432" marB="27432" anchor="ctr">
-                    <a:solidFill>
-                      <a:srgbClr val="FFFFFF"/>
-                    </a:solidFill>
-                  </a:tcPr>
-                </a:tc>
-                <a:tc>
-                  <a:txBody>
-                    <a:bodyPr/>
-                    <a:lstStyle/>
-                    <a:p>
-                      <a:pPr algn="r"/>
-                      <a:r>
-                        <a:rPr sz="1600" b="0">
-                          <a:solidFill>
-                            <a:srgbClr val="1A1A1A"/>
-                          </a:solidFill>
-                          <a:latin typeface="Calibri"/>
-                        </a:rPr>
-                        <a:t>18%</a:t>
-                      </a:r>
-                    </a:p>
-                  </a:txBody>
-                  <a:tcPr marL="91440" marR="91440" marT="27432" marB="27432" anchor="ctr">
-                    <a:solidFill>
-                      <a:srgbClr val="FFFFFF"/>
-                    </a:solidFill>
-                  </a:tcPr>
-                </a:tc>
-                <a:tc>
-                  <a:txBody>
-                    <a:bodyPr/>
-                    <a:lstStyle/>
-                    <a:p>
-                      <a:pPr algn="r"/>
-                      <a:r>
-                        <a:rPr sz="1600" b="0">
-                          <a:solidFill>
-                            <a:srgbClr val="1A1A1A"/>
-                          </a:solidFill>
-                          <a:latin typeface="Calibri"/>
-                        </a:rPr>
-                        <a:t>+0.73 (.017)</a:t>
-                      </a:r>
-                    </a:p>
-                  </a:txBody>
-                  <a:tcPr marL="91440" marR="91440" marT="27432" marB="27432" anchor="ctr">
-                    <a:solidFill>
-                      <a:srgbClr val="FFFFFF"/>
-                    </a:solidFill>
-                  </a:tcPr>
-                </a:tc>
-                <a:tc>
-                  <a:txBody>
-                    <a:bodyPr/>
-                    <a:lstStyle/>
-                    <a:p>
-                      <a:pPr algn="r"/>
-                      <a:r>
-                        <a:rPr sz="1600" b="0">
-                          <a:solidFill>
-                            <a:srgbClr val="1A1A1A"/>
-                          </a:solidFill>
-                          <a:latin typeface="Calibri"/>
-                        </a:rPr>
-                        <a:t>+0.51 (.073)</a:t>
-                      </a:r>
-                    </a:p>
-                  </a:txBody>
-                  <a:tcPr marL="91440" marR="91440" marT="27432" marB="27432" anchor="ctr">
-                    <a:solidFill>
-                      <a:srgbClr val="FFFFFF"/>
-                    </a:solidFill>
-                  </a:tcPr>
-                </a:tc>
-                <a:tc>
-                  <a:txBody>
-                    <a:bodyPr/>
-                    <a:lstStyle/>
-                    <a:p>
-                      <a:pPr algn="r"/>
-                      <a:r>
-                        <a:rPr sz="1600" b="0">
-                          <a:solidFill>
-                            <a:srgbClr val="1A1A1A"/>
-                          </a:solidFill>
-                          <a:latin typeface="Calibri"/>
-                        </a:rPr>
-                        <a:t>+0.42 (.114)</a:t>
-                      </a:r>
-                    </a:p>
-                  </a:txBody>
-                  <a:tcPr marL="91440" marR="91440" marT="27432" marB="27432" anchor="ctr">
-                    <a:solidFill>
-                      <a:srgbClr val="FFFFFF"/>
-                    </a:solidFill>
-                  </a:tcPr>
-                </a:tc>
-              </a:tr>
-              <a:tr h="475488">
-                <a:tc>
-                  <a:txBody>
-                    <a:bodyPr/>
-                    <a:lstStyle/>
-                    <a:p>
-                      <a:pPr algn="l"/>
-                      <a:r>
-                        <a:rPr sz="1600" b="0">
-                          <a:solidFill>
-                            <a:srgbClr val="1A1A1A"/>
-                          </a:solidFill>
-                          <a:latin typeface="Calibri"/>
-                        </a:rPr>
-                        <a:t>mean temperature</a:t>
-                      </a:r>
-                    </a:p>
-                  </a:txBody>
-                  <a:tcPr marL="91440" marR="91440" marT="27432" marB="27432" anchor="ctr">
-                    <a:solidFill>
-                      <a:srgbClr val="F4F6F8"/>
-                    </a:solidFill>
-                  </a:tcPr>
-                </a:tc>
-                <a:tc>
-                  <a:txBody>
-                    <a:bodyPr/>
-                    <a:lstStyle/>
-                    <a:p>
-                      <a:pPr algn="r"/>
-                      <a:r>
-                        <a:rPr sz="1600" b="0">
-                          <a:solidFill>
-                            <a:srgbClr val="1A1A1A"/>
-                          </a:solidFill>
-                          <a:latin typeface="Calibri"/>
-                        </a:rPr>
-                        <a:t>25%</a:t>
-                      </a:r>
-                    </a:p>
-                  </a:txBody>
-                  <a:tcPr marL="91440" marR="91440" marT="27432" marB="27432" anchor="ctr">
-                    <a:solidFill>
-                      <a:srgbClr val="F4F6F8"/>
-                    </a:solidFill>
-                  </a:tcPr>
-                </a:tc>
-                <a:tc>
-                  <a:txBody>
-                    <a:bodyPr/>
-                    <a:lstStyle/>
-                    <a:p>
-                      <a:pPr algn="r"/>
-                      <a:r>
-                        <a:rPr sz="1600" b="0">
-                          <a:solidFill>
-                            <a:srgbClr val="1A1A1A"/>
-                          </a:solidFill>
-                          <a:latin typeface="Calibri"/>
-                        </a:rPr>
-                        <a:t>+0.72 (.018)</a:t>
-                      </a:r>
-                    </a:p>
-                  </a:txBody>
-                  <a:tcPr marL="91440" marR="91440" marT="27432" marB="27432" anchor="ctr">
-                    <a:solidFill>
-                      <a:srgbClr val="F4F6F8"/>
-                    </a:solidFill>
-                  </a:tcPr>
-                </a:tc>
-                <a:tc>
-                  <a:txBody>
-                    <a:bodyPr/>
-                    <a:lstStyle/>
-                    <a:p>
-                      <a:pPr algn="r"/>
-                      <a:r>
-                        <a:rPr sz="1600" b="0">
-                          <a:solidFill>
-                            <a:srgbClr val="1A1A1A"/>
-                          </a:solidFill>
-                          <a:latin typeface="Calibri"/>
-                        </a:rPr>
-                        <a:t>+0.33 (.228)</a:t>
-                      </a:r>
-                    </a:p>
-                  </a:txBody>
-                  <a:tcPr marL="91440" marR="91440" marT="27432" marB="27432" anchor="ctr">
-                    <a:solidFill>
-                      <a:srgbClr val="F4F6F8"/>
-                    </a:solidFill>
-                  </a:tcPr>
-                </a:tc>
-                <a:tc>
-                  <a:txBody>
-                    <a:bodyPr/>
-                    <a:lstStyle/>
-                    <a:p>
-                      <a:pPr algn="r"/>
-                      <a:r>
-                        <a:rPr sz="1600" b="0">
-                          <a:solidFill>
-                            <a:srgbClr val="1A1A1A"/>
-                          </a:solidFill>
-                          <a:latin typeface="Calibri"/>
-                        </a:rPr>
-                        <a:t>+0.88 (.003)</a:t>
-                      </a:r>
-                    </a:p>
-                  </a:txBody>
-                  <a:tcPr marL="91440" marR="91440" marT="27432" marB="27432" anchor="ctr">
-                    <a:solidFill>
-                      <a:srgbClr val="F4F6F8"/>
-                    </a:solidFill>
-                  </a:tcPr>
-                </a:tc>
-              </a:tr>
-              <a:tr h="475488">
-                <a:tc>
-                  <a:txBody>
-                    <a:bodyPr/>
-                    <a:lstStyle/>
-                    <a:p>
-                      <a:pPr algn="l"/>
-                      <a:r>
-                        <a:rPr sz="1600" b="0">
-                          <a:solidFill>
-                            <a:srgbClr val="1A1A1A"/>
-                          </a:solidFill>
-                          <a:latin typeface="Calibri"/>
-                        </a:rPr>
-                        <a:t>forest cover</a:t>
-                      </a:r>
-                    </a:p>
-                  </a:txBody>
-                  <a:tcPr marL="91440" marR="91440" marT="27432" marB="27432" anchor="ctr">
-                    <a:solidFill>
-                      <a:srgbClr val="FFFFFF"/>
-                    </a:solidFill>
-                  </a:tcPr>
-                </a:tc>
-                <a:tc>
-                  <a:txBody>
-                    <a:bodyPr/>
-                    <a:lstStyle/>
-                    <a:p>
-                      <a:pPr algn="r"/>
-                      <a:r>
-                        <a:rPr sz="1600" b="0">
-                          <a:solidFill>
-                            <a:srgbClr val="1A1A1A"/>
-                          </a:solidFill>
-                          <a:latin typeface="Calibri"/>
-                        </a:rPr>
-                        <a:t>30%</a:t>
-                      </a:r>
-                    </a:p>
-                  </a:txBody>
-                  <a:tcPr marL="91440" marR="91440" marT="27432" marB="27432" anchor="ctr">
-                    <a:solidFill>
-                      <a:srgbClr val="FFFFFF"/>
-                    </a:solidFill>
-                  </a:tcPr>
-                </a:tc>
-                <a:tc>
-                  <a:txBody>
-                    <a:bodyPr/>
-                    <a:lstStyle/>
-                    <a:p>
-                      <a:pPr algn="r"/>
-                      <a:r>
-                        <a:rPr sz="1600" b="0">
-                          <a:solidFill>
-                            <a:srgbClr val="1A1A1A"/>
-                          </a:solidFill>
-                          <a:latin typeface="Calibri"/>
-                        </a:rPr>
-                        <a:t>+0.48 (.116)</a:t>
-                      </a:r>
-                    </a:p>
-                  </a:txBody>
-                  <a:tcPr marL="91440" marR="91440" marT="27432" marB="27432" anchor="ctr">
-                    <a:solidFill>
-                      <a:srgbClr val="FFFFFF"/>
-                    </a:solidFill>
-                  </a:tcPr>
-                </a:tc>
-                <a:tc>
-                  <a:txBody>
-                    <a:bodyPr/>
-                    <a:lstStyle/>
-                    <a:p>
-                      <a:pPr algn="r"/>
-                      <a:r>
-                        <a:rPr sz="1600" b="0">
-                          <a:solidFill>
-                            <a:srgbClr val="1A1A1A"/>
-                          </a:solidFill>
-                          <a:latin typeface="Calibri"/>
-                        </a:rPr>
-                        <a:t>+0.23 (.404)</a:t>
-                      </a:r>
-                    </a:p>
-                  </a:txBody>
-                  <a:tcPr marL="91440" marR="91440" marT="27432" marB="27432" anchor="ctr">
-                    <a:solidFill>
-                      <a:srgbClr val="FFFFFF"/>
-                    </a:solidFill>
-                  </a:tcPr>
-                </a:tc>
-                <a:tc>
-                  <a:txBody>
-                    <a:bodyPr/>
-                    <a:lstStyle/>
-                    <a:p>
-                      <a:pPr algn="r"/>
-                      <a:r>
-                        <a:rPr sz="1600" b="0">
-                          <a:solidFill>
-                            <a:srgbClr val="1A1A1A"/>
-                          </a:solidFill>
-                          <a:latin typeface="Calibri"/>
-                        </a:rPr>
-                        <a:t>+0.44 (.110)</a:t>
-                      </a:r>
-                    </a:p>
-                  </a:txBody>
-                  <a:tcPr marL="91440" marR="91440" marT="27432" marB="27432" anchor="ctr">
-                    <a:solidFill>
-                      <a:srgbClr val="FFFFFF"/>
-                    </a:solidFill>
-                  </a:tcPr>
-                </a:tc>
-              </a:tr>
-              <a:tr h="475488">
-                <a:tc>
-                  <a:txBody>
-                    <a:bodyPr/>
-                    <a:lstStyle/>
-                    <a:p>
-                      <a:pPr algn="l"/>
-                      <a:r>
-                        <a:rPr sz="1600" b="1">
-                          <a:solidFill>
-                            <a:srgbClr val="1A1A1A"/>
-                          </a:solidFill>
-                          <a:latin typeface="Calibri"/>
-                        </a:rPr>
-                        <a:t>all four together</a:t>
-                      </a:r>
-                    </a:p>
-                  </a:txBody>
-                  <a:tcPr marL="91440" marR="91440" marT="27432" marB="27432" anchor="ctr">
-                    <a:solidFill>
-                      <a:srgbClr val="F4F6F8"/>
-                    </a:solidFill>
-                  </a:tcPr>
-                </a:tc>
-                <a:tc>
-                  <a:txBody>
-                    <a:bodyPr/>
-                    <a:lstStyle/>
-                    <a:p>
-                      <a:pPr algn="r"/>
-                      <a:r>
-                        <a:rPr sz="1600" b="1">
-                          <a:solidFill>
-                            <a:srgbClr val="1A1A1A"/>
-                          </a:solidFill>
-                          <a:latin typeface="Calibri"/>
-                        </a:rPr>
-                        <a:t>46%</a:t>
-                      </a:r>
-                    </a:p>
-                  </a:txBody>
-                  <a:tcPr marL="91440" marR="91440" marT="27432" marB="27432" anchor="ctr">
-                    <a:solidFill>
-                      <a:srgbClr val="F4F6F8"/>
-                    </a:solidFill>
-                  </a:tcPr>
-                </a:tc>
-                <a:tc>
-                  <a:txBody>
-                    <a:bodyPr/>
-                    <a:lstStyle/>
-                    <a:p>
-                      <a:pPr algn="r"/>
-                      <a:r>
-                        <a:rPr sz="1600" b="1">
-                          <a:solidFill>
-                            <a:srgbClr val="1A1A1A"/>
-                          </a:solidFill>
-                          <a:latin typeface="Calibri"/>
-                        </a:rPr>
-                        <a:t>+0.52 (.091)</a:t>
-                      </a:r>
-                    </a:p>
-                  </a:txBody>
-                  <a:tcPr marL="91440" marR="91440" marT="27432" marB="27432" anchor="ctr">
-                    <a:solidFill>
-                      <a:srgbClr val="F4F6F8"/>
-                    </a:solidFill>
-                  </a:tcPr>
-                </a:tc>
-                <a:tc>
-                  <a:txBody>
-                    <a:bodyPr/>
-                    <a:lstStyle/>
-                    <a:p>
-                      <a:pPr algn="r"/>
-                      <a:r>
-                        <a:rPr sz="1600" b="1">
-                          <a:solidFill>
-                            <a:srgbClr val="1A1A1A"/>
-                          </a:solidFill>
-                          <a:latin typeface="Calibri"/>
-                        </a:rPr>
-                        <a:t>−0.03 (.919)</a:t>
-                      </a:r>
-                    </a:p>
-                  </a:txBody>
-                  <a:tcPr marL="91440" marR="91440" marT="27432" marB="27432" anchor="ctr">
-                    <a:solidFill>
-                      <a:srgbClr val="F4F6F8"/>
-                    </a:solidFill>
-                  </a:tcPr>
-                </a:tc>
-                <a:tc>
-                  <a:txBody>
-                    <a:bodyPr/>
-                    <a:lstStyle/>
-                    <a:p>
-                      <a:pPr algn="r"/>
-                      <a:r>
-                        <a:rPr sz="1600" b="1">
-                          <a:solidFill>
-                            <a:srgbClr val="1A1A1A"/>
-                          </a:solidFill>
-                          <a:latin typeface="Calibri"/>
-                        </a:rPr>
-                        <a:t>+0.73 (.011)</a:t>
-                      </a:r>
-                    </a:p>
-                  </a:txBody>
-                  <a:tcPr marL="91440" marR="91440" marT="27432" marB="27432" anchor="ctr">
-                    <a:solidFill>
-                      <a:srgbClr val="F4F6F8"/>
-                    </a:solidFill>
-                  </a:tcPr>
-                </a:tc>
-              </a:tr>
-            </a:tbl>
-          </a:graphicData>
-        </a:graphic>
-      </p:graphicFrame>
-      <p:sp>
-        <p:nvSpPr>
-          <p:cNvPr id="53" name="TextBox 52"/>
-          <p:cNvSpPr txBox="1"/>
-          <p:nvPr/>
-        </p:nvSpPr>
-        <p:spPr>
-          <a:xfrm>
-            <a:off x="1005840" y="26314827"/>
-            <a:ext cx="9555480" cy="693420"/>
-          </a:xfrm>
-          <a:prstGeom prst="rect">
-            <a:avLst/>
-          </a:prstGeom>
-          <a:noFill/>
-        </p:spPr>
-        <p:txBody>
-          <a:bodyPr wrap="square" lIns="0" rIns="0" tIns="0" bIns="0" anchor="t">
-            <a:spAutoFit/>
-          </a:bodyPr>
-          <a:lstStyle/>
-          <a:p>
-            <a:pPr algn="l">
-              <a:lnSpc>
-                <a:spcPct val="128000"/>
-              </a:lnSpc>
-              <a:spcAft>
-                <a:spcPts val="0"/>
-              </a:spcAft>
-            </a:pPr>
-            <a:r>
-              <a:rPr sz="2100" b="0" i="0">
-                <a:solidFill>
-                  <a:srgbClr val="5F6670"/>
+              <a:t>What accounts for the warmth</a:t>
+            </a:r>
+          </a:p>
+        </p:txBody>
+      </p:sp>
+      <p:sp>
+        <p:nvSpPr>
+          <p:cNvPr id="71" name="TextBox 70"/>
+          <p:cNvSpPr txBox="1"/>
+          <p:nvPr/>
+        </p:nvSpPr>
+        <p:spPr>
+          <a:xfrm>
+            <a:off x="11384280" y="20207028"/>
+            <a:ext cx="3840480" cy="365760"/>
+          </a:xfrm>
+          <a:prstGeom prst="rect">
+            <a:avLst/>
+          </a:prstGeom>
+          <a:noFill/>
+        </p:spPr>
+        <p:txBody>
+          <a:bodyPr wrap="square" lIns="0" rIns="0" tIns="0" bIns="0" anchor="t">
+            <a:spAutoFit/>
+          </a:bodyPr>
+          <a:lstStyle/>
+          <a:p>
+            <a:pPr algn="l">
+              <a:lnSpc>
+                <a:spcPct val="108000"/>
+              </a:lnSpc>
+              <a:spcAft>
+                <a:spcPts val="0"/>
+              </a:spcAft>
+            </a:pPr>
+            <a:r>
+              <a:rPr sz="2300" b="0" i="0">
+                <a:solidFill>
+                  <a:srgbClr val="1A1A1A"/>
                 </a:solidFill>
                 <a:latin typeface="Calibri"/>
               </a:rPr>
-              <a:t>Each row holds a rival explanation constant and asks again. Cohen's d, permutation p in brackets.</a:t>
-            </a:r>
-          </a:p>
-        </p:txBody>
-      </p:sp>
-      <p:sp>
-        <p:nvSpPr>
-          <p:cNvPr id="54" name="TextBox 53"/>
-          <p:cNvSpPr txBox="1"/>
-          <p:nvPr/>
-        </p:nvSpPr>
-        <p:spPr>
-          <a:xfrm>
-            <a:off x="11384280" y="21835791"/>
-            <a:ext cx="9555480" cy="693420"/>
-          </a:xfrm>
-          <a:prstGeom prst="rect">
-            <a:avLst/>
-          </a:prstGeom>
-          <a:noFill/>
-        </p:spPr>
-        <p:txBody>
-          <a:bodyPr wrap="square" lIns="0" rIns="0" tIns="0" bIns="0" anchor="t">
-            <a:spAutoFit/>
-          </a:bodyPr>
-          <a:lstStyle/>
-          <a:p>
-            <a:pPr algn="l">
-              <a:lnSpc>
-                <a:spcPct val="108000"/>
-              </a:lnSpc>
-              <a:spcAft>
-                <a:spcPts val="0"/>
-              </a:spcAft>
-            </a:pPr>
-            <a:r>
-              <a:rPr sz="4200" b="1" i="0">
-                <a:solidFill>
-                  <a:srgbClr val="1A1A1A"/>
-                </a:solidFill>
-                <a:latin typeface="Cambria"/>
-              </a:rPr>
-              <a:t>What it found</a:t>
-            </a:r>
-          </a:p>
-        </p:txBody>
-      </p:sp>
-      <p:sp>
-        <p:nvSpPr>
-          <p:cNvPr id="55" name="TextBox 54"/>
-          <p:cNvSpPr txBox="1"/>
-          <p:nvPr/>
-        </p:nvSpPr>
-        <p:spPr>
-          <a:xfrm>
-            <a:off x="11384280" y="22721235"/>
-            <a:ext cx="457200" cy="402336"/>
-          </a:xfrm>
-          <a:prstGeom prst="rect">
-            <a:avLst/>
-          </a:prstGeom>
-          <a:noFill/>
-        </p:spPr>
-        <p:txBody>
-          <a:bodyPr wrap="square" lIns="0" rIns="0" tIns="0" bIns="0" anchor="t">
-            <a:spAutoFit/>
-          </a:bodyPr>
-          <a:lstStyle/>
-          <a:p>
-            <a:pPr algn="l">
-              <a:lnSpc>
-                <a:spcPct val="108000"/>
-              </a:lnSpc>
-              <a:spcAft>
-                <a:spcPts val="0"/>
-              </a:spcAft>
-            </a:pPr>
-            <a:r>
-              <a:rPr sz="2800" b="1" i="0">
-                <a:solidFill>
-                  <a:srgbClr val="B07C1F"/>
-                </a:solidFill>
-                <a:latin typeface="Cambria"/>
-              </a:rPr>
-              <a:t>1</a:t>
-            </a:r>
-          </a:p>
-        </p:txBody>
-      </p:sp>
-      <p:sp>
-        <p:nvSpPr>
-          <p:cNvPr id="56" name="TextBox 55"/>
-          <p:cNvSpPr txBox="1"/>
-          <p:nvPr/>
-        </p:nvSpPr>
-        <p:spPr>
-          <a:xfrm>
-            <a:off x="11932920" y="22693803"/>
-            <a:ext cx="9006840" cy="462280"/>
-          </a:xfrm>
-          <a:prstGeom prst="rect">
-            <a:avLst/>
-          </a:prstGeom>
-          <a:noFill/>
-        </p:spPr>
-        <p:txBody>
-          <a:bodyPr wrap="square" lIns="0" rIns="0" tIns="0" bIns="0" anchor="t">
-            <a:spAutoFit/>
-          </a:bodyPr>
-          <a:lstStyle/>
-          <a:p>
-            <a:pPr algn="l">
-              <a:lnSpc>
-                <a:spcPct val="108000"/>
-              </a:lnSpc>
-              <a:spcAft>
-                <a:spcPts val="0"/>
-              </a:spcAft>
-            </a:pPr>
-            <a:r>
-              <a:rPr sz="2800" b="1" i="0">
-                <a:solidFill>
-                  <a:srgbClr val="1A1A1A"/>
-                </a:solidFill>
-                <a:latin typeface="Cambria"/>
-              </a:rPr>
-              <a:t>Naming a country warms the picture</a:t>
-            </a:r>
-          </a:p>
-        </p:txBody>
-      </p:sp>
-      <p:sp>
-        <p:nvSpPr>
-          <p:cNvPr id="57" name="TextBox 56"/>
-          <p:cNvSpPr txBox="1"/>
-          <p:nvPr/>
-        </p:nvSpPr>
-        <p:spPr>
-          <a:xfrm>
-            <a:off x="11932920" y="23210947"/>
-            <a:ext cx="9006840" cy="759459"/>
-          </a:xfrm>
-          <a:prstGeom prst="rect">
-            <a:avLst/>
-          </a:prstGeom>
-          <a:noFill/>
-        </p:spPr>
-        <p:txBody>
-          <a:bodyPr wrap="square" lIns="0" rIns="0" tIns="0" bIns="0" anchor="t">
-            <a:spAutoFit/>
-          </a:bodyPr>
-          <a:lstStyle/>
-          <a:p>
-            <a:pPr algn="l">
-              <a:lnSpc>
-                <a:spcPct val="128000"/>
-              </a:lnSpc>
-              <a:spcAft>
-                <a:spcPts val="0"/>
-              </a:spcAft>
-            </a:pPr>
-            <a:r>
-              <a:rPr sz="2300" b="0" i="0">
-                <a:solidFill>
-                  <a:srgbClr val="5F6670"/>
-                </a:solidFill>
-                <a:latin typeface="Calibri"/>
-              </a:rPr>
-              <a:t>53 of 60 beat the model's no-country default. Norway alone is cooler.</a:t>
-            </a:r>
-          </a:p>
-        </p:txBody>
-      </p:sp>
-      <p:sp>
-        <p:nvSpPr>
-          <p:cNvPr id="58" name="TextBox 57"/>
-          <p:cNvSpPr txBox="1"/>
-          <p:nvPr/>
-        </p:nvSpPr>
-        <p:spPr>
-          <a:xfrm>
-            <a:off x="11384280" y="24253871"/>
-            <a:ext cx="457200" cy="402336"/>
-          </a:xfrm>
-          <a:prstGeom prst="rect">
-            <a:avLst/>
-          </a:prstGeom>
-          <a:noFill/>
-        </p:spPr>
-        <p:txBody>
-          <a:bodyPr wrap="square" lIns="0" rIns="0" tIns="0" bIns="0" anchor="t">
-            <a:spAutoFit/>
-          </a:bodyPr>
-          <a:lstStyle/>
-          <a:p>
-            <a:pPr algn="l">
-              <a:lnSpc>
-                <a:spcPct val="108000"/>
-              </a:lnSpc>
-              <a:spcAft>
-                <a:spcPts val="0"/>
-              </a:spcAft>
-            </a:pPr>
-            <a:r>
-              <a:rPr sz="2800" b="1" i="0">
-                <a:solidFill>
-                  <a:srgbClr val="B07C1F"/>
-                </a:solidFill>
-                <a:latin typeface="Cambria"/>
-              </a:rPr>
-              <a:t>2</a:t>
-            </a:r>
-          </a:p>
-        </p:txBody>
-      </p:sp>
-      <p:sp>
-        <p:nvSpPr>
-          <p:cNvPr id="59" name="TextBox 58"/>
-          <p:cNvSpPr txBox="1"/>
-          <p:nvPr/>
-        </p:nvSpPr>
-        <p:spPr>
-          <a:xfrm>
-            <a:off x="11932920" y="24226439"/>
-            <a:ext cx="9006840" cy="462280"/>
-          </a:xfrm>
-          <a:prstGeom prst="rect">
-            <a:avLst/>
-          </a:prstGeom>
-          <a:noFill/>
-        </p:spPr>
-        <p:txBody>
-          <a:bodyPr wrap="square" lIns="0" rIns="0" tIns="0" bIns="0" anchor="t">
-            <a:spAutoFit/>
-          </a:bodyPr>
-          <a:lstStyle/>
-          <a:p>
-            <a:pPr algn="l">
-              <a:lnSpc>
-                <a:spcPct val="108000"/>
-              </a:lnSpc>
-              <a:spcAft>
-                <a:spcPts val="0"/>
-              </a:spcAft>
-            </a:pPr>
-            <a:r>
-              <a:rPr sz="2800" b="1" i="0">
-                <a:solidFill>
-                  <a:srgbClr val="1A1A1A"/>
-                </a:solidFill>
-                <a:latin typeface="Cambria"/>
-              </a:rPr>
-              <a:t>Income does not survive the controls</a:t>
-            </a:r>
-          </a:p>
-        </p:txBody>
-      </p:sp>
-      <p:sp>
-        <p:nvSpPr>
-          <p:cNvPr id="60" name="TextBox 59"/>
-          <p:cNvSpPr txBox="1"/>
-          <p:nvPr/>
-        </p:nvSpPr>
-        <p:spPr>
-          <a:xfrm>
-            <a:off x="11932920" y="24743583"/>
-            <a:ext cx="9006840" cy="759459"/>
-          </a:xfrm>
-          <a:prstGeom prst="rect">
-            <a:avLst/>
-          </a:prstGeom>
-          <a:noFill/>
-        </p:spPr>
-        <p:txBody>
-          <a:bodyPr wrap="square" lIns="0" rIns="0" tIns="0" bIns="0" anchor="t">
-            <a:spAutoFit/>
-          </a:bodyPr>
-          <a:lstStyle/>
-          <a:p>
-            <a:pPr algn="l">
-              <a:lnSpc>
-                <a:spcPct val="128000"/>
-              </a:lnSpc>
-              <a:spcAft>
-                <a:spcPts val="0"/>
-              </a:spcAft>
-            </a:pPr>
-            <a:r>
-              <a:rPr sz="2300" b="0" i="0">
-                <a:solidFill>
-                  <a:srgbClr val="5F6670"/>
-                </a:solidFill>
-                <a:latin typeface="Calibri"/>
-              </a:rPr>
-              <a:t>d = +0.72 falls to +0.52, no better than chance. Forest cover is what moves it — not heat, not dryness, not latitude.</a:t>
-            </a:r>
-          </a:p>
-        </p:txBody>
-      </p:sp>
-      <p:sp>
-        <p:nvSpPr>
-          <p:cNvPr id="61" name="TextBox 60"/>
-          <p:cNvSpPr txBox="1"/>
-          <p:nvPr/>
-        </p:nvSpPr>
-        <p:spPr>
-          <a:xfrm>
-            <a:off x="11384280" y="25786507"/>
-            <a:ext cx="457200" cy="402336"/>
-          </a:xfrm>
-          <a:prstGeom prst="rect">
-            <a:avLst/>
-          </a:prstGeom>
-          <a:noFill/>
-        </p:spPr>
-        <p:txBody>
-          <a:bodyPr wrap="square" lIns="0" rIns="0" tIns="0" bIns="0" anchor="t">
-            <a:spAutoFit/>
-          </a:bodyPr>
-          <a:lstStyle/>
-          <a:p>
-            <a:pPr algn="l">
-              <a:lnSpc>
-                <a:spcPct val="108000"/>
-              </a:lnSpc>
-              <a:spcAft>
-                <a:spcPts val="0"/>
-              </a:spcAft>
-            </a:pPr>
-            <a:r>
-              <a:rPr sz="2800" b="1" i="0">
-                <a:solidFill>
-                  <a:srgbClr val="B07C1F"/>
-                </a:solidFill>
-                <a:latin typeface="Cambria"/>
-              </a:rPr>
-              <a:t>3</a:t>
-            </a:r>
-          </a:p>
-        </p:txBody>
-      </p:sp>
-      <p:sp>
-        <p:nvSpPr>
-          <p:cNvPr id="62" name="TextBox 61"/>
-          <p:cNvSpPr txBox="1"/>
-          <p:nvPr/>
-        </p:nvSpPr>
-        <p:spPr>
-          <a:xfrm>
-            <a:off x="11932920" y="25759075"/>
-            <a:ext cx="9006840" cy="462280"/>
-          </a:xfrm>
-          <a:prstGeom prst="rect">
-            <a:avLst/>
-          </a:prstGeom>
-          <a:noFill/>
-        </p:spPr>
-        <p:txBody>
-          <a:bodyPr wrap="square" lIns="0" rIns="0" tIns="0" bIns="0" anchor="t">
-            <a:spAutoFit/>
-          </a:bodyPr>
-          <a:lstStyle/>
-          <a:p>
-            <a:pPr algn="l">
-              <a:lnSpc>
-                <a:spcPct val="108000"/>
-              </a:lnSpc>
-              <a:spcAft>
-                <a:spcPts val="0"/>
-              </a:spcAft>
-            </a:pPr>
-            <a:r>
-              <a:rPr sz="2800" b="1" i="0">
-                <a:solidFill>
-                  <a:srgbClr val="1A1A1A"/>
-                </a:solidFill>
-                <a:latin typeface="Cambria"/>
-              </a:rPr>
-              <a:t>Latitude was the wrong confound</a:t>
-            </a:r>
-          </a:p>
-        </p:txBody>
-      </p:sp>
-      <p:sp>
-        <p:nvSpPr>
-          <p:cNvPr id="63" name="TextBox 62"/>
-          <p:cNvSpPr txBox="1"/>
-          <p:nvPr/>
-        </p:nvSpPr>
-        <p:spPr>
-          <a:xfrm>
-            <a:off x="11932920" y="26276219"/>
-            <a:ext cx="9006840" cy="759459"/>
-          </a:xfrm>
-          <a:prstGeom prst="rect">
-            <a:avLst/>
-          </a:prstGeom>
-          <a:noFill/>
-        </p:spPr>
-        <p:txBody>
-          <a:bodyPr wrap="square" lIns="0" rIns="0" tIns="0" bIns="0" anchor="t">
-            <a:spAutoFit/>
-          </a:bodyPr>
-          <a:lstStyle/>
-          <a:p>
-            <a:pPr algn="l">
-              <a:lnSpc>
-                <a:spcPct val="128000"/>
-              </a:lnSpc>
-              <a:spcAft>
-                <a:spcPts val="0"/>
-              </a:spcAft>
-            </a:pPr>
-            <a:r>
-              <a:rPr sz="2300" b="0" i="0">
-                <a:solidFill>
-                  <a:srgbClr val="5F6670"/>
-                </a:solidFill>
-                <a:latin typeface="Calibri"/>
-              </a:rPr>
-              <a:t>The country list was built to defeat it. It explains 5%. Forest cover explains 30%.</a:t>
-            </a:r>
-          </a:p>
-        </p:txBody>
-      </p:sp>
-      <p:sp>
-        <p:nvSpPr>
-          <p:cNvPr id="64" name="TextBox 63"/>
-          <p:cNvSpPr txBox="1"/>
-          <p:nvPr/>
-        </p:nvSpPr>
-        <p:spPr>
-          <a:xfrm>
-            <a:off x="11384280" y="27319143"/>
-            <a:ext cx="457200" cy="402336"/>
-          </a:xfrm>
-          <a:prstGeom prst="rect">
-            <a:avLst/>
-          </a:prstGeom>
-          <a:noFill/>
-        </p:spPr>
-        <p:txBody>
-          <a:bodyPr wrap="square" lIns="0" rIns="0" tIns="0" bIns="0" anchor="t">
-            <a:spAutoFit/>
-          </a:bodyPr>
-          <a:lstStyle/>
-          <a:p>
-            <a:pPr algn="l">
-              <a:lnSpc>
-                <a:spcPct val="108000"/>
-              </a:lnSpc>
-              <a:spcAft>
-                <a:spcPts val="0"/>
-              </a:spcAft>
-            </a:pPr>
-            <a:r>
-              <a:rPr sz="2800" b="1" i="0">
-                <a:solidFill>
-                  <a:srgbClr val="B07C1F"/>
-                </a:solidFill>
-                <a:latin typeface="Cambria"/>
-              </a:rPr>
-              <a:t>4</a:t>
-            </a:r>
-          </a:p>
-        </p:txBody>
-      </p:sp>
-      <p:sp>
-        <p:nvSpPr>
-          <p:cNvPr id="65" name="TextBox 64"/>
-          <p:cNvSpPr txBox="1"/>
-          <p:nvPr/>
-        </p:nvSpPr>
-        <p:spPr>
-          <a:xfrm>
-            <a:off x="11932920" y="27291711"/>
-            <a:ext cx="9006840" cy="462280"/>
-          </a:xfrm>
-          <a:prstGeom prst="rect">
-            <a:avLst/>
-          </a:prstGeom>
-          <a:noFill/>
-        </p:spPr>
-        <p:txBody>
-          <a:bodyPr wrap="square" lIns="0" rIns="0" tIns="0" bIns="0" anchor="t">
-            <a:spAutoFit/>
-          </a:bodyPr>
-          <a:lstStyle/>
-          <a:p>
-            <a:pPr algn="l">
-              <a:lnSpc>
-                <a:spcPct val="108000"/>
-              </a:lnSpc>
-              <a:spcAft>
-                <a:spcPts val="0"/>
-              </a:spcAft>
-            </a:pPr>
-            <a:r>
-              <a:rPr sz="2800" b="1" i="0">
-                <a:solidFill>
-                  <a:srgbClr val="1A1A1A"/>
-                </a:solidFill>
-                <a:latin typeface="Cambria"/>
-              </a:rPr>
-              <a:t>Africa's warmth is climate. Asia's is not</a:t>
-            </a:r>
-          </a:p>
-        </p:txBody>
-      </p:sp>
-      <p:sp>
-        <p:nvSpPr>
-          <p:cNvPr id="66" name="TextBox 65"/>
-          <p:cNvSpPr txBox="1"/>
-          <p:nvPr/>
-        </p:nvSpPr>
-        <p:spPr>
-          <a:xfrm>
-            <a:off x="11932920" y="27808855"/>
-            <a:ext cx="9006840" cy="759459"/>
-          </a:xfrm>
-          <a:prstGeom prst="rect">
-            <a:avLst/>
-          </a:prstGeom>
-          <a:noFill/>
-        </p:spPr>
-        <p:txBody>
-          <a:bodyPr wrap="square" lIns="0" rIns="0" tIns="0" bIns="0" anchor="t">
-            <a:spAutoFit/>
-          </a:bodyPr>
-          <a:lstStyle/>
-          <a:p>
-            <a:pPr algn="l">
-              <a:lnSpc>
-                <a:spcPct val="128000"/>
-              </a:lnSpc>
-              <a:spcAft>
-                <a:spcPts val="0"/>
-              </a:spcAft>
-            </a:pPr>
-            <a:r>
-              <a:rPr sz="2300" b="0" i="0">
-                <a:solidFill>
-                  <a:srgbClr val="5F6670"/>
-                </a:solidFill>
-                <a:latin typeface="Calibri"/>
-              </a:rPr>
-              <a:t>Africa's gap vanishes (−0.03). Asia's survives everything (+0.73, p = .011) and holds in all six kinds of place.</a:t>
-            </a:r>
-          </a:p>
-        </p:txBody>
-      </p:sp>
-      <p:sp>
-        <p:nvSpPr>
-          <p:cNvPr id="67" name="Rectangle 66"/>
+              <a:t>forest cover</a:t>
+            </a:r>
+          </a:p>
+        </p:txBody>
+      </p:sp>
+      <p:sp>
+        <p:nvSpPr>
+          <p:cNvPr id="72" name="Rounded Rectangle 71"/>
           <p:cNvSpPr/>
           <p:nvPr/>
         </p:nvSpPr>
         <p:spPr>
           <a:xfrm>
-            <a:off x="1005840" y="29098667"/>
-            <a:ext cx="19933920" cy="12801"/>
-          </a:xfrm>
-          <a:prstGeom prst="rect">
-            <a:avLst/>
+            <a:off x="15224760" y="20188740"/>
+            <a:ext cx="4434840" cy="329184"/>
+          </a:xfrm>
+          <a:prstGeom prst="roundRect">
+            <a:avLst>
+              <a:gd name="adj" fmla="val 30000"/>
+            </a:avLst>
           </a:prstGeom>
           <a:solidFill>
-            <a:srgbClr val="D8DCE2"/>
+            <a:srgbClr val="B07C1F"/>
           </a:solidFill>
           <a:ln>
             <a:noFill/>
@@ -6786,14 +6211,14 @@
       </p:sp>
       <p:sp>
         <p:nvSpPr>
-          <p:cNvPr id="68" name="TextBox 67"/>
-          <p:cNvSpPr txBox="1"/>
-          <p:nvPr/>
-        </p:nvSpPr>
-        <p:spPr>
-          <a:xfrm>
-            <a:off x="1005840" y="29482715"/>
-            <a:ext cx="19933920" cy="512064"/>
+          <p:cNvPr id="73" name="TextBox 72"/>
+          <p:cNvSpPr txBox="1"/>
+          <p:nvPr/>
+        </p:nvSpPr>
+        <p:spPr>
+          <a:xfrm>
+            <a:off x="19805904" y="20170452"/>
+            <a:ext cx="1097280" cy="420624"/>
           </a:xfrm>
           <a:prstGeom prst="rect">
             <a:avLst/>
@@ -6815,369 +6240,77 @@
               </a:spcAft>
             </a:pPr>
             <a:r>
-              <a:rPr sz="4200" b="1" i="0">
+              <a:rPr sz="2600" b="1" i="0">
+                <a:solidFill>
+                  <a:srgbClr val="B07C1F"/>
+                </a:solidFill>
+                <a:latin typeface="Cambria"/>
+              </a:rPr>
+              <a:t>30%</a:t>
+            </a:r>
+          </a:p>
+        </p:txBody>
+      </p:sp>
+      <p:sp>
+        <p:nvSpPr>
+          <p:cNvPr id="74" name="TextBox 73"/>
+          <p:cNvSpPr txBox="1"/>
+          <p:nvPr/>
+        </p:nvSpPr>
+        <p:spPr>
+          <a:xfrm>
+            <a:off x="11384280" y="20847108"/>
+            <a:ext cx="3840480" cy="365760"/>
+          </a:xfrm>
+          <a:prstGeom prst="rect">
+            <a:avLst/>
+          </a:prstGeom>
+          <a:noFill/>
+        </p:spPr>
+        <p:txBody>
+          <a:bodyPr wrap="square" lIns="0" rIns="0" tIns="0" bIns="0" anchor="t">
+            <a:spAutoFit/>
+          </a:bodyPr>
+          <a:lstStyle/>
+          <a:p>
+            <a:pPr algn="l">
+              <a:lnSpc>
+                <a:spcPct val="108000"/>
+              </a:lnSpc>
+              <a:spcAft>
+                <a:spcPts val="0"/>
+              </a:spcAft>
+            </a:pPr>
+            <a:r>
+              <a:rPr sz="2300" b="0" i="0">
                 <a:solidFill>
                   <a:srgbClr val="1A1A1A"/>
                 </a:solidFill>
-                <a:latin typeface="Cambria"/>
-              </a:rPr>
-              <a:t>What it cannot show</a:t>
-            </a:r>
-          </a:p>
-        </p:txBody>
-      </p:sp>
-      <p:sp>
-        <p:nvSpPr>
-          <p:cNvPr id="69" name="TextBox 68"/>
-          <p:cNvSpPr txBox="1"/>
-          <p:nvPr/>
-        </p:nvSpPr>
-        <p:spPr>
-          <a:xfrm>
-            <a:off x="1005840" y="30131939"/>
-            <a:ext cx="182880" cy="274320"/>
-          </a:xfrm>
-          <a:prstGeom prst="rect">
-            <a:avLst/>
-          </a:prstGeom>
-          <a:noFill/>
-        </p:spPr>
-        <p:txBody>
-          <a:bodyPr wrap="square" lIns="0" rIns="0" tIns="0" bIns="0" anchor="t">
-            <a:spAutoFit/>
-          </a:bodyPr>
-          <a:lstStyle/>
-          <a:p>
-            <a:pPr algn="l">
-              <a:lnSpc>
-                <a:spcPct val="108000"/>
-              </a:lnSpc>
-              <a:spcAft>
-                <a:spcPts val="0"/>
-              </a:spcAft>
-            </a:pPr>
-            <a:r>
-              <a:rPr sz="2100" b="1" i="0">
-                <a:solidFill>
-                  <a:srgbClr val="B07C1F"/>
-                </a:solidFill>
                 <a:latin typeface="Calibri"/>
               </a:rPr>
-              <a:t>•</a:t>
-            </a:r>
-          </a:p>
-        </p:txBody>
-      </p:sp>
-      <p:sp>
-        <p:nvSpPr>
-          <p:cNvPr id="70" name="TextBox 69"/>
-          <p:cNvSpPr txBox="1"/>
-          <p:nvPr/>
-        </p:nvSpPr>
-        <p:spPr>
-          <a:xfrm>
-            <a:off x="1280160" y="30104507"/>
-            <a:ext cx="9281160" cy="379729"/>
-          </a:xfrm>
-          <a:prstGeom prst="rect">
-            <a:avLst/>
-          </a:prstGeom>
-          <a:noFill/>
-        </p:spPr>
-        <p:txBody>
-          <a:bodyPr wrap="square" lIns="0" rIns="0" tIns="0" bIns="0" anchor="t">
-            <a:spAutoFit/>
-          </a:bodyPr>
-          <a:lstStyle/>
-          <a:p>
-            <a:pPr algn="l">
-              <a:lnSpc>
-                <a:spcPct val="128000"/>
-              </a:lnSpc>
-              <a:spcAft>
-                <a:spcPts val="0"/>
-              </a:spcAft>
-            </a:pPr>
-            <a:r>
-              <a:rPr sz="2300" b="0" i="0">
-                <a:solidFill>
-                  <a:srgbClr val="5F6670"/>
-                </a:solidFill>
-                <a:latin typeface="Calibri"/>
-              </a:rPr>
-              <a:t>One model, one prompt template, one language.</a:t>
-            </a:r>
-          </a:p>
-        </p:txBody>
-      </p:sp>
-      <p:sp>
-        <p:nvSpPr>
-          <p:cNvPr id="71" name="TextBox 70"/>
-          <p:cNvSpPr txBox="1"/>
-          <p:nvPr/>
-        </p:nvSpPr>
-        <p:spPr>
-          <a:xfrm>
-            <a:off x="1005840" y="30676261"/>
-            <a:ext cx="182880" cy="274320"/>
-          </a:xfrm>
-          <a:prstGeom prst="rect">
-            <a:avLst/>
-          </a:prstGeom>
-          <a:noFill/>
-        </p:spPr>
-        <p:txBody>
-          <a:bodyPr wrap="square" lIns="0" rIns="0" tIns="0" bIns="0" anchor="t">
-            <a:spAutoFit/>
-          </a:bodyPr>
-          <a:lstStyle/>
-          <a:p>
-            <a:pPr algn="l">
-              <a:lnSpc>
-                <a:spcPct val="108000"/>
-              </a:lnSpc>
-              <a:spcAft>
-                <a:spcPts val="0"/>
-              </a:spcAft>
-            </a:pPr>
-            <a:r>
-              <a:rPr sz="2100" b="1" i="0">
-                <a:solidFill>
-                  <a:srgbClr val="B07C1F"/>
-                </a:solidFill>
-                <a:latin typeface="Calibri"/>
-              </a:rPr>
-              <a:t>•</a:t>
-            </a:r>
-          </a:p>
-        </p:txBody>
-      </p:sp>
-      <p:sp>
-        <p:nvSpPr>
-          <p:cNvPr id="72" name="TextBox 71"/>
-          <p:cNvSpPr txBox="1"/>
-          <p:nvPr/>
-        </p:nvSpPr>
-        <p:spPr>
-          <a:xfrm>
-            <a:off x="1280160" y="30648829"/>
-            <a:ext cx="9281160" cy="759459"/>
-          </a:xfrm>
-          <a:prstGeom prst="rect">
-            <a:avLst/>
-          </a:prstGeom>
-          <a:noFill/>
-        </p:spPr>
-        <p:txBody>
-          <a:bodyPr wrap="square" lIns="0" rIns="0" tIns="0" bIns="0" anchor="t">
-            <a:spAutoFit/>
-          </a:bodyPr>
-          <a:lstStyle/>
-          <a:p>
-            <a:pPr algn="l">
-              <a:lnSpc>
-                <a:spcPct val="128000"/>
-              </a:lnSpc>
-              <a:spcAft>
-                <a:spcPts val="0"/>
-              </a:spcAft>
-            </a:pPr>
-            <a:r>
-              <a:rPr sz="2300" b="0" i="0">
-                <a:solidFill>
-                  <a:srgbClr val="5F6670"/>
-                </a:solidFill>
-                <a:latin typeface="Calibri"/>
-              </a:rPr>
-              <a:t>Four country averages is a blunt control; 54% of the spread is unexplained.</a:t>
-            </a:r>
-          </a:p>
-        </p:txBody>
-      </p:sp>
-      <p:sp>
-        <p:nvSpPr>
-          <p:cNvPr id="73" name="TextBox 72"/>
-          <p:cNvSpPr txBox="1"/>
-          <p:nvPr/>
-        </p:nvSpPr>
-        <p:spPr>
-          <a:xfrm>
-            <a:off x="11384280" y="30131939"/>
-            <a:ext cx="182880" cy="274320"/>
-          </a:xfrm>
-          <a:prstGeom prst="rect">
-            <a:avLst/>
-          </a:prstGeom>
-          <a:noFill/>
-        </p:spPr>
-        <p:txBody>
-          <a:bodyPr wrap="square" lIns="0" rIns="0" tIns="0" bIns="0" anchor="t">
-            <a:spAutoFit/>
-          </a:bodyPr>
-          <a:lstStyle/>
-          <a:p>
-            <a:pPr algn="l">
-              <a:lnSpc>
-                <a:spcPct val="108000"/>
-              </a:lnSpc>
-              <a:spcAft>
-                <a:spcPts val="0"/>
-              </a:spcAft>
-            </a:pPr>
-            <a:r>
-              <a:rPr sz="2100" b="1" i="0">
-                <a:solidFill>
-                  <a:srgbClr val="B07C1F"/>
-                </a:solidFill>
-                <a:latin typeface="Calibri"/>
-              </a:rPr>
-              <a:t>•</a:t>
-            </a:r>
-          </a:p>
-        </p:txBody>
-      </p:sp>
-      <p:sp>
-        <p:nvSpPr>
-          <p:cNvPr id="74" name="TextBox 73"/>
-          <p:cNvSpPr txBox="1"/>
-          <p:nvPr/>
-        </p:nvSpPr>
-        <p:spPr>
-          <a:xfrm>
-            <a:off x="11658600" y="30104507"/>
-            <a:ext cx="9281160" cy="379729"/>
-          </a:xfrm>
-          <a:prstGeom prst="rect">
-            <a:avLst/>
-          </a:prstGeom>
-          <a:noFill/>
-        </p:spPr>
-        <p:txBody>
-          <a:bodyPr wrap="square" lIns="0" rIns="0" tIns="0" bIns="0" anchor="t">
-            <a:spAutoFit/>
-          </a:bodyPr>
-          <a:lstStyle/>
-          <a:p>
-            <a:pPr algn="l">
-              <a:lnSpc>
-                <a:spcPct val="128000"/>
-              </a:lnSpc>
-              <a:spcAft>
-                <a:spcPts val="0"/>
-              </a:spcAft>
-            </a:pPr>
-            <a:r>
-              <a:rPr sz="2300" b="0" i="0">
-                <a:solidFill>
-                  <a:srgbClr val="5F6670"/>
-                </a:solidFill>
-                <a:latin typeface="Calibri"/>
-              </a:rPr>
-              <a:t>Controlling for climate may control away part of the question.</a:t>
-            </a:r>
-          </a:p>
-        </p:txBody>
-      </p:sp>
-      <p:sp>
-        <p:nvSpPr>
-          <p:cNvPr id="75" name="TextBox 74"/>
-          <p:cNvSpPr txBox="1"/>
-          <p:nvPr/>
-        </p:nvSpPr>
-        <p:spPr>
-          <a:xfrm>
-            <a:off x="11384280" y="30676261"/>
-            <a:ext cx="182880" cy="274320"/>
-          </a:xfrm>
-          <a:prstGeom prst="rect">
-            <a:avLst/>
-          </a:prstGeom>
-          <a:noFill/>
-        </p:spPr>
-        <p:txBody>
-          <a:bodyPr wrap="square" lIns="0" rIns="0" tIns="0" bIns="0" anchor="t">
-            <a:spAutoFit/>
-          </a:bodyPr>
-          <a:lstStyle/>
-          <a:p>
-            <a:pPr algn="l">
-              <a:lnSpc>
-                <a:spcPct val="108000"/>
-              </a:lnSpc>
-              <a:spcAft>
-                <a:spcPts val="0"/>
-              </a:spcAft>
-            </a:pPr>
-            <a:r>
-              <a:rPr sz="2100" b="1" i="0">
-                <a:solidFill>
-                  <a:srgbClr val="B07C1F"/>
-                </a:solidFill>
-                <a:latin typeface="Calibri"/>
-              </a:rPr>
-              <a:t>•</a:t>
-            </a:r>
-          </a:p>
-        </p:txBody>
-      </p:sp>
-      <p:sp>
-        <p:nvSpPr>
-          <p:cNvPr id="76" name="TextBox 75"/>
-          <p:cNvSpPr txBox="1"/>
-          <p:nvPr/>
-        </p:nvSpPr>
-        <p:spPr>
-          <a:xfrm>
-            <a:off x="11658600" y="30648829"/>
-            <a:ext cx="9281160" cy="759459"/>
-          </a:xfrm>
-          <a:prstGeom prst="rect">
-            <a:avLst/>
-          </a:prstGeom>
-          <a:noFill/>
-        </p:spPr>
-        <p:txBody>
-          <a:bodyPr wrap="square" lIns="0" rIns="0" tIns="0" bIns="0" anchor="t">
-            <a:spAutoFit/>
-          </a:bodyPr>
-          <a:lstStyle/>
-          <a:p>
-            <a:pPr algn="l">
-              <a:lnSpc>
-                <a:spcPct val="128000"/>
-              </a:lnSpc>
-              <a:spcAft>
-                <a:spcPts val="0"/>
-              </a:spcAft>
-            </a:pPr>
-            <a:r>
-              <a:rPr sz="2300" b="0" i="0">
-                <a:solidFill>
-                  <a:srgbClr val="5F6670"/>
-                </a:solidFill>
-                <a:latin typeface="Calibri"/>
-              </a:rPr>
-              <a:t>18 comparisons per metric, and Europe is three countries here against Oceania’s two — only the strongest results carry weight.</a:t>
-            </a:r>
-          </a:p>
-        </p:txBody>
-      </p:sp>
-      <p:sp>
-        <p:nvSpPr>
-          <p:cNvPr id="77" name="Rectangle 76"/>
+              <a:t>mean temperature</a:t>
+            </a:r>
+          </a:p>
+        </p:txBody>
+      </p:sp>
+      <p:sp>
+        <p:nvSpPr>
+          <p:cNvPr id="75" name="Rounded Rectangle 74"/>
           <p:cNvSpPr/>
           <p:nvPr/>
         </p:nvSpPr>
         <p:spPr>
           <a:xfrm>
-            <a:off x="1005840" y="31755761"/>
-            <a:ext cx="19933920" cy="12801"/>
-          </a:xfrm>
-          <a:prstGeom prst="rect">
-            <a:avLst/>
+            <a:off x="15224760" y="20828820"/>
+            <a:ext cx="3695700" cy="329184"/>
+          </a:xfrm>
+          <a:prstGeom prst="roundRect">
+            <a:avLst>
+              <a:gd name="adj" fmla="val 30000"/>
+            </a:avLst>
           </a:prstGeom>
           <a:solidFill>
-            <a:srgbClr val="D8DCE2"/>
+            <a:srgbClr val="C9B68A"/>
           </a:solidFill>
           <a:ln>
             <a:noFill/>
@@ -7208,14 +6341,14 @@
       </p:sp>
       <p:sp>
         <p:nvSpPr>
-          <p:cNvPr id="78" name="TextBox 77"/>
-          <p:cNvSpPr txBox="1"/>
-          <p:nvPr/>
-        </p:nvSpPr>
-        <p:spPr>
-          <a:xfrm>
-            <a:off x="1005840" y="31975217"/>
-            <a:ext cx="19933920" cy="402336"/>
+          <p:cNvPr id="76" name="TextBox 75"/>
+          <p:cNvSpPr txBox="1"/>
+          <p:nvPr/>
+        </p:nvSpPr>
+        <p:spPr>
+          <a:xfrm>
+            <a:off x="19066764" y="20810532"/>
+            <a:ext cx="1097280" cy="420624"/>
           </a:xfrm>
           <a:prstGeom prst="rect">
             <a:avLst/>
@@ -7237,13 +6370,1497 @@
               </a:spcAft>
             </a:pPr>
             <a:r>
+              <a:rPr sz="2600" b="1" i="0">
+                <a:solidFill>
+                  <a:srgbClr val="5F6670"/>
+                </a:solidFill>
+                <a:latin typeface="Cambria"/>
+              </a:rPr>
+              <a:t>25%</a:t>
+            </a:r>
+          </a:p>
+        </p:txBody>
+      </p:sp>
+      <p:sp>
+        <p:nvSpPr>
+          <p:cNvPr id="77" name="TextBox 76"/>
+          <p:cNvSpPr txBox="1"/>
+          <p:nvPr/>
+        </p:nvSpPr>
+        <p:spPr>
+          <a:xfrm>
+            <a:off x="11384280" y="21487188"/>
+            <a:ext cx="3840480" cy="365760"/>
+          </a:xfrm>
+          <a:prstGeom prst="rect">
+            <a:avLst/>
+          </a:prstGeom>
+          <a:noFill/>
+        </p:spPr>
+        <p:txBody>
+          <a:bodyPr wrap="square" lIns="0" rIns="0" tIns="0" bIns="0" anchor="t">
+            <a:spAutoFit/>
+          </a:bodyPr>
+          <a:lstStyle/>
+          <a:p>
+            <a:pPr algn="l">
+              <a:lnSpc>
+                <a:spcPct val="108000"/>
+              </a:lnSpc>
+              <a:spcAft>
+                <a:spcPts val="0"/>
+              </a:spcAft>
+            </a:pPr>
+            <a:r>
+              <a:rPr sz="2300" b="0" i="0">
+                <a:solidFill>
+                  <a:srgbClr val="1A1A1A"/>
+                </a:solidFill>
+                <a:latin typeface="Calibri"/>
+              </a:rPr>
+              <a:t>rainfall</a:t>
+            </a:r>
+          </a:p>
+        </p:txBody>
+      </p:sp>
+      <p:sp>
+        <p:nvSpPr>
+          <p:cNvPr id="78" name="Rounded Rectangle 77"/>
+          <p:cNvSpPr/>
+          <p:nvPr/>
+        </p:nvSpPr>
+        <p:spPr>
+          <a:xfrm>
+            <a:off x="15224760" y="21468900"/>
+            <a:ext cx="2660904" cy="329184"/>
+          </a:xfrm>
+          <a:prstGeom prst="roundRect">
+            <a:avLst>
+              <a:gd name="adj" fmla="val 30000"/>
+            </a:avLst>
+          </a:prstGeom>
+          <a:solidFill>
+            <a:srgbClr val="C9B68A"/>
+          </a:solidFill>
+          <a:ln>
+            <a:noFill/>
+          </a:ln>
+          <a:effectLst/>
+        </p:spPr>
+        <p:style>
+          <a:lnRef idx="1">
+            <a:schemeClr val="accent1"/>
+          </a:lnRef>
+          <a:fillRef idx="3">
+            <a:schemeClr val="accent1"/>
+          </a:fillRef>
+          <a:effectRef idx="2">
+            <a:schemeClr val="accent1"/>
+          </a:effectRef>
+          <a:fontRef idx="minor">
+            <a:schemeClr val="lt1"/>
+          </a:fontRef>
+        </p:style>
+        <p:txBody>
+          <a:bodyPr rtlCol="0" anchor="ctr"/>
+          <a:lstStyle/>
+          <a:p>
+            <a:pPr algn="ctr"/>
+          </a:p>
+        </p:txBody>
+      </p:sp>
+      <p:sp>
+        <p:nvSpPr>
+          <p:cNvPr id="79" name="TextBox 78"/>
+          <p:cNvSpPr txBox="1"/>
+          <p:nvPr/>
+        </p:nvSpPr>
+        <p:spPr>
+          <a:xfrm>
+            <a:off x="18031968" y="21450612"/>
+            <a:ext cx="1097280" cy="420624"/>
+          </a:xfrm>
+          <a:prstGeom prst="rect">
+            <a:avLst/>
+          </a:prstGeom>
+          <a:noFill/>
+        </p:spPr>
+        <p:txBody>
+          <a:bodyPr wrap="square" lIns="0" rIns="0" tIns="0" bIns="0" anchor="t">
+            <a:spAutoFit/>
+          </a:bodyPr>
+          <a:lstStyle/>
+          <a:p>
+            <a:pPr algn="l">
+              <a:lnSpc>
+                <a:spcPct val="108000"/>
+              </a:lnSpc>
+              <a:spcAft>
+                <a:spcPts val="0"/>
+              </a:spcAft>
+            </a:pPr>
+            <a:r>
+              <a:rPr sz="2600" b="1" i="0">
+                <a:solidFill>
+                  <a:srgbClr val="5F6670"/>
+                </a:solidFill>
+                <a:latin typeface="Cambria"/>
+              </a:rPr>
+              <a:t>18%</a:t>
+            </a:r>
+          </a:p>
+        </p:txBody>
+      </p:sp>
+      <p:sp>
+        <p:nvSpPr>
+          <p:cNvPr id="80" name="TextBox 79"/>
+          <p:cNvSpPr txBox="1"/>
+          <p:nvPr/>
+        </p:nvSpPr>
+        <p:spPr>
+          <a:xfrm>
+            <a:off x="11384280" y="22127268"/>
+            <a:ext cx="3840480" cy="365760"/>
+          </a:xfrm>
+          <a:prstGeom prst="rect">
+            <a:avLst/>
+          </a:prstGeom>
+          <a:noFill/>
+        </p:spPr>
+        <p:txBody>
+          <a:bodyPr wrap="square" lIns="0" rIns="0" tIns="0" bIns="0" anchor="t">
+            <a:spAutoFit/>
+          </a:bodyPr>
+          <a:lstStyle/>
+          <a:p>
+            <a:pPr algn="l">
+              <a:lnSpc>
+                <a:spcPct val="108000"/>
+              </a:lnSpc>
+              <a:spcAft>
+                <a:spcPts val="0"/>
+              </a:spcAft>
+            </a:pPr>
+            <a:r>
+              <a:rPr sz="2300" b="0" i="0">
+                <a:solidFill>
+                  <a:srgbClr val="1A1A1A"/>
+                </a:solidFill>
+                <a:latin typeface="Calibri"/>
+              </a:rPr>
+              <a:t>latitude</a:t>
+            </a:r>
+          </a:p>
+        </p:txBody>
+      </p:sp>
+      <p:sp>
+        <p:nvSpPr>
+          <p:cNvPr id="81" name="Rounded Rectangle 80"/>
+          <p:cNvSpPr/>
+          <p:nvPr/>
+        </p:nvSpPr>
+        <p:spPr>
+          <a:xfrm>
+            <a:off x="15224760" y="22108980"/>
+            <a:ext cx="739140" cy="329184"/>
+          </a:xfrm>
+          <a:prstGeom prst="roundRect">
+            <a:avLst>
+              <a:gd name="adj" fmla="val 30000"/>
+            </a:avLst>
+          </a:prstGeom>
+          <a:solidFill>
+            <a:srgbClr val="C9B68A"/>
+          </a:solidFill>
+          <a:ln>
+            <a:noFill/>
+          </a:ln>
+          <a:effectLst/>
+        </p:spPr>
+        <p:style>
+          <a:lnRef idx="1">
+            <a:schemeClr val="accent1"/>
+          </a:lnRef>
+          <a:fillRef idx="3">
+            <a:schemeClr val="accent1"/>
+          </a:fillRef>
+          <a:effectRef idx="2">
+            <a:schemeClr val="accent1"/>
+          </a:effectRef>
+          <a:fontRef idx="minor">
+            <a:schemeClr val="lt1"/>
+          </a:fontRef>
+        </p:style>
+        <p:txBody>
+          <a:bodyPr rtlCol="0" anchor="ctr"/>
+          <a:lstStyle/>
+          <a:p>
+            <a:pPr algn="ctr"/>
+          </a:p>
+        </p:txBody>
+      </p:sp>
+      <p:sp>
+        <p:nvSpPr>
+          <p:cNvPr id="82" name="TextBox 81"/>
+          <p:cNvSpPr txBox="1"/>
+          <p:nvPr/>
+        </p:nvSpPr>
+        <p:spPr>
+          <a:xfrm>
+            <a:off x="16110204" y="22090692"/>
+            <a:ext cx="1097280" cy="420624"/>
+          </a:xfrm>
+          <a:prstGeom prst="rect">
+            <a:avLst/>
+          </a:prstGeom>
+          <a:noFill/>
+        </p:spPr>
+        <p:txBody>
+          <a:bodyPr wrap="square" lIns="0" rIns="0" tIns="0" bIns="0" anchor="t">
+            <a:spAutoFit/>
+          </a:bodyPr>
+          <a:lstStyle/>
+          <a:p>
+            <a:pPr algn="l">
+              <a:lnSpc>
+                <a:spcPct val="108000"/>
+              </a:lnSpc>
+              <a:spcAft>
+                <a:spcPts val="0"/>
+              </a:spcAft>
+            </a:pPr>
+            <a:r>
+              <a:rPr sz="2600" b="1" i="0">
+                <a:solidFill>
+                  <a:srgbClr val="5F6670"/>
+                </a:solidFill>
+                <a:latin typeface="Cambria"/>
+              </a:rPr>
+              <a:t>5%</a:t>
+            </a:r>
+          </a:p>
+        </p:txBody>
+      </p:sp>
+      <p:sp>
+        <p:nvSpPr>
+          <p:cNvPr id="83" name="TextBox 82"/>
+          <p:cNvSpPr txBox="1"/>
+          <p:nvPr/>
+        </p:nvSpPr>
+        <p:spPr>
+          <a:xfrm>
+            <a:off x="11384280" y="22785636"/>
+            <a:ext cx="9555480" cy="693420"/>
+          </a:xfrm>
+          <a:prstGeom prst="rect">
+            <a:avLst/>
+          </a:prstGeom>
+          <a:noFill/>
+        </p:spPr>
+        <p:txBody>
+          <a:bodyPr wrap="square" lIns="0" rIns="0" tIns="0" bIns="0" anchor="t">
+            <a:spAutoFit/>
+          </a:bodyPr>
+          <a:lstStyle/>
+          <a:p>
+            <a:pPr algn="l">
+              <a:lnSpc>
+                <a:spcPct val="128000"/>
+              </a:lnSpc>
+              <a:spcAft>
+                <a:spcPts val="0"/>
+              </a:spcAft>
+            </a:pPr>
+            <a:r>
+              <a:rPr sz="2100" b="0" i="0">
+                <a:solidFill>
+                  <a:srgbClr val="5F6670"/>
+                </a:solidFill>
+                <a:latin typeface="Calibri"/>
+              </a:rPr>
+              <a:t>What each rival explanation accounts for alone. Latitude — the confound the country list was built to defeat — was the wrong one.</a:t>
+            </a:r>
+          </a:p>
+        </p:txBody>
+      </p:sp>
+      <p:sp>
+        <p:nvSpPr>
+          <p:cNvPr id="84" name="Rectangle 83"/>
+          <p:cNvSpPr/>
+          <p:nvPr/>
+        </p:nvSpPr>
+        <p:spPr>
+          <a:xfrm>
+            <a:off x="1005840" y="24135085"/>
+            <a:ext cx="19933920" cy="12801"/>
+          </a:xfrm>
+          <a:prstGeom prst="rect">
+            <a:avLst/>
+          </a:prstGeom>
+          <a:solidFill>
+            <a:srgbClr val="D8DCE2"/>
+          </a:solidFill>
+          <a:ln>
+            <a:noFill/>
+          </a:ln>
+          <a:effectLst/>
+        </p:spPr>
+        <p:style>
+          <a:lnRef idx="1">
+            <a:schemeClr val="accent1"/>
+          </a:lnRef>
+          <a:fillRef idx="3">
+            <a:schemeClr val="accent1"/>
+          </a:fillRef>
+          <a:effectRef idx="2">
+            <a:schemeClr val="accent1"/>
+          </a:effectRef>
+          <a:fontRef idx="minor">
+            <a:schemeClr val="lt1"/>
+          </a:fontRef>
+        </p:style>
+        <p:txBody>
+          <a:bodyPr rtlCol="0" anchor="ctr"/>
+          <a:lstStyle/>
+          <a:p>
+            <a:pPr algn="ctr"/>
+          </a:p>
+        </p:txBody>
+      </p:sp>
+      <p:sp>
+        <p:nvSpPr>
+          <p:cNvPr id="85" name="TextBox 84"/>
+          <p:cNvSpPr txBox="1"/>
+          <p:nvPr/>
+        </p:nvSpPr>
+        <p:spPr>
+          <a:xfrm>
+            <a:off x="1005840" y="24372829"/>
+            <a:ext cx="19933920" cy="594360"/>
+          </a:xfrm>
+          <a:prstGeom prst="rect">
+            <a:avLst/>
+          </a:prstGeom>
+          <a:noFill/>
+        </p:spPr>
+        <p:txBody>
+          <a:bodyPr wrap="square" lIns="0" rIns="0" tIns="0" bIns="0" anchor="t">
+            <a:spAutoFit/>
+          </a:bodyPr>
+          <a:lstStyle/>
+          <a:p>
+            <a:pPr algn="l">
+              <a:lnSpc>
+                <a:spcPct val="108000"/>
+              </a:lnSpc>
+              <a:spcAft>
+                <a:spcPts val="0"/>
+              </a:spcAft>
+            </a:pPr>
+            <a:r>
+              <a:rPr sz="3600" b="1" i="0">
+                <a:solidFill>
+                  <a:srgbClr val="1A1A1A"/>
+                </a:solidFill>
+                <a:latin typeface="Cambria"/>
+              </a:rPr>
+              <a:t>What it means</a:t>
+            </a:r>
+          </a:p>
+        </p:txBody>
+      </p:sp>
+      <p:sp>
+        <p:nvSpPr>
+          <p:cNvPr id="86" name="TextBox 85"/>
+          <p:cNvSpPr txBox="1"/>
+          <p:nvPr/>
+        </p:nvSpPr>
+        <p:spPr>
+          <a:xfrm>
+            <a:off x="1005840" y="25122637"/>
+            <a:ext cx="384048" cy="384048"/>
+          </a:xfrm>
+          <a:prstGeom prst="rect">
+            <a:avLst/>
+          </a:prstGeom>
+          <a:noFill/>
+        </p:spPr>
+        <p:txBody>
+          <a:bodyPr wrap="square" lIns="0" rIns="0" tIns="0" bIns="0" anchor="t">
+            <a:spAutoFit/>
+          </a:bodyPr>
+          <a:lstStyle/>
+          <a:p>
+            <a:pPr algn="l">
+              <a:lnSpc>
+                <a:spcPct val="108000"/>
+              </a:lnSpc>
+              <a:spcAft>
+                <a:spcPts val="0"/>
+              </a:spcAft>
+            </a:pPr>
+            <a:r>
+              <a:rPr sz="2100" b="0" i="0">
+                <a:solidFill>
+                  <a:srgbClr val="B07C1F"/>
+                </a:solidFill>
+                <a:latin typeface="Calibri"/>
+              </a:rPr>
+              <a:t>●</a:t>
+            </a:r>
+          </a:p>
+        </p:txBody>
+      </p:sp>
+      <p:sp>
+        <p:nvSpPr>
+          <p:cNvPr id="87" name="TextBox 86"/>
+          <p:cNvSpPr txBox="1"/>
+          <p:nvPr/>
+        </p:nvSpPr>
+        <p:spPr>
+          <a:xfrm>
+            <a:off x="1463040" y="25095205"/>
+            <a:ext cx="9098280" cy="429260"/>
+          </a:xfrm>
+          <a:prstGeom prst="rect">
+            <a:avLst/>
+          </a:prstGeom>
+          <a:noFill/>
+        </p:spPr>
+        <p:txBody>
+          <a:bodyPr wrap="square" lIns="0" rIns="0" tIns="0" bIns="0" anchor="t">
+            <a:spAutoFit/>
+          </a:bodyPr>
+          <a:lstStyle/>
+          <a:p>
+            <a:pPr algn="l">
+              <a:lnSpc>
+                <a:spcPct val="108000"/>
+              </a:lnSpc>
+              <a:spcAft>
+                <a:spcPts val="0"/>
+              </a:spcAft>
+            </a:pPr>
+            <a:r>
+              <a:rPr sz="2600" b="1" i="0">
+                <a:solidFill>
+                  <a:srgbClr val="1A1A1A"/>
+                </a:solidFill>
+                <a:latin typeface="Cambria"/>
+              </a:rPr>
+              <a:t>The intuitive claim is wrong</a:t>
+            </a:r>
+          </a:p>
+        </p:txBody>
+      </p:sp>
+      <p:sp>
+        <p:nvSpPr>
+          <p:cNvPr id="88" name="TextBox 87"/>
+          <p:cNvSpPr txBox="1"/>
+          <p:nvPr/>
+        </p:nvSpPr>
+        <p:spPr>
+          <a:xfrm>
+            <a:off x="1463040" y="25579329"/>
+            <a:ext cx="9098280" cy="759459"/>
+          </a:xfrm>
+          <a:prstGeom prst="rect">
+            <a:avLst/>
+          </a:prstGeom>
+          <a:noFill/>
+        </p:spPr>
+        <p:txBody>
+          <a:bodyPr wrap="square" lIns="0" rIns="0" tIns="0" bIns="0" anchor="t">
+            <a:spAutoFit/>
+          </a:bodyPr>
+          <a:lstStyle/>
+          <a:p>
+            <a:pPr algn="l">
+              <a:lnSpc>
+                <a:spcPct val="128000"/>
+              </a:lnSpc>
+              <a:spcAft>
+                <a:spcPts val="0"/>
+              </a:spcAft>
+            </a:pPr>
+            <a:r>
+              <a:rPr sz="2300" b="0" i="0">
+                <a:solidFill>
+                  <a:srgbClr val="5F6670"/>
+                </a:solidFill>
+                <a:latin typeface="Calibri"/>
+              </a:rPr>
+              <a:t>It is not warming poor countries but dry, bare ones — substantially what they look like.</a:t>
+            </a:r>
+          </a:p>
+        </p:txBody>
+      </p:sp>
+      <p:sp>
+        <p:nvSpPr>
+          <p:cNvPr id="89" name="TextBox 88"/>
+          <p:cNvSpPr txBox="1"/>
+          <p:nvPr/>
+        </p:nvSpPr>
+        <p:spPr>
+          <a:xfrm>
+            <a:off x="11384280" y="25122637"/>
+            <a:ext cx="384048" cy="384048"/>
+          </a:xfrm>
+          <a:prstGeom prst="rect">
+            <a:avLst/>
+          </a:prstGeom>
+          <a:noFill/>
+        </p:spPr>
+        <p:txBody>
+          <a:bodyPr wrap="square" lIns="0" rIns="0" tIns="0" bIns="0" anchor="t">
+            <a:spAutoFit/>
+          </a:bodyPr>
+          <a:lstStyle/>
+          <a:p>
+            <a:pPr algn="l">
+              <a:lnSpc>
+                <a:spcPct val="108000"/>
+              </a:lnSpc>
+              <a:spcAft>
+                <a:spcPts val="0"/>
+              </a:spcAft>
+            </a:pPr>
+            <a:r>
+              <a:rPr sz="2100" b="0" i="0">
+                <a:solidFill>
+                  <a:srgbClr val="B07C1F"/>
+                </a:solidFill>
+                <a:latin typeface="Calibri"/>
+              </a:rPr>
+              <a:t>●</a:t>
+            </a:r>
+          </a:p>
+        </p:txBody>
+      </p:sp>
+      <p:sp>
+        <p:nvSpPr>
+          <p:cNvPr id="90" name="TextBox 89"/>
+          <p:cNvSpPr txBox="1"/>
+          <p:nvPr/>
+        </p:nvSpPr>
+        <p:spPr>
+          <a:xfrm>
+            <a:off x="11841480" y="25095205"/>
+            <a:ext cx="9098280" cy="429260"/>
+          </a:xfrm>
+          <a:prstGeom prst="rect">
+            <a:avLst/>
+          </a:prstGeom>
+          <a:noFill/>
+        </p:spPr>
+        <p:txBody>
+          <a:bodyPr wrap="square" lIns="0" rIns="0" tIns="0" bIns="0" anchor="t">
+            <a:spAutoFit/>
+          </a:bodyPr>
+          <a:lstStyle/>
+          <a:p>
+            <a:pPr algn="l">
+              <a:lnSpc>
+                <a:spcPct val="108000"/>
+              </a:lnSpc>
+              <a:spcAft>
+                <a:spcPts val="0"/>
+              </a:spcAft>
+            </a:pPr>
+            <a:r>
+              <a:rPr sz="2600" b="1" i="0">
+                <a:solidFill>
+                  <a:srgbClr val="1A1A1A"/>
+                </a:solidFill>
+                <a:latin typeface="Cambria"/>
+              </a:rPr>
+              <a:t>“Substantially” is not “entirely”</a:t>
+            </a:r>
+          </a:p>
+        </p:txBody>
+      </p:sp>
+      <p:sp>
+        <p:nvSpPr>
+          <p:cNvPr id="91" name="TextBox 90"/>
+          <p:cNvSpPr txBox="1"/>
+          <p:nvPr/>
+        </p:nvSpPr>
+        <p:spPr>
+          <a:xfrm>
+            <a:off x="11841480" y="25579329"/>
+            <a:ext cx="9098280" cy="759459"/>
+          </a:xfrm>
+          <a:prstGeom prst="rect">
+            <a:avLst/>
+          </a:prstGeom>
+          <a:noFill/>
+        </p:spPr>
+        <p:txBody>
+          <a:bodyPr wrap="square" lIns="0" rIns="0" tIns="0" bIns="0" anchor="t">
+            <a:spAutoFit/>
+          </a:bodyPr>
+          <a:lstStyle/>
+          <a:p>
+            <a:pPr algn="l">
+              <a:lnSpc>
+                <a:spcPct val="128000"/>
+              </a:lnSpc>
+              <a:spcAft>
+                <a:spcPts val="0"/>
+              </a:spcAft>
+            </a:pPr>
+            <a:r>
+              <a:rPr sz="2300" b="0" i="0">
+                <a:solidFill>
+                  <a:srgbClr val="5F6670"/>
+                </a:solidFill>
+                <a:latin typeface="Calibri"/>
+              </a:rPr>
+              <a:t>A regional residual outlives every control. North Korea is humid and half forested, and the warmest thing on the map.</a:t>
+            </a:r>
+          </a:p>
+        </p:txBody>
+      </p:sp>
+      <p:sp>
+        <p:nvSpPr>
+          <p:cNvPr id="92" name="TextBox 91"/>
+          <p:cNvSpPr txBox="1"/>
+          <p:nvPr/>
+        </p:nvSpPr>
+        <p:spPr>
+          <a:xfrm>
+            <a:off x="1005840" y="26549101"/>
+            <a:ext cx="384048" cy="384048"/>
+          </a:xfrm>
+          <a:prstGeom prst="rect">
+            <a:avLst/>
+          </a:prstGeom>
+          <a:noFill/>
+        </p:spPr>
+        <p:txBody>
+          <a:bodyPr wrap="square" lIns="0" rIns="0" tIns="0" bIns="0" anchor="t">
+            <a:spAutoFit/>
+          </a:bodyPr>
+          <a:lstStyle/>
+          <a:p>
+            <a:pPr algn="l">
+              <a:lnSpc>
+                <a:spcPct val="108000"/>
+              </a:lnSpc>
+              <a:spcAft>
+                <a:spcPts val="0"/>
+              </a:spcAft>
+            </a:pPr>
+            <a:r>
+              <a:rPr sz="2100" b="0" i="0">
+                <a:solidFill>
+                  <a:srgbClr val="B07C1F"/>
+                </a:solidFill>
+                <a:latin typeface="Calibri"/>
+              </a:rPr>
+              <a:t>●</a:t>
+            </a:r>
+          </a:p>
+        </p:txBody>
+      </p:sp>
+      <p:sp>
+        <p:nvSpPr>
+          <p:cNvPr id="93" name="TextBox 92"/>
+          <p:cNvSpPr txBox="1"/>
+          <p:nvPr/>
+        </p:nvSpPr>
+        <p:spPr>
+          <a:xfrm>
+            <a:off x="1463040" y="26521669"/>
+            <a:ext cx="9098280" cy="429260"/>
+          </a:xfrm>
+          <a:prstGeom prst="rect">
+            <a:avLst/>
+          </a:prstGeom>
+          <a:noFill/>
+        </p:spPr>
+        <p:txBody>
+          <a:bodyPr wrap="square" lIns="0" rIns="0" tIns="0" bIns="0" anchor="t">
+            <a:spAutoFit/>
+          </a:bodyPr>
+          <a:lstStyle/>
+          <a:p>
+            <a:pPr algn="l">
+              <a:lnSpc>
+                <a:spcPct val="108000"/>
+              </a:lnSpc>
+              <a:spcAft>
+                <a:spcPts val="0"/>
+              </a:spcAft>
+            </a:pPr>
+            <a:r>
+              <a:rPr sz="2600" b="1" i="0">
+                <a:solidFill>
+                  <a:srgbClr val="1A1A1A"/>
+                </a:solidFill>
+                <a:latin typeface="Cambria"/>
+              </a:rPr>
+              <a:t>The method mattered more than the result</a:t>
+            </a:r>
+          </a:p>
+        </p:txBody>
+      </p:sp>
+      <p:sp>
+        <p:nvSpPr>
+          <p:cNvPr id="94" name="TextBox 93"/>
+          <p:cNvSpPr txBox="1"/>
+          <p:nvPr/>
+        </p:nvSpPr>
+        <p:spPr>
+          <a:xfrm>
+            <a:off x="1463040" y="27005793"/>
+            <a:ext cx="9098280" cy="759459"/>
+          </a:xfrm>
+          <a:prstGeom prst="rect">
+            <a:avLst/>
+          </a:prstGeom>
+          <a:noFill/>
+        </p:spPr>
+        <p:txBody>
+          <a:bodyPr wrap="square" lIns="0" rIns="0" tIns="0" bIns="0" anchor="t">
+            <a:spAutoFit/>
+          </a:bodyPr>
+          <a:lstStyle/>
+          <a:p>
+            <a:pPr algn="l">
+              <a:lnSpc>
+                <a:spcPct val="128000"/>
+              </a:lnSpc>
+              <a:spcAft>
+                <a:spcPts val="0"/>
+              </a:spcAft>
+            </a:pPr>
+            <a:r>
+              <a:rPr sz="2300" b="0" i="0">
+                <a:solidFill>
+                  <a:srgbClr val="5F6670"/>
+                </a:solidFill>
+                <a:latin typeface="Calibri"/>
+              </a:rPr>
+              <a:t>Naively measured, income was there at p = .018. It did not survive. An audit without that control would have published it.</a:t>
+            </a:r>
+          </a:p>
+        </p:txBody>
+      </p:sp>
+      <p:sp>
+        <p:nvSpPr>
+          <p:cNvPr id="95" name="TextBox 94"/>
+          <p:cNvSpPr txBox="1"/>
+          <p:nvPr/>
+        </p:nvSpPr>
+        <p:spPr>
+          <a:xfrm>
+            <a:off x="11384280" y="26549101"/>
+            <a:ext cx="384048" cy="384048"/>
+          </a:xfrm>
+          <a:prstGeom prst="rect">
+            <a:avLst/>
+          </a:prstGeom>
+          <a:noFill/>
+        </p:spPr>
+        <p:txBody>
+          <a:bodyPr wrap="square" lIns="0" rIns="0" tIns="0" bIns="0" anchor="t">
+            <a:spAutoFit/>
+          </a:bodyPr>
+          <a:lstStyle/>
+          <a:p>
+            <a:pPr algn="l">
+              <a:lnSpc>
+                <a:spcPct val="108000"/>
+              </a:lnSpc>
+              <a:spcAft>
+                <a:spcPts val="0"/>
+              </a:spcAft>
+            </a:pPr>
+            <a:r>
+              <a:rPr sz="2100" b="0" i="0">
+                <a:solidFill>
+                  <a:srgbClr val="B07C1F"/>
+                </a:solidFill>
+                <a:latin typeface="Calibri"/>
+              </a:rPr>
+              <a:t>●</a:t>
+            </a:r>
+          </a:p>
+        </p:txBody>
+      </p:sp>
+      <p:sp>
+        <p:nvSpPr>
+          <p:cNvPr id="96" name="TextBox 95"/>
+          <p:cNvSpPr txBox="1"/>
+          <p:nvPr/>
+        </p:nvSpPr>
+        <p:spPr>
+          <a:xfrm>
+            <a:off x="11841480" y="26521669"/>
+            <a:ext cx="9098280" cy="429260"/>
+          </a:xfrm>
+          <a:prstGeom prst="rect">
+            <a:avLst/>
+          </a:prstGeom>
+          <a:noFill/>
+        </p:spPr>
+        <p:txBody>
+          <a:bodyPr wrap="square" lIns="0" rIns="0" tIns="0" bIns="0" anchor="t">
+            <a:spAutoFit/>
+          </a:bodyPr>
+          <a:lstStyle/>
+          <a:p>
+            <a:pPr algn="l">
+              <a:lnSpc>
+                <a:spcPct val="108000"/>
+              </a:lnSpc>
+              <a:spcAft>
+                <a:spcPts val="0"/>
+              </a:spcAft>
+            </a:pPr>
+            <a:r>
+              <a:rPr sz="2600" b="1" i="0">
+                <a:solidFill>
+                  <a:srgbClr val="1A1A1A"/>
+                </a:solidFill>
+                <a:latin typeface="Cambria"/>
+              </a:rPr>
+              <a:t>A measurement needs a zero</a:t>
+            </a:r>
+          </a:p>
+        </p:txBody>
+      </p:sp>
+      <p:sp>
+        <p:nvSpPr>
+          <p:cNvPr id="97" name="TextBox 96"/>
+          <p:cNvSpPr txBox="1"/>
+          <p:nvPr/>
+        </p:nvSpPr>
+        <p:spPr>
+          <a:xfrm>
+            <a:off x="11841480" y="27005793"/>
+            <a:ext cx="9098280" cy="759459"/>
+          </a:xfrm>
+          <a:prstGeom prst="rect">
+            <a:avLst/>
+          </a:prstGeom>
+          <a:noFill/>
+        </p:spPr>
+        <p:txBody>
+          <a:bodyPr wrap="square" lIns="0" rIns="0" tIns="0" bIns="0" anchor="t">
+            <a:spAutoFit/>
+          </a:bodyPr>
+          <a:lstStyle/>
+          <a:p>
+            <a:pPr algn="l">
+              <a:lnSpc>
+                <a:spcPct val="128000"/>
+              </a:lnSpc>
+              <a:spcAft>
+                <a:spcPts val="0"/>
+              </a:spcAft>
+            </a:pPr>
+            <a:r>
+              <a:rPr sz="2300" b="0" i="0">
+                <a:solidFill>
+                  <a:srgbClr val="5F6670"/>
+                </a:solidFill>
+                <a:latin typeface="Calibri"/>
+              </a:rPr>
+              <a:t>Ranking countries says who is warmest. Only a no-country baseline says whether anyone is warmed at all.</a:t>
+            </a:r>
+          </a:p>
+        </p:txBody>
+      </p:sp>
+      <p:sp>
+        <p:nvSpPr>
+          <p:cNvPr id="98" name="Rectangle 97"/>
+          <p:cNvSpPr/>
+          <p:nvPr/>
+        </p:nvSpPr>
+        <p:spPr>
+          <a:xfrm>
+            <a:off x="1005840" y="28021285"/>
+            <a:ext cx="19933920" cy="12801"/>
+          </a:xfrm>
+          <a:prstGeom prst="rect">
+            <a:avLst/>
+          </a:prstGeom>
+          <a:solidFill>
+            <a:srgbClr val="D8DCE2"/>
+          </a:solidFill>
+          <a:ln>
+            <a:noFill/>
+          </a:ln>
+          <a:effectLst/>
+        </p:spPr>
+        <p:style>
+          <a:lnRef idx="1">
+            <a:schemeClr val="accent1"/>
+          </a:lnRef>
+          <a:fillRef idx="3">
+            <a:schemeClr val="accent1"/>
+          </a:fillRef>
+          <a:effectRef idx="2">
+            <a:schemeClr val="accent1"/>
+          </a:effectRef>
+          <a:fontRef idx="minor">
+            <a:schemeClr val="lt1"/>
+          </a:fontRef>
+        </p:style>
+        <p:txBody>
+          <a:bodyPr rtlCol="0" anchor="ctr"/>
+          <a:lstStyle/>
+          <a:p>
+            <a:pPr algn="ctr"/>
+          </a:p>
+        </p:txBody>
+      </p:sp>
+      <p:sp>
+        <p:nvSpPr>
+          <p:cNvPr id="99" name="TextBox 98"/>
+          <p:cNvSpPr txBox="1"/>
+          <p:nvPr/>
+        </p:nvSpPr>
+        <p:spPr>
+          <a:xfrm>
+            <a:off x="1005840" y="28149301"/>
+            <a:ext cx="9555480" cy="594360"/>
+          </a:xfrm>
+          <a:prstGeom prst="rect">
+            <a:avLst/>
+          </a:prstGeom>
+          <a:noFill/>
+        </p:spPr>
+        <p:txBody>
+          <a:bodyPr wrap="square" lIns="0" rIns="0" tIns="0" bIns="0" anchor="t">
+            <a:spAutoFit/>
+          </a:bodyPr>
+          <a:lstStyle/>
+          <a:p>
+            <a:pPr algn="l">
+              <a:lnSpc>
+                <a:spcPct val="108000"/>
+              </a:lnSpc>
+              <a:spcAft>
+                <a:spcPts val="0"/>
+              </a:spcAft>
+            </a:pPr>
+            <a:r>
+              <a:rPr sz="3600" b="1" i="0">
+                <a:solidFill>
+                  <a:srgbClr val="1A1A1A"/>
+                </a:solidFill>
+                <a:latin typeface="Cambria"/>
+              </a:rPr>
+              <a:t>What is next</a:t>
+            </a:r>
+          </a:p>
+        </p:txBody>
+      </p:sp>
+      <p:sp>
+        <p:nvSpPr>
+          <p:cNvPr id="100" name="TextBox 99"/>
+          <p:cNvSpPr txBox="1"/>
+          <p:nvPr/>
+        </p:nvSpPr>
+        <p:spPr>
+          <a:xfrm>
+            <a:off x="11384280" y="28076149"/>
+            <a:ext cx="9555480" cy="594360"/>
+          </a:xfrm>
+          <a:prstGeom prst="rect">
+            <a:avLst/>
+          </a:prstGeom>
+          <a:noFill/>
+        </p:spPr>
+        <p:txBody>
+          <a:bodyPr wrap="square" lIns="0" rIns="0" tIns="0" bIns="0" anchor="t">
+            <a:spAutoFit/>
+          </a:bodyPr>
+          <a:lstStyle/>
+          <a:p>
+            <a:pPr algn="l">
+              <a:lnSpc>
+                <a:spcPct val="108000"/>
+              </a:lnSpc>
+              <a:spcAft>
+                <a:spcPts val="0"/>
+              </a:spcAft>
+            </a:pPr>
+            <a:r>
+              <a:rPr sz="3600" b="1" i="0">
+                <a:solidFill>
+                  <a:srgbClr val="1A1A1A"/>
+                </a:solidFill>
+                <a:latin typeface="Cambria"/>
+              </a:rPr>
+              <a:t>What it cannot show</a:t>
+            </a:r>
+          </a:p>
+        </p:txBody>
+      </p:sp>
+      <p:sp>
+        <p:nvSpPr>
+          <p:cNvPr id="101" name="TextBox 100"/>
+          <p:cNvSpPr txBox="1"/>
+          <p:nvPr/>
+        </p:nvSpPr>
+        <p:spPr>
+          <a:xfrm>
+            <a:off x="1005840" y="28899109"/>
+            <a:ext cx="384048" cy="384048"/>
+          </a:xfrm>
+          <a:prstGeom prst="rect">
+            <a:avLst/>
+          </a:prstGeom>
+          <a:noFill/>
+        </p:spPr>
+        <p:txBody>
+          <a:bodyPr wrap="square" lIns="0" rIns="0" tIns="0" bIns="0" anchor="t">
+            <a:spAutoFit/>
+          </a:bodyPr>
+          <a:lstStyle/>
+          <a:p>
+            <a:pPr algn="l">
+              <a:lnSpc>
+                <a:spcPct val="108000"/>
+              </a:lnSpc>
+              <a:spcAft>
+                <a:spcPts val="0"/>
+              </a:spcAft>
+            </a:pPr>
+            <a:r>
+              <a:rPr sz="2100" b="0" i="0">
+                <a:solidFill>
+                  <a:srgbClr val="B07C1F"/>
+                </a:solidFill>
+                <a:latin typeface="Calibri"/>
+              </a:rPr>
+              <a:t>●</a:t>
+            </a:r>
+          </a:p>
+        </p:txBody>
+      </p:sp>
+      <p:sp>
+        <p:nvSpPr>
+          <p:cNvPr id="102" name="TextBox 101"/>
+          <p:cNvSpPr txBox="1"/>
+          <p:nvPr/>
+        </p:nvSpPr>
+        <p:spPr>
+          <a:xfrm>
+            <a:off x="1463040" y="28871677"/>
+            <a:ext cx="9098280" cy="379729"/>
+          </a:xfrm>
+          <a:prstGeom prst="rect">
+            <a:avLst/>
+          </a:prstGeom>
+          <a:noFill/>
+        </p:spPr>
+        <p:txBody>
+          <a:bodyPr wrap="square" lIns="0" rIns="0" tIns="0" bIns="0" anchor="t">
+            <a:spAutoFit/>
+          </a:bodyPr>
+          <a:lstStyle/>
+          <a:p>
+            <a:pPr algn="l">
+              <a:lnSpc>
+                <a:spcPct val="128000"/>
+              </a:lnSpc>
+              <a:spcAft>
+                <a:spcPts val="0"/>
+              </a:spcAft>
+            </a:pPr>
+            <a:r>
+              <a:rPr sz="2300" b="0" i="0">
+                <a:solidFill>
+                  <a:srgbClr val="1A1A1A"/>
+                </a:solidFill>
+                <a:latin typeface="Calibri"/>
+              </a:rPr>
+              <a:t>Why Asia? The residual now needs a mechanism.</a:t>
+            </a:r>
+          </a:p>
+        </p:txBody>
+      </p:sp>
+      <p:sp>
+        <p:nvSpPr>
+          <p:cNvPr id="103" name="TextBox 102"/>
+          <p:cNvSpPr txBox="1"/>
+          <p:nvPr/>
+        </p:nvSpPr>
+        <p:spPr>
+          <a:xfrm>
+            <a:off x="1005840" y="29406855"/>
+            <a:ext cx="384048" cy="384048"/>
+          </a:xfrm>
+          <a:prstGeom prst="rect">
+            <a:avLst/>
+          </a:prstGeom>
+          <a:noFill/>
+        </p:spPr>
+        <p:txBody>
+          <a:bodyPr wrap="square" lIns="0" rIns="0" tIns="0" bIns="0" anchor="t">
+            <a:spAutoFit/>
+          </a:bodyPr>
+          <a:lstStyle/>
+          <a:p>
+            <a:pPr algn="l">
+              <a:lnSpc>
+                <a:spcPct val="108000"/>
+              </a:lnSpc>
+              <a:spcAft>
+                <a:spcPts val="0"/>
+              </a:spcAft>
+            </a:pPr>
+            <a:r>
+              <a:rPr sz="2100" b="0" i="0">
+                <a:solidFill>
+                  <a:srgbClr val="B07C1F"/>
+                </a:solidFill>
+                <a:latin typeface="Calibri"/>
+              </a:rPr>
+              <a:t>●</a:t>
+            </a:r>
+          </a:p>
+        </p:txBody>
+      </p:sp>
+      <p:sp>
+        <p:nvSpPr>
+          <p:cNvPr id="104" name="TextBox 103"/>
+          <p:cNvSpPr txBox="1"/>
+          <p:nvPr/>
+        </p:nvSpPr>
+        <p:spPr>
+          <a:xfrm>
+            <a:off x="1463040" y="29379423"/>
+            <a:ext cx="9098280" cy="759459"/>
+          </a:xfrm>
+          <a:prstGeom prst="rect">
+            <a:avLst/>
+          </a:prstGeom>
+          <a:noFill/>
+        </p:spPr>
+        <p:txBody>
+          <a:bodyPr wrap="square" lIns="0" rIns="0" tIns="0" bIns="0" anchor="t">
+            <a:spAutoFit/>
+          </a:bodyPr>
+          <a:lstStyle/>
+          <a:p>
+            <a:pPr algn="l">
+              <a:lnSpc>
+                <a:spcPct val="128000"/>
+              </a:lnSpc>
+              <a:spcAft>
+                <a:spcPts val="0"/>
+              </a:spcAft>
+            </a:pPr>
+            <a:r>
+              <a:rPr sz="2300" b="0" i="0">
+                <a:solidFill>
+                  <a:srgbClr val="1A1A1A"/>
+                </a:solidFill>
+                <a:latin typeface="Calibri"/>
+              </a:rPr>
+              <a:t>A better climate measure — four country averages leave 54% unexplained.</a:t>
+            </a:r>
+          </a:p>
+        </p:txBody>
+      </p:sp>
+      <p:sp>
+        <p:nvSpPr>
+          <p:cNvPr id="105" name="TextBox 104"/>
+          <p:cNvSpPr txBox="1"/>
+          <p:nvPr/>
+        </p:nvSpPr>
+        <p:spPr>
+          <a:xfrm>
+            <a:off x="1005840" y="30294331"/>
+            <a:ext cx="384048" cy="384048"/>
+          </a:xfrm>
+          <a:prstGeom prst="rect">
+            <a:avLst/>
+          </a:prstGeom>
+          <a:noFill/>
+        </p:spPr>
+        <p:txBody>
+          <a:bodyPr wrap="square" lIns="0" rIns="0" tIns="0" bIns="0" anchor="t">
+            <a:spAutoFit/>
+          </a:bodyPr>
+          <a:lstStyle/>
+          <a:p>
+            <a:pPr algn="l">
+              <a:lnSpc>
+                <a:spcPct val="108000"/>
+              </a:lnSpc>
+              <a:spcAft>
+                <a:spcPts val="0"/>
+              </a:spcAft>
+            </a:pPr>
+            <a:r>
+              <a:rPr sz="2100" b="0" i="0">
+                <a:solidFill>
+                  <a:srgbClr val="B07C1F"/>
+                </a:solidFill>
+                <a:latin typeface="Calibri"/>
+              </a:rPr>
+              <a:t>●</a:t>
+            </a:r>
+          </a:p>
+        </p:txBody>
+      </p:sp>
+      <p:sp>
+        <p:nvSpPr>
+          <p:cNvPr id="106" name="TextBox 105"/>
+          <p:cNvSpPr txBox="1"/>
+          <p:nvPr/>
+        </p:nvSpPr>
+        <p:spPr>
+          <a:xfrm>
+            <a:off x="1463040" y="30266899"/>
+            <a:ext cx="9098280" cy="759459"/>
+          </a:xfrm>
+          <a:prstGeom prst="rect">
+            <a:avLst/>
+          </a:prstGeom>
+          <a:noFill/>
+        </p:spPr>
+        <p:txBody>
+          <a:bodyPr wrap="square" lIns="0" rIns="0" tIns="0" bIns="0" anchor="t">
+            <a:spAutoFit/>
+          </a:bodyPr>
+          <a:lstStyle/>
+          <a:p>
+            <a:pPr algn="l">
+              <a:lnSpc>
+                <a:spcPct val="128000"/>
+              </a:lnSpc>
+              <a:spcAft>
+                <a:spcPts val="0"/>
+              </a:spcAft>
+            </a:pPr>
+            <a:r>
+              <a:rPr sz="2300" b="0" i="0">
+                <a:solidFill>
+                  <a:srgbClr val="1A1A1A"/>
+                </a:solidFill>
+                <a:latin typeface="Calibri"/>
+              </a:rPr>
+              <a:t>Other models and languages: this is one model's habit, not the industry's.</a:t>
+            </a:r>
+          </a:p>
+        </p:txBody>
+      </p:sp>
+      <p:sp>
+        <p:nvSpPr>
+          <p:cNvPr id="107" name="TextBox 106"/>
+          <p:cNvSpPr txBox="1"/>
+          <p:nvPr/>
+        </p:nvSpPr>
+        <p:spPr>
+          <a:xfrm>
+            <a:off x="1005840" y="31181807"/>
+            <a:ext cx="384048" cy="384048"/>
+          </a:xfrm>
+          <a:prstGeom prst="rect">
+            <a:avLst/>
+          </a:prstGeom>
+          <a:noFill/>
+        </p:spPr>
+        <p:txBody>
+          <a:bodyPr wrap="square" lIns="0" rIns="0" tIns="0" bIns="0" anchor="t">
+            <a:spAutoFit/>
+          </a:bodyPr>
+          <a:lstStyle/>
+          <a:p>
+            <a:pPr algn="l">
+              <a:lnSpc>
+                <a:spcPct val="108000"/>
+              </a:lnSpc>
+              <a:spcAft>
+                <a:spcPts val="0"/>
+              </a:spcAft>
+            </a:pPr>
+            <a:r>
+              <a:rPr sz="2100" b="0" i="0">
+                <a:solidFill>
+                  <a:srgbClr val="B07C1F"/>
+                </a:solidFill>
+                <a:latin typeface="Calibri"/>
+              </a:rPr>
+              <a:t>●</a:t>
+            </a:r>
+          </a:p>
+        </p:txBody>
+      </p:sp>
+      <p:sp>
+        <p:nvSpPr>
+          <p:cNvPr id="108" name="TextBox 107"/>
+          <p:cNvSpPr txBox="1"/>
+          <p:nvPr/>
+        </p:nvSpPr>
+        <p:spPr>
+          <a:xfrm>
+            <a:off x="1463040" y="31154375"/>
+            <a:ext cx="9098280" cy="379729"/>
+          </a:xfrm>
+          <a:prstGeom prst="rect">
+            <a:avLst/>
+          </a:prstGeom>
+          <a:noFill/>
+        </p:spPr>
+        <p:txBody>
+          <a:bodyPr wrap="square" lIns="0" rIns="0" tIns="0" bIns="0" anchor="t">
+            <a:spAutoFit/>
+          </a:bodyPr>
+          <a:lstStyle/>
+          <a:p>
+            <a:pPr algn="l">
+              <a:lnSpc>
+                <a:spcPct val="128000"/>
+              </a:lnSpc>
+              <a:spcAft>
+                <a:spcPts val="0"/>
+              </a:spcAft>
+            </a:pPr>
+            <a:r>
+              <a:rPr sz="2300" b="0" i="0">
+                <a:solidFill>
+                  <a:srgbClr val="1A1A1A"/>
+                </a:solidFill>
+                <a:latin typeface="Calibri"/>
+              </a:rPr>
+              <a:t>Content, not just colour: who is in frame and what they are doing.</a:t>
+            </a:r>
+          </a:p>
+        </p:txBody>
+      </p:sp>
+      <p:sp>
+        <p:nvSpPr>
+          <p:cNvPr id="109" name="TextBox 108"/>
+          <p:cNvSpPr txBox="1"/>
+          <p:nvPr/>
+        </p:nvSpPr>
+        <p:spPr>
+          <a:xfrm>
+            <a:off x="11384280" y="28871677"/>
+            <a:ext cx="9555480" cy="1518919"/>
+          </a:xfrm>
+          <a:prstGeom prst="rect">
+            <a:avLst/>
+          </a:prstGeom>
+          <a:noFill/>
+        </p:spPr>
+        <p:txBody>
+          <a:bodyPr wrap="square" lIns="0" rIns="0" tIns="0" bIns="0" anchor="t">
+            <a:spAutoFit/>
+          </a:bodyPr>
+          <a:lstStyle/>
+          <a:p>
+            <a:pPr algn="l">
+              <a:lnSpc>
+                <a:spcPct val="128000"/>
+              </a:lnSpc>
+              <a:spcAft>
+                <a:spcPts val="0"/>
+              </a:spcAft>
+            </a:pPr>
+            <a:r>
+              <a:rPr sz="2300" b="0" i="0">
+                <a:solidFill>
+                  <a:srgbClr val="5F6670"/>
+                </a:solidFill>
+                <a:latin typeface="Calibri"/>
+              </a:rPr>
+              <a:t>Straight-line controls on four country averages cannot separate a stereotype from a climate, only say whether a pattern needs more than climate to describe it. 18 comparisons per metric: lean on the strongest results only.</a:t>
+            </a:r>
+          </a:p>
+        </p:txBody>
+      </p:sp>
+      <p:sp>
+        <p:nvSpPr>
+          <p:cNvPr id="110" name="Rectangle 109"/>
+          <p:cNvSpPr/>
+          <p:nvPr/>
+        </p:nvSpPr>
+        <p:spPr>
+          <a:xfrm>
+            <a:off x="1005840" y="31881577"/>
+            <a:ext cx="19933920" cy="12801"/>
+          </a:xfrm>
+          <a:prstGeom prst="rect">
+            <a:avLst/>
+          </a:prstGeom>
+          <a:solidFill>
+            <a:srgbClr val="D8DCE2"/>
+          </a:solidFill>
+          <a:ln>
+            <a:noFill/>
+          </a:ln>
+          <a:effectLst/>
+        </p:spPr>
+        <p:style>
+          <a:lnRef idx="1">
+            <a:schemeClr val="accent1"/>
+          </a:lnRef>
+          <a:fillRef idx="3">
+            <a:schemeClr val="accent1"/>
+          </a:fillRef>
+          <a:effectRef idx="2">
+            <a:schemeClr val="accent1"/>
+          </a:effectRef>
+          <a:fontRef idx="minor">
+            <a:schemeClr val="lt1"/>
+          </a:fontRef>
+        </p:style>
+        <p:txBody>
+          <a:bodyPr rtlCol="0" anchor="ctr"/>
+          <a:lstStyle/>
+          <a:p>
+            <a:pPr algn="ctr"/>
+          </a:p>
+        </p:txBody>
+      </p:sp>
+      <p:sp>
+        <p:nvSpPr>
+          <p:cNvPr id="111" name="TextBox 110"/>
+          <p:cNvSpPr txBox="1"/>
+          <p:nvPr/>
+        </p:nvSpPr>
+        <p:spPr>
+          <a:xfrm>
+            <a:off x="1005840" y="32046169"/>
+            <a:ext cx="19933920" cy="384048"/>
+          </a:xfrm>
+          <a:prstGeom prst="rect">
+            <a:avLst/>
+          </a:prstGeom>
+          <a:noFill/>
+        </p:spPr>
+        <p:txBody>
+          <a:bodyPr wrap="square" lIns="0" rIns="0" tIns="0" bIns="0" anchor="t">
+            <a:spAutoFit/>
+          </a:bodyPr>
+          <a:lstStyle/>
+          <a:p>
+            <a:pPr algn="l">
+              <a:lnSpc>
+                <a:spcPct val="108000"/>
+              </a:lnSpc>
+              <a:spcAft>
+                <a:spcPts val="0"/>
+              </a:spcAft>
+            </a:pPr>
+            <a:r>
               <a:rPr sz="2200" b="0" i="0">
                 <a:solidFill>
                   <a:srgbClr val="5F6670"/>
                 </a:solidFill>
                 <a:latin typeface="Calibri"/>
               </a:rPr>
-              <a:t>Every prompt, image and measurement — github.com/haydn-s/blurred-lens  ·  October 2026  ·  $185 of compute</a:t>
+              <a:t>Every prompt, image and measurement — github.com/haydn-s/blurred-lens  ·  flux-schnell on Replicate, one pinned version  ·  October 2026  ·  $185 of compute</a:t>
             </a:r>
           </a:p>
         </p:txBody>
